--- a/presentations/00_panorama_corso_pentest.pptx
+++ b/presentations/00_panorama_corso_pentest.pptx
@@ -4,6 +4,9 @@
   <p:sldMasterIdLst>
     <p:sldMasterId id="2147483648" r:id="rId1"/>
   </p:sldMasterIdLst>
+  <p:notesMasterIdLst>
+    <p:notesMasterId r:id="rId21"/>
+  </p:notesMasterIdLst>
   <p:sldIdLst>
     <p:sldId id="256" r:id="rId2"/>
     <p:sldId id="257" r:id="rId3"/>
@@ -25,9 +28,6 @@
     <p:sldId id="273" r:id="rId19"/>
     <p:sldId id="274" r:id="rId20"/>
   </p:sldIdLst>
-  <p:notesMasterIdLst>
-    <p:notesMasterId r:id="rId21"/>
-  </p:notesMasterIdLst>
   <p:sldSz cx="12192000" cy="6858000"/>
   <p:notesSz cx="6858000" cy="12192000"/>
   <p:defaultTextStyle>
@@ -122,6 +122,11 @@
       </a:defRPr>
     </a:lvl9pPr>
   </p:defaultTextStyle>
+  <p:extLst>
+    <p:ext uri="{EFAFB233-063F-42B5-8137-9DF3F51BA10A}">
+      <p15:sldGuideLst xmlns:p15="http://schemas.microsoft.com/office/powerpoint/2012/main"/>
+    </p:ext>
+  </p:extLst>
 </p:presentation>
 </file>
 
@@ -147,234 +152,10 @@
           <a:chExt cx="0" cy="0"/>
         </a:xfrm>
       </p:grpSpPr>
-      <p:sp>
-        <p:nvSpPr>
-          <p:cNvPr id="2" name="Header Placeholder 1"/>
-          <p:cNvSpPr>
-            <a:spLocks noGrp="1"/>
-          </p:cNvSpPr>
-          <p:nvPr>
-            <p:ph type="hdr" sz="quarter"/>
-          </p:nvPr>
-        </p:nvSpPr>
-        <p:spPr>
-          <a:xfrm>
-            <a:off x="0" y="0"/>
-            <a:ext cx="2971800" cy="458788"/>
-          </a:xfrm>
-          <a:prstGeom prst="rect">
-            <a:avLst/>
-          </a:prstGeom>
-        </p:spPr>
-        <p:txBody>
-          <a:bodyPr vert="horz" lIns="91440" tIns="45720" rIns="91440" bIns="45720" rtlCol="0"/>
-          <a:lstStyle>
-            <a:lvl1pPr algn="l">
-              <a:defRPr sz="1200"/>
-            </a:lvl1pPr>
-          </a:lstStyle>
-          <a:p>
-            <a:endParaRPr lang="en-US"/>
-          </a:p>
-        </p:txBody>
-      </p:sp>
-      <p:sp>
-        <p:nvSpPr>
-          <p:cNvPr id="3" name="Date Placeholder 2"/>
-          <p:cNvSpPr>
-            <a:spLocks noGrp="1"/>
-          </p:cNvSpPr>
-          <p:nvPr>
-            <p:ph type="dt" idx="1"/>
-          </p:nvPr>
-        </p:nvSpPr>
-        <p:spPr>
-          <a:xfrm>
-            <a:off x="3884613" y="0"/>
-            <a:ext cx="2971800" cy="458788"/>
-          </a:xfrm>
-          <a:prstGeom prst="rect">
-            <a:avLst/>
-          </a:prstGeom>
-        </p:spPr>
-        <p:txBody>
-          <a:bodyPr vert="horz" lIns="91440" tIns="45720" rIns="91440" bIns="45720" rtlCol="0"/>
-          <a:lstStyle>
-            <a:lvl1pPr algn="r">
-              <a:defRPr sz="1200"/>
-            </a:lvl1pPr>
-          </a:lstStyle>
-          <a:p>
-            <a:fld id="{5282F153-3F37-0F45-9E97-73ACFA13230C}" type="datetimeFigureOut">
-              <a:rPr lang="en-US"/>
-              <a:t>7/23/19</a:t>
-            </a:fld>
-            <a:endParaRPr lang="en-US"/>
-          </a:p>
-        </p:txBody>
-      </p:sp>
-      <p:sp>
-        <p:nvSpPr>
-          <p:cNvPr id="4" name="Slide Image Placeholder 3"/>
-          <p:cNvSpPr>
-            <a:spLocks noGrp="1" noRot="1" noChangeAspect="1"/>
-          </p:cNvSpPr>
-          <p:nvPr>
-            <p:ph type="sldImg" idx="2"/>
-          </p:nvPr>
-        </p:nvSpPr>
-        <p:spPr>
-          <a:xfrm>
-            <a:off x="685800" y="1143000"/>
-            <a:ext cx="5486400" cy="3086100"/>
-          </a:xfrm>
-          <a:prstGeom prst="rect">
-            <a:avLst/>
-          </a:prstGeom>
-          <a:noFill/>
-          <a:ln w="12700">
-            <a:solidFill>
-              <a:prstClr val="black"/>
-            </a:solidFill>
-          </a:ln>
-        </p:spPr>
-        <p:txBody>
-          <a:bodyPr vert="horz" lIns="91440" tIns="45720" rIns="91440" bIns="45720" rtlCol="0" anchor="ctr"/>
-          <a:lstStyle/>
-          <a:p>
-            <a:endParaRPr lang="en-US"/>
-          </a:p>
-        </p:txBody>
-      </p:sp>
-      <p:sp>
-        <p:nvSpPr>
-          <p:cNvPr id="5" name="Notes Placeholder 4"/>
-          <p:cNvSpPr>
-            <a:spLocks noGrp="1"/>
-          </p:cNvSpPr>
-          <p:nvPr>
-            <p:ph type="body" sz="quarter" idx="3"/>
-          </p:nvPr>
-        </p:nvSpPr>
-        <p:spPr>
-          <a:xfrm>
-            <a:off x="685800" y="4400550"/>
-            <a:ext cx="5486400" cy="3600450"/>
-          </a:xfrm>
-          <a:prstGeom prst="rect">
-            <a:avLst/>
-          </a:prstGeom>
-        </p:spPr>
-        <p:txBody>
-          <a:bodyPr vert="horz" lIns="91440" tIns="45720" rIns="91440" bIns="45720" rtlCol="0"/>
-          <a:lstStyle/>
-          <a:p>
-            <a:pPr lvl="0"/>
-            <a:r>
-              <a:rPr lang="en-US"/>
-              <a:t>Click to edit Master text styles</a:t>
-            </a:r>
-          </a:p>
-          <a:p>
-            <a:pPr lvl="1"/>
-            <a:r>
-              <a:rPr lang="en-US"/>
-              <a:t>Second level</a:t>
-            </a:r>
-          </a:p>
-          <a:p>
-            <a:pPr lvl="2"/>
-            <a:r>
-              <a:rPr lang="en-US"/>
-              <a:t>Third level</a:t>
-            </a:r>
-          </a:p>
-          <a:p>
-            <a:pPr lvl="3"/>
-            <a:r>
-              <a:rPr lang="en-US"/>
-              <a:t>Fourth level</a:t>
-            </a:r>
-          </a:p>
-          <a:p>
-            <a:pPr lvl="4"/>
-            <a:r>
-              <a:rPr lang="en-US"/>
-              <a:t>Fifth level</a:t>
-            </a:r>
-          </a:p>
-        </p:txBody>
-      </p:sp>
-      <p:sp>
-        <p:nvSpPr>
-          <p:cNvPr id="6" name="Footer Placeholder 5"/>
-          <p:cNvSpPr>
-            <a:spLocks noGrp="1"/>
-          </p:cNvSpPr>
-          <p:nvPr>
-            <p:ph type="ftr" sz="quarter" idx="4"/>
-          </p:nvPr>
-        </p:nvSpPr>
-        <p:spPr>
-          <a:xfrm>
-            <a:off x="0" y="8685213"/>
-            <a:ext cx="2971800" cy="458787"/>
-          </a:xfrm>
-          <a:prstGeom prst="rect">
-            <a:avLst/>
-          </a:prstGeom>
-        </p:spPr>
-        <p:txBody>
-          <a:bodyPr vert="horz" lIns="91440" tIns="45720" rIns="91440" bIns="45720" rtlCol="0" anchor="b"/>
-          <a:lstStyle>
-            <a:lvl1pPr algn="l">
-              <a:defRPr sz="1200"/>
-            </a:lvl1pPr>
-          </a:lstStyle>
-          <a:p>
-            <a:endParaRPr lang="en-US"/>
-          </a:p>
-        </p:txBody>
-      </p:sp>
-      <p:sp>
-        <p:nvSpPr>
-          <p:cNvPr id="7" name="Slide Number Placeholder 6"/>
-          <p:cNvSpPr>
-            <a:spLocks noGrp="1"/>
-          </p:cNvSpPr>
-          <p:nvPr>
-            <p:ph type="sldNum" sz="quarter" idx="5"/>
-          </p:nvPr>
-        </p:nvSpPr>
-        <p:spPr>
-          <a:xfrm>
-            <a:off x="3884613" y="8685213"/>
-            <a:ext cx="2971800" cy="458787"/>
-          </a:xfrm>
-          <a:prstGeom prst="rect">
-            <a:avLst/>
-          </a:prstGeom>
-        </p:spPr>
-        <p:txBody>
-          <a:bodyPr vert="horz" lIns="91440" tIns="45720" rIns="91440" bIns="45720" rtlCol="0" anchor="b"/>
-          <a:lstStyle>
-            <a:lvl1pPr algn="r">
-              <a:defRPr sz="1200"/>
-            </a:lvl1pPr>
-          </a:lstStyle>
-          <a:p>
-            <a:fld id="{CE5E9CC1-C706-0F49-92D6-E571CC5EEA8F}" type="slidenum">
-              <a:rPr lang="en-US"/>
-              <a:t>‹#›</a:t>
-            </a:fld>
-            <a:endParaRPr lang="en-US"/>
-          </a:p>
-        </p:txBody>
-      </p:sp>
     </p:spTree>
     <p:extLst>
       <p:ext uri="{BB962C8B-B14F-4D97-AF65-F5344CB8AC3E}">
-        <p14:creationId xmlns:p14="http://schemas.microsoft.com/office/powerpoint/2010/main" val="1024086991"/>
+        <p14:creationId xmlns:p14="http://schemas.microsoft.com/office/powerpoint/2010/main" val="3918235600"/>
       </p:ext>
     </p:extLst>
   </p:cSld>
@@ -522,7 +303,6 @@
               <a:rPr lang="en-US" dirty="0"/>
               <a:t>[object Object],[object Object]</a:t>
             </a:r>
-            <a:endParaRPr lang="en-US" dirty="0"/>
           </a:p>
         </p:txBody>
       </p:sp>
@@ -610,7 +390,6 @@
               <a:rPr lang="en-US" dirty="0"/>
               <a:t>[object Object],[object Object]</a:t>
             </a:r>
-            <a:endParaRPr lang="en-US" dirty="0"/>
           </a:p>
         </p:txBody>
       </p:sp>
@@ -698,7 +477,6 @@
               <a:rPr lang="en-US" dirty="0"/>
               <a:t>[object Object]</a:t>
             </a:r>
-            <a:endParaRPr lang="en-US" dirty="0"/>
           </a:p>
         </p:txBody>
       </p:sp>
@@ -786,7 +564,6 @@
               <a:rPr lang="en-US" dirty="0"/>
               <a:t>[object Object],[object Object]</a:t>
             </a:r>
-            <a:endParaRPr lang="en-US" dirty="0"/>
           </a:p>
         </p:txBody>
       </p:sp>
@@ -874,7 +651,6 @@
               <a:rPr lang="en-US" dirty="0"/>
               <a:t>[object Object],[object Object]</a:t>
             </a:r>
-            <a:endParaRPr lang="en-US" dirty="0"/>
           </a:p>
         </p:txBody>
       </p:sp>
@@ -962,7 +738,6 @@
               <a:rPr lang="en-US" dirty="0"/>
               <a:t>[object Object]</a:t>
             </a:r>
-            <a:endParaRPr lang="en-US" dirty="0"/>
           </a:p>
         </p:txBody>
       </p:sp>
@@ -1050,7 +825,6 @@
               <a:rPr lang="en-US" dirty="0"/>
               <a:t>[object Object]</a:t>
             </a:r>
-            <a:endParaRPr lang="en-US" dirty="0"/>
           </a:p>
         </p:txBody>
       </p:sp>
@@ -1138,7 +912,6 @@
               <a:rPr lang="en-US" dirty="0"/>
               <a:t>[object Object]</a:t>
             </a:r>
-            <a:endParaRPr lang="en-US" dirty="0"/>
           </a:p>
         </p:txBody>
       </p:sp>
@@ -1226,7 +999,6 @@
               <a:rPr lang="en-US" dirty="0"/>
               <a:t>[object Object]</a:t>
             </a:r>
-            <a:endParaRPr lang="en-US" dirty="0"/>
           </a:p>
         </p:txBody>
       </p:sp>
@@ -1314,7 +1086,6 @@
               <a:rPr lang="en-US" dirty="0"/>
               <a:t>[object Object]</a:t>
             </a:r>
-            <a:endParaRPr lang="en-US" dirty="0"/>
           </a:p>
         </p:txBody>
       </p:sp>
@@ -1402,7 +1173,6 @@
               <a:rPr lang="en-US" dirty="0"/>
               <a:t>[object Object],[object Object],[object Object]</a:t>
             </a:r>
-            <a:endParaRPr lang="en-US" dirty="0"/>
           </a:p>
         </p:txBody>
       </p:sp>
@@ -1490,7 +1260,6 @@
               <a:rPr lang="en-US" dirty="0"/>
               <a:t>[object Object],[object Object]</a:t>
             </a:r>
-            <a:endParaRPr lang="en-US" dirty="0"/>
           </a:p>
         </p:txBody>
       </p:sp>
@@ -1578,7 +1347,6 @@
               <a:rPr lang="en-US" dirty="0"/>
               <a:t>[object Object],[object Object]</a:t>
             </a:r>
-            <a:endParaRPr lang="en-US" dirty="0"/>
           </a:p>
         </p:txBody>
       </p:sp>
@@ -1666,7 +1434,6 @@
               <a:rPr lang="en-US" dirty="0"/>
               <a:t>[object Object],[object Object]</a:t>
             </a:r>
-            <a:endParaRPr lang="en-US" dirty="0"/>
           </a:p>
         </p:txBody>
       </p:sp>
@@ -1754,7 +1521,6 @@
               <a:rPr lang="en-US" dirty="0"/>
               <a:t>[object Object],[object Object]</a:t>
             </a:r>
-            <a:endParaRPr lang="en-US" dirty="0"/>
           </a:p>
         </p:txBody>
       </p:sp>
@@ -1842,7 +1608,6 @@
               <a:rPr lang="en-US" dirty="0"/>
               <a:t>[object Object],[object Object]</a:t>
             </a:r>
-            <a:endParaRPr lang="en-US" dirty="0"/>
           </a:p>
         </p:txBody>
       </p:sp>
@@ -1930,7 +1695,6 @@
               <a:rPr lang="en-US" dirty="0"/>
               <a:t>[object Object],[object Object]</a:t>
             </a:r>
-            <a:endParaRPr lang="en-US" dirty="0"/>
           </a:p>
         </p:txBody>
       </p:sp>
@@ -2018,7 +1782,6 @@
               <a:rPr lang="en-US" dirty="0"/>
               <a:t>[object Object],[object Object]</a:t>
             </a:r>
-            <a:endParaRPr lang="en-US" dirty="0"/>
           </a:p>
         </p:txBody>
       </p:sp>
@@ -2106,7 +1869,6 @@
               <a:rPr lang="en-US" dirty="0"/>
               <a:t>[object Object],[object Object]</a:t>
             </a:r>
-            <a:endParaRPr lang="en-US" dirty="0"/>
           </a:p>
         </p:txBody>
       </p:sp>
@@ -2184,6 +1946,7 @@
         <a:solidFill>
           <a:srgbClr val="08131F"/>
         </a:solidFill>
+        <a:effectLst/>
       </p:bgPr>
     </p:bg>
     <p:spTree>
@@ -2224,6 +1987,13 @@
             <a:prstDash val="solid"/>
           </a:ln>
         </p:spPr>
+        <p:txBody>
+          <a:bodyPr/>
+          <a:lstStyle/>
+          <a:p>
+            <a:endParaRPr lang="en-US"/>
+          </a:p>
+        </p:txBody>
       </p:sp>
       <p:sp>
         <p:nvSpPr>
@@ -2246,11 +2016,11 @@
           <a:bodyPr wrap="square" lIns="0" tIns="0" rIns="0" bIns="0" rtlCol="0" anchor="ctr"/>
           <a:lstStyle/>
           <a:p>
-            <a:pPr indent="0" marL="0">
-              <a:buNone/>
-            </a:pPr>
-            <a:r>
-              <a:rPr lang="en-US" sz="750" b="1" spc="120" kern="0" dirty="0">
+            <a:pPr marL="0" indent="0">
+              <a:buNone/>
+            </a:pPr>
+            <a:r>
+              <a:rPr lang="en-US" sz="750" b="1" kern="0" spc="120" dirty="0">
                 <a:solidFill>
                   <a:srgbClr val="75899B"/>
                 </a:solidFill>
@@ -2284,7 +2054,7 @@
           </a:prstGeom>
           <a:extLst>
             <a:ext uri="{C572A759-6A51-4108-AA02-DFA0A04FC94B}">
-              <ma14:wrappingTextBoxFlag xmlns:ma14="http://schemas.microsoft.com/office/mac/drawingml/2011/main" val="0"/>
+              <ma14:wrappingTextBoxFlag xmlns:ma14="http://schemas.microsoft.com/office/mac/drawingml/2011/main" xmlns="" val="0"/>
             </a:ext>
           </a:extLst>
         </p:spPr>
@@ -2305,8 +2075,8 @@
           <a:p>
             <a:pPr algn="r"/>
             <a:fld id="{F7021451-1387-4CA6-816F-3879F97B5CBC}" type="slidenum">
-              <a:rPr b="0" lang="en-US"/>
-              <a:t>1002</a:t>
+              <a:rPr lang="en-US" b="0"/>
+              <a:t>‹#›</a:t>
             </a:fld>
             <a:endParaRPr lang="en-US"/>
           </a:p>
@@ -2323,6 +2093,11 @@
 <file path=ppt/slideMasters/slideMaster1.xml><?xml version="1.0" encoding="utf-8"?>
 <p:sldMaster xmlns:a="http://schemas.openxmlformats.org/drawingml/2006/main" xmlns:r="http://schemas.openxmlformats.org/officeDocument/2006/relationships" xmlns:p="http://schemas.openxmlformats.org/presentationml/2006/main">
   <p:cSld>
+    <p:bg>
+      <p:bgRef idx="1001">
+        <a:schemeClr val="bg1"/>
+      </p:bgRef>
+    </p:bg>
     <p:spTree>
       <p:nvGrpSpPr>
         <p:cNvPr id="1" name=""/>
@@ -2357,7 +2132,7 @@
           </a:prstGeom>
           <a:extLst>
             <a:ext uri="{C572A759-6A51-4108-AA02-DFA0A04FC94B}">
-              <ma14:wrappingTextBoxFlag xmlns:ma14="http://schemas.microsoft.com/office/mac/drawingml/2011/main" val="0"/>
+              <ma14:wrappingTextBoxFlag xmlns:ma14="http://schemas.microsoft.com/office/mac/drawingml/2011/main" xmlns="" val="0"/>
             </a:ext>
           </a:extLst>
         </p:spPr>
@@ -2378,8 +2153,8 @@
           <a:p>
             <a:pPr algn="r"/>
             <a:fld id="{F7021451-1387-4CA6-816F-3879F97B5CBC}" type="slidenum">
-              <a:rPr b="0" lang="en-US"/>
-              <a:t>null</a:t>
+              <a:rPr lang="en-US" b="0"/>
+              <a:t>‹#›</a:t>
             </a:fld>
             <a:endParaRPr lang="en-US"/>
           </a:p>
@@ -2654,6 +2429,7 @@
         <a:solidFill>
           <a:srgbClr val="08131F"/>
         </a:solidFill>
+        <a:effectLst/>
       </p:bgPr>
     </p:bg>
     <p:spTree>
@@ -2698,6 +2474,13 @@
             <a:prstDash val="solid"/>
           </a:ln>
         </p:spPr>
+        <p:txBody>
+          <a:bodyPr/>
+          <a:lstStyle/>
+          <a:p>
+            <a:endParaRPr lang="en-US"/>
+          </a:p>
+        </p:txBody>
       </p:sp>
       <p:sp>
         <p:nvSpPr>
@@ -2727,6 +2510,13 @@
             <a:prstDash val="solid"/>
           </a:ln>
         </p:spPr>
+        <p:txBody>
+          <a:bodyPr/>
+          <a:lstStyle/>
+          <a:p>
+            <a:endParaRPr lang="en-US"/>
+          </a:p>
+        </p:txBody>
       </p:sp>
       <p:sp>
         <p:nvSpPr>
@@ -2758,6 +2548,13 @@
             <a:prstDash val="solid"/>
           </a:ln>
         </p:spPr>
+        <p:txBody>
+          <a:bodyPr/>
+          <a:lstStyle/>
+          <a:p>
+            <a:endParaRPr lang="en-US"/>
+          </a:p>
+        </p:txBody>
       </p:sp>
       <p:sp>
         <p:nvSpPr>
@@ -2782,7 +2579,7 @@
           </a:bodyPr>
           <a:lstStyle/>
           <a:p>
-            <a:pPr algn="ctr" indent="0" marL="0">
+            <a:pPr marL="0" indent="0" algn="ctr">
               <a:buNone/>
             </a:pPr>
             <a:r>
@@ -2823,7 +2620,7 @@
           </a:bodyPr>
           <a:lstStyle/>
           <a:p>
-            <a:pPr algn="l" indent="0" marL="0">
+            <a:pPr marL="0" indent="0" algn="l">
               <a:buNone/>
             </a:pPr>
             <a:r>
@@ -2864,7 +2661,7 @@
           </a:bodyPr>
           <a:lstStyle/>
           <a:p>
-            <a:pPr algn="l" indent="0" marL="0">
+            <a:pPr marL="0" indent="0" algn="l">
               <a:buNone/>
             </a:pPr>
             <a:r>
@@ -2905,7 +2702,7 @@
           </a:bodyPr>
           <a:lstStyle/>
           <a:p>
-            <a:pPr algn="l" indent="0" marL="0">
+            <a:pPr marL="0" indent="0" algn="l">
               <a:buNone/>
             </a:pPr>
             <a:r>
@@ -2951,6 +2748,13 @@
             <a:prstDash val="solid"/>
           </a:ln>
         </p:spPr>
+        <p:txBody>
+          <a:bodyPr/>
+          <a:lstStyle/>
+          <a:p>
+            <a:endParaRPr lang="en-US"/>
+          </a:p>
+        </p:txBody>
       </p:sp>
       <p:sp>
         <p:nvSpPr>
@@ -2975,11 +2779,11 @@
           </a:bodyPr>
           <a:lstStyle/>
           <a:p>
-            <a:pPr algn="ctr" indent="0" marL="0">
-              <a:buNone/>
-            </a:pPr>
-            <a:r>
-              <a:rPr lang="en-US" sz="1300" b="1" spc="100" kern="0" dirty="0">
+            <a:pPr marL="0" indent="0" algn="ctr">
+              <a:buNone/>
+            </a:pPr>
+            <a:r>
+              <a:rPr lang="en-US" sz="1300" b="1" kern="0" spc="100" dirty="0">
                 <a:solidFill>
                   <a:srgbClr val="6FB6FF"/>
                 </a:solidFill>
@@ -3017,6 +2821,13 @@
             <a:tailEnd type="triangle"/>
           </a:ln>
         </p:spPr>
+        <p:txBody>
+          <a:bodyPr/>
+          <a:lstStyle/>
+          <a:p>
+            <a:endParaRPr lang="en-US"/>
+          </a:p>
+        </p:txBody>
       </p:sp>
       <p:sp>
         <p:nvSpPr>
@@ -3046,6 +2857,13 @@
             <a:prstDash val="solid"/>
           </a:ln>
         </p:spPr>
+        <p:txBody>
+          <a:bodyPr/>
+          <a:lstStyle/>
+          <a:p>
+            <a:endParaRPr lang="en-US"/>
+          </a:p>
+        </p:txBody>
       </p:sp>
       <p:sp>
         <p:nvSpPr>
@@ -3070,11 +2888,11 @@
           </a:bodyPr>
           <a:lstStyle/>
           <a:p>
-            <a:pPr algn="ctr" indent="0" marL="0">
-              <a:buNone/>
-            </a:pPr>
-            <a:r>
-              <a:rPr lang="en-US" sz="1300" b="1" spc="100" kern="0" dirty="0">
+            <a:pPr marL="0" indent="0" algn="ctr">
+              <a:buNone/>
+            </a:pPr>
+            <a:r>
+              <a:rPr lang="en-US" sz="1300" b="1" kern="0" spc="100" dirty="0">
                 <a:solidFill>
                   <a:srgbClr val="19C3B1"/>
                 </a:solidFill>
@@ -3112,6 +2930,13 @@
             <a:tailEnd type="triangle"/>
           </a:ln>
         </p:spPr>
+        <p:txBody>
+          <a:bodyPr/>
+          <a:lstStyle/>
+          <a:p>
+            <a:endParaRPr lang="en-US"/>
+          </a:p>
+        </p:txBody>
       </p:sp>
       <p:sp>
         <p:nvSpPr>
@@ -3141,6 +2966,13 @@
             <a:prstDash val="solid"/>
           </a:ln>
         </p:spPr>
+        <p:txBody>
+          <a:bodyPr/>
+          <a:lstStyle/>
+          <a:p>
+            <a:endParaRPr lang="en-US"/>
+          </a:p>
+        </p:txBody>
       </p:sp>
       <p:sp>
         <p:nvSpPr>
@@ -3165,11 +2997,11 @@
           </a:bodyPr>
           <a:lstStyle/>
           <a:p>
-            <a:pPr algn="ctr" indent="0" marL="0">
-              <a:buNone/>
-            </a:pPr>
-            <a:r>
-              <a:rPr lang="en-US" sz="1300" b="1" spc="100" kern="0" dirty="0">
+            <a:pPr marL="0" indent="0" algn="ctr">
+              <a:buNone/>
+            </a:pPr>
+            <a:r>
+              <a:rPr lang="en-US" sz="1300" b="1" kern="0" spc="100" dirty="0">
                 <a:solidFill>
                   <a:srgbClr val="FFB454"/>
                 </a:solidFill>
@@ -3207,6 +3039,13 @@
             <a:tailEnd type="triangle"/>
           </a:ln>
         </p:spPr>
+        <p:txBody>
+          <a:bodyPr/>
+          <a:lstStyle/>
+          <a:p>
+            <a:endParaRPr lang="en-US"/>
+          </a:p>
+        </p:txBody>
       </p:sp>
       <p:sp>
         <p:nvSpPr>
@@ -3236,6 +3075,13 @@
             <a:prstDash val="solid"/>
           </a:ln>
         </p:spPr>
+        <p:txBody>
+          <a:bodyPr/>
+          <a:lstStyle/>
+          <a:p>
+            <a:endParaRPr lang="en-US"/>
+          </a:p>
+        </p:txBody>
       </p:sp>
       <p:sp>
         <p:nvSpPr>
@@ -3260,11 +3106,11 @@
           </a:bodyPr>
           <a:lstStyle/>
           <a:p>
-            <a:pPr algn="ctr" indent="0" marL="0">
-              <a:buNone/>
-            </a:pPr>
-            <a:r>
-              <a:rPr lang="en-US" sz="1300" b="1" spc="100" kern="0" dirty="0">
+            <a:pPr marL="0" indent="0" algn="ctr">
+              <a:buNone/>
+            </a:pPr>
+            <a:r>
+              <a:rPr lang="en-US" sz="1300" b="1" kern="0" spc="100" dirty="0">
                 <a:solidFill>
                   <a:srgbClr val="FF6B6B"/>
                 </a:solidFill>
@@ -3301,7 +3147,7 @@
           </a:bodyPr>
           <a:lstStyle/>
           <a:p>
-            <a:pPr algn="l" indent="0" marL="0">
+            <a:pPr marL="0" indent="0" algn="l">
               <a:buNone/>
             </a:pPr>
             <a:r>
@@ -3342,7 +3188,7 @@
           </a:bodyPr>
           <a:lstStyle/>
           <a:p>
-            <a:pPr algn="l" indent="0" marL="0">
+            <a:pPr marL="0" indent="0" algn="l">
               <a:buNone/>
             </a:pPr>
             <a:r>
@@ -3380,7 +3226,7 @@
           </a:prstGeom>
           <a:extLst>
             <a:ext uri="{C572A759-6A51-4108-AA02-DFA0A04FC94B}">
-              <ma14:wrappingTextBoxFlag xmlns:ma14="http://schemas.microsoft.com/office/mac/drawingml/2011/main" val="0"/>
+              <ma14:wrappingTextBoxFlag xmlns:ma14="http://schemas.microsoft.com/office/mac/drawingml/2011/main" xmlns="" val="0"/>
             </a:ext>
           </a:extLst>
         </p:spPr>
@@ -3401,7 +3247,7 @@
           <a:p>
             <a:pPr algn="r"/>
             <a:fld id="{F7021451-1387-4CA6-816F-3879F97B5CBC}" type="slidenum">
-              <a:rPr b="0" lang="en-US"/>
+              <a:rPr lang="en-US" b="0"/>
               <a:t>1</a:t>
             </a:fld>
             <a:endParaRPr lang="en-US"/>
@@ -3456,11 +3302,11 @@
           </a:bodyPr>
           <a:lstStyle/>
           <a:p>
-            <a:pPr algn="l" indent="0" marL="0">
-              <a:buNone/>
-            </a:pPr>
-            <a:r>
-              <a:rPr lang="en-US" sz="850" b="1" spc="140" kern="0" dirty="0">
+            <a:pPr marL="0" indent="0" algn="l">
+              <a:buNone/>
+            </a:pPr>
+            <a:r>
+              <a:rPr lang="en-US" sz="850" b="1" kern="0" spc="140" dirty="0">
                 <a:solidFill>
                   <a:srgbClr val="19C3B1"/>
                 </a:solidFill>
@@ -3497,7 +3343,7 @@
           </a:bodyPr>
           <a:lstStyle/>
           <a:p>
-            <a:pPr algn="l" indent="0" marL="0">
+            <a:pPr marL="0" indent="0" algn="l">
               <a:buNone/>
             </a:pPr>
             <a:r>
@@ -3538,7 +3384,7 @@
           </a:bodyPr>
           <a:lstStyle/>
           <a:p>
-            <a:pPr algn="l" indent="0" marL="0">
+            <a:pPr marL="0" indent="0" algn="l">
               <a:buNone/>
             </a:pPr>
             <a:r>
@@ -3582,6 +3428,13 @@
             <a:prstDash val="solid"/>
           </a:ln>
         </p:spPr>
+        <p:txBody>
+          <a:bodyPr/>
+          <a:lstStyle/>
+          <a:p>
+            <a:endParaRPr lang="en-US"/>
+          </a:p>
+        </p:txBody>
       </p:sp>
       <p:sp>
         <p:nvSpPr>
@@ -3607,6 +3460,13 @@
             <a:prstDash val="solid"/>
           </a:ln>
         </p:spPr>
+        <p:txBody>
+          <a:bodyPr/>
+          <a:lstStyle/>
+          <a:p>
+            <a:endParaRPr lang="en-US"/>
+          </a:p>
+        </p:txBody>
       </p:sp>
       <p:sp>
         <p:nvSpPr>
@@ -3631,7 +3491,7 @@
           </a:bodyPr>
           <a:lstStyle/>
           <a:p>
-            <a:pPr algn="l" indent="0" marL="0">
+            <a:pPr marL="0" indent="0" algn="l">
               <a:buNone/>
             </a:pPr>
             <a:r>
@@ -3672,7 +3532,7 @@
           </a:bodyPr>
           <a:lstStyle/>
           <a:p>
-            <a:pPr algn="l" indent="0" marL="0">
+            <a:pPr marL="0" indent="0" algn="l">
               <a:buNone/>
             </a:pPr>
             <a:r>
@@ -3714,6 +3574,13 @@
             <a:tailEnd type="triangle"/>
           </a:ln>
         </p:spPr>
+        <p:txBody>
+          <a:bodyPr/>
+          <a:lstStyle/>
+          <a:p>
+            <a:endParaRPr lang="en-US"/>
+          </a:p>
+        </p:txBody>
       </p:sp>
       <p:sp>
         <p:nvSpPr>
@@ -3741,6 +3608,13 @@
             <a:prstDash val="solid"/>
           </a:ln>
         </p:spPr>
+        <p:txBody>
+          <a:bodyPr/>
+          <a:lstStyle/>
+          <a:p>
+            <a:endParaRPr lang="en-US"/>
+          </a:p>
+        </p:txBody>
       </p:sp>
       <p:sp>
         <p:nvSpPr>
@@ -3766,6 +3640,13 @@
             <a:prstDash val="solid"/>
           </a:ln>
         </p:spPr>
+        <p:txBody>
+          <a:bodyPr/>
+          <a:lstStyle/>
+          <a:p>
+            <a:endParaRPr lang="en-US"/>
+          </a:p>
+        </p:txBody>
       </p:sp>
       <p:sp>
         <p:nvSpPr>
@@ -3790,7 +3671,7 @@
           </a:bodyPr>
           <a:lstStyle/>
           <a:p>
-            <a:pPr algn="l" indent="0" marL="0">
+            <a:pPr marL="0" indent="0" algn="l">
               <a:buNone/>
             </a:pPr>
             <a:r>
@@ -3831,7 +3712,7 @@
           </a:bodyPr>
           <a:lstStyle/>
           <a:p>
-            <a:pPr algn="l" indent="0" marL="0">
+            <a:pPr marL="0" indent="0" algn="l">
               <a:buNone/>
             </a:pPr>
             <a:r>
@@ -3873,6 +3754,13 @@
             <a:tailEnd type="triangle"/>
           </a:ln>
         </p:spPr>
+        <p:txBody>
+          <a:bodyPr/>
+          <a:lstStyle/>
+          <a:p>
+            <a:endParaRPr lang="en-US"/>
+          </a:p>
+        </p:txBody>
       </p:sp>
       <p:sp>
         <p:nvSpPr>
@@ -3900,6 +3788,13 @@
             <a:prstDash val="solid"/>
           </a:ln>
         </p:spPr>
+        <p:txBody>
+          <a:bodyPr/>
+          <a:lstStyle/>
+          <a:p>
+            <a:endParaRPr lang="en-US"/>
+          </a:p>
+        </p:txBody>
       </p:sp>
       <p:sp>
         <p:nvSpPr>
@@ -3925,6 +3820,13 @@
             <a:prstDash val="solid"/>
           </a:ln>
         </p:spPr>
+        <p:txBody>
+          <a:bodyPr/>
+          <a:lstStyle/>
+          <a:p>
+            <a:endParaRPr lang="en-US"/>
+          </a:p>
+        </p:txBody>
       </p:sp>
       <p:sp>
         <p:nvSpPr>
@@ -3949,7 +3851,7 @@
           </a:bodyPr>
           <a:lstStyle/>
           <a:p>
-            <a:pPr algn="l" indent="0" marL="0">
+            <a:pPr marL="0" indent="0" algn="l">
               <a:buNone/>
             </a:pPr>
             <a:r>
@@ -3990,7 +3892,7 @@
           </a:bodyPr>
           <a:lstStyle/>
           <a:p>
-            <a:pPr algn="l" indent="0" marL="0">
+            <a:pPr marL="0" indent="0" algn="l">
               <a:buNone/>
             </a:pPr>
             <a:r>
@@ -4032,6 +3934,13 @@
             <a:tailEnd type="triangle"/>
           </a:ln>
         </p:spPr>
+        <p:txBody>
+          <a:bodyPr/>
+          <a:lstStyle/>
+          <a:p>
+            <a:endParaRPr lang="en-US"/>
+          </a:p>
+        </p:txBody>
       </p:sp>
       <p:sp>
         <p:nvSpPr>
@@ -4059,6 +3968,13 @@
             <a:prstDash val="solid"/>
           </a:ln>
         </p:spPr>
+        <p:txBody>
+          <a:bodyPr/>
+          <a:lstStyle/>
+          <a:p>
+            <a:endParaRPr lang="en-US"/>
+          </a:p>
+        </p:txBody>
       </p:sp>
       <p:sp>
         <p:nvSpPr>
@@ -4084,6 +4000,13 @@
             <a:prstDash val="solid"/>
           </a:ln>
         </p:spPr>
+        <p:txBody>
+          <a:bodyPr/>
+          <a:lstStyle/>
+          <a:p>
+            <a:endParaRPr lang="en-US"/>
+          </a:p>
+        </p:txBody>
       </p:sp>
       <p:sp>
         <p:nvSpPr>
@@ -4108,7 +4031,7 @@
           </a:bodyPr>
           <a:lstStyle/>
           <a:p>
-            <a:pPr algn="l" indent="0" marL="0">
+            <a:pPr marL="0" indent="0" algn="l">
               <a:buNone/>
             </a:pPr>
             <a:r>
@@ -4149,7 +4072,7 @@
           </a:bodyPr>
           <a:lstStyle/>
           <a:p>
-            <a:pPr algn="l" indent="0" marL="0">
+            <a:pPr marL="0" indent="0" algn="l">
               <a:buNone/>
             </a:pPr>
             <a:r>
@@ -4193,6 +4116,13 @@
             <a:prstDash val="solid"/>
           </a:ln>
         </p:spPr>
+        <p:txBody>
+          <a:bodyPr/>
+          <a:lstStyle/>
+          <a:p>
+            <a:endParaRPr lang="en-US"/>
+          </a:p>
+        </p:txBody>
       </p:sp>
       <p:sp>
         <p:nvSpPr>
@@ -4217,7 +4147,7 @@
           </a:bodyPr>
           <a:lstStyle/>
           <a:p>
-            <a:pPr algn="l" indent="0" marL="0">
+            <a:pPr marL="0" indent="0" algn="l">
               <a:buNone/>
             </a:pPr>
             <a:r>
@@ -4258,7 +4188,7 @@
           </a:bodyPr>
           <a:lstStyle/>
           <a:p>
-            <a:pPr algn="l" indent="0" marL="0">
+            <a:pPr marL="0" indent="0" algn="l">
               <a:buNone/>
             </a:pPr>
             <a:r>
@@ -4306,6 +4236,13 @@
             <a:prstDash val="solid"/>
           </a:ln>
         </p:spPr>
+        <p:txBody>
+          <a:bodyPr/>
+          <a:lstStyle/>
+          <a:p>
+            <a:endParaRPr lang="en-US"/>
+          </a:p>
+        </p:txBody>
       </p:sp>
       <p:sp>
         <p:nvSpPr>
@@ -4330,11 +4267,11 @@
           </a:bodyPr>
           <a:lstStyle/>
           <a:p>
-            <a:pPr algn="l" indent="0" marL="0">
-              <a:buNone/>
-            </a:pPr>
-            <a:r>
-              <a:rPr lang="en-US" sz="780" b="1" spc="100" kern="0" dirty="0">
+            <a:pPr marL="0" indent="0" algn="l">
+              <a:buNone/>
+            </a:pPr>
+            <a:r>
+              <a:rPr lang="en-US" sz="780" b="1" kern="0" spc="100" dirty="0">
                 <a:solidFill>
                   <a:srgbClr val="19C3B1"/>
                 </a:solidFill>
@@ -4371,7 +4308,7 @@
           </a:bodyPr>
           <a:lstStyle/>
           <a:p>
-            <a:pPr algn="l" indent="0" marL="0">
+            <a:pPr marL="0" indent="0" algn="l">
               <a:buNone/>
             </a:pPr>
             <a:r>
@@ -4391,7 +4328,7 @@
       </p:sp>
       <p:sp>
         <p:nvSpPr>
-          <p:cNvPr id="25" name="Slide Number Placeholder 0"/>
+          <p:cNvPr id="30" name="Slide Number Placeholder 0"/>
           <p:cNvSpPr>
             <a:spLocks noGrp="1"/>
           </p:cNvSpPr>
@@ -4409,7 +4346,7 @@
           </a:prstGeom>
           <a:extLst>
             <a:ext uri="{C572A759-6A51-4108-AA02-DFA0A04FC94B}">
-              <ma14:wrappingTextBoxFlag xmlns:ma14="http://schemas.microsoft.com/office/mac/drawingml/2011/main" val="0"/>
+              <ma14:wrappingTextBoxFlag xmlns:ma14="http://schemas.microsoft.com/office/mac/drawingml/2011/main" xmlns="" val="0"/>
             </a:ext>
           </a:extLst>
         </p:spPr>
@@ -4430,7 +4367,7 @@
           <a:p>
             <a:pPr algn="r"/>
             <a:fld id="{F7021451-1387-4CA6-816F-3879F97B5CBC}" type="slidenum">
-              <a:rPr b="0" lang="en-US"/>
+              <a:rPr lang="en-US" b="0"/>
               <a:t>10</a:t>
             </a:fld>
             <a:endParaRPr lang="en-US"/>
@@ -4485,11 +4422,11 @@
           </a:bodyPr>
           <a:lstStyle/>
           <a:p>
-            <a:pPr algn="l" indent="0" marL="0">
-              <a:buNone/>
-            </a:pPr>
-            <a:r>
-              <a:rPr lang="en-US" sz="850" b="1" spc="140" kern="0" dirty="0">
+            <a:pPr marL="0" indent="0" algn="l">
+              <a:buNone/>
+            </a:pPr>
+            <a:r>
+              <a:rPr lang="en-US" sz="850" b="1" kern="0" spc="140" dirty="0">
                 <a:solidFill>
                   <a:srgbClr val="19C3B1"/>
                 </a:solidFill>
@@ -4526,7 +4463,7 @@
           </a:bodyPr>
           <a:lstStyle/>
           <a:p>
-            <a:pPr algn="l" indent="0" marL="0">
+            <a:pPr marL="0" indent="0" algn="l">
               <a:buNone/>
             </a:pPr>
             <a:r>
@@ -4567,7 +4504,7 @@
           </a:bodyPr>
           <a:lstStyle/>
           <a:p>
-            <a:pPr algn="l" indent="0" marL="0">
+            <a:pPr marL="0" indent="0" algn="l">
               <a:buNone/>
             </a:pPr>
             <a:r>
@@ -4611,6 +4548,13 @@
             <a:prstDash val="solid"/>
           </a:ln>
         </p:spPr>
+        <p:txBody>
+          <a:bodyPr/>
+          <a:lstStyle/>
+          <a:p>
+            <a:endParaRPr lang="en-US"/>
+          </a:p>
+        </p:txBody>
       </p:sp>
       <p:sp>
         <p:nvSpPr>
@@ -4635,7 +4579,7 @@
           </a:bodyPr>
           <a:lstStyle/>
           <a:p>
-            <a:pPr algn="ctr" indent="0" marL="0">
+            <a:pPr marL="0" indent="0" algn="ctr">
               <a:buNone/>
             </a:pPr>
             <a:r>
@@ -4652,7 +4596,7 @@
             <a:endParaRPr lang="en-US" sz="1500" dirty="0"/>
           </a:p>
           <a:p>
-            <a:pPr algn="ctr" indent="0" marL="0">
+            <a:pPr marL="0" indent="0" algn="ctr">
               <a:buNone/>
             </a:pPr>
             <a:r>
@@ -4696,6 +4640,13 @@
             <a:prstDash val="solid"/>
           </a:ln>
         </p:spPr>
+        <p:txBody>
+          <a:bodyPr/>
+          <a:lstStyle/>
+          <a:p>
+            <a:endParaRPr lang="en-US"/>
+          </a:p>
+        </p:txBody>
       </p:sp>
       <p:sp>
         <p:nvSpPr>
@@ -4721,6 +4672,13 @@
             <a:prstDash val="solid"/>
           </a:ln>
         </p:spPr>
+        <p:txBody>
+          <a:bodyPr/>
+          <a:lstStyle/>
+          <a:p>
+            <a:endParaRPr lang="en-US"/>
+          </a:p>
+        </p:txBody>
       </p:sp>
       <p:sp>
         <p:nvSpPr>
@@ -4745,7 +4703,7 @@
           </a:bodyPr>
           <a:lstStyle/>
           <a:p>
-            <a:pPr algn="l" indent="0" marL="0">
+            <a:pPr marL="0" indent="0" algn="l">
               <a:buNone/>
             </a:pPr>
             <a:r>
@@ -4786,7 +4744,7 @@
           </a:bodyPr>
           <a:lstStyle/>
           <a:p>
-            <a:pPr algn="l" indent="0" marL="0">
+            <a:pPr marL="0" indent="0" algn="l">
               <a:buNone/>
             </a:pPr>
             <a:r>
@@ -4828,6 +4786,13 @@
             <a:tailEnd type="triangle"/>
           </a:ln>
         </p:spPr>
+        <p:txBody>
+          <a:bodyPr/>
+          <a:lstStyle/>
+          <a:p>
+            <a:endParaRPr lang="en-US"/>
+          </a:p>
+        </p:txBody>
       </p:sp>
       <p:sp>
         <p:nvSpPr>
@@ -4855,6 +4820,13 @@
             <a:prstDash val="solid"/>
           </a:ln>
         </p:spPr>
+        <p:txBody>
+          <a:bodyPr/>
+          <a:lstStyle/>
+          <a:p>
+            <a:endParaRPr lang="en-US"/>
+          </a:p>
+        </p:txBody>
       </p:sp>
       <p:sp>
         <p:nvSpPr>
@@ -4880,6 +4852,13 @@
             <a:prstDash val="solid"/>
           </a:ln>
         </p:spPr>
+        <p:txBody>
+          <a:bodyPr/>
+          <a:lstStyle/>
+          <a:p>
+            <a:endParaRPr lang="en-US"/>
+          </a:p>
+        </p:txBody>
       </p:sp>
       <p:sp>
         <p:nvSpPr>
@@ -4904,7 +4883,7 @@
           </a:bodyPr>
           <a:lstStyle/>
           <a:p>
-            <a:pPr algn="l" indent="0" marL="0">
+            <a:pPr marL="0" indent="0" algn="l">
               <a:buNone/>
             </a:pPr>
             <a:r>
@@ -4945,7 +4924,7 @@
           </a:bodyPr>
           <a:lstStyle/>
           <a:p>
-            <a:pPr algn="l" indent="0" marL="0">
+            <a:pPr marL="0" indent="0" algn="l">
               <a:buNone/>
             </a:pPr>
             <a:r>
@@ -4972,7 +4951,7 @@
         <p:spPr>
           <a:xfrm>
             <a:off x="3310128" y="4645152"/>
-            <a:ext cx="1764792" cy="-1463040"/>
+            <a:ext cx="1764792" cy="0"/>
           </a:xfrm>
           <a:prstGeom prst="line">
             <a:avLst/>
@@ -4987,6 +4966,13 @@
             <a:tailEnd type="triangle"/>
           </a:ln>
         </p:spPr>
+        <p:txBody>
+          <a:bodyPr/>
+          <a:lstStyle/>
+          <a:p>
+            <a:endParaRPr lang="en-US"/>
+          </a:p>
+        </p:txBody>
       </p:sp>
       <p:sp>
         <p:nvSpPr>
@@ -5014,6 +5000,13 @@
             <a:prstDash val="solid"/>
           </a:ln>
         </p:spPr>
+        <p:txBody>
+          <a:bodyPr/>
+          <a:lstStyle/>
+          <a:p>
+            <a:endParaRPr lang="en-US"/>
+          </a:p>
+        </p:txBody>
       </p:sp>
       <p:sp>
         <p:nvSpPr>
@@ -5039,6 +5032,13 @@
             <a:prstDash val="solid"/>
           </a:ln>
         </p:spPr>
+        <p:txBody>
+          <a:bodyPr/>
+          <a:lstStyle/>
+          <a:p>
+            <a:endParaRPr lang="en-US"/>
+          </a:p>
+        </p:txBody>
       </p:sp>
       <p:sp>
         <p:nvSpPr>
@@ -5063,7 +5063,7 @@
           </a:bodyPr>
           <a:lstStyle/>
           <a:p>
-            <a:pPr algn="l" indent="0" marL="0">
+            <a:pPr marL="0" indent="0" algn="l">
               <a:buNone/>
             </a:pPr>
             <a:r>
@@ -5104,7 +5104,7 @@
           </a:bodyPr>
           <a:lstStyle/>
           <a:p>
-            <a:pPr algn="l" indent="0" marL="0">
+            <a:pPr marL="0" indent="0" algn="l">
               <a:buNone/>
             </a:pPr>
             <a:r>
@@ -5131,7 +5131,7 @@
         <p:spPr>
           <a:xfrm>
             <a:off x="8796528" y="2450592"/>
-            <a:ext cx="-1664208" cy="731520"/>
+            <a:ext cx="0" cy="731520"/>
           </a:xfrm>
           <a:prstGeom prst="line">
             <a:avLst/>
@@ -5146,6 +5146,13 @@
             <a:tailEnd type="triangle"/>
           </a:ln>
         </p:spPr>
+        <p:txBody>
+          <a:bodyPr/>
+          <a:lstStyle/>
+          <a:p>
+            <a:endParaRPr lang="en-US"/>
+          </a:p>
+        </p:txBody>
       </p:sp>
       <p:sp>
         <p:nvSpPr>
@@ -5173,6 +5180,13 @@
             <a:prstDash val="solid"/>
           </a:ln>
         </p:spPr>
+        <p:txBody>
+          <a:bodyPr/>
+          <a:lstStyle/>
+          <a:p>
+            <a:endParaRPr lang="en-US"/>
+          </a:p>
+        </p:txBody>
       </p:sp>
       <p:sp>
         <p:nvSpPr>
@@ -5198,6 +5212,13 @@
             <a:prstDash val="solid"/>
           </a:ln>
         </p:spPr>
+        <p:txBody>
+          <a:bodyPr/>
+          <a:lstStyle/>
+          <a:p>
+            <a:endParaRPr lang="en-US"/>
+          </a:p>
+        </p:txBody>
       </p:sp>
       <p:sp>
         <p:nvSpPr>
@@ -5222,7 +5243,7 @@
           </a:bodyPr>
           <a:lstStyle/>
           <a:p>
-            <a:pPr algn="l" indent="0" marL="0">
+            <a:pPr marL="0" indent="0" algn="l">
               <a:buNone/>
             </a:pPr>
             <a:r>
@@ -5263,7 +5284,7 @@
           </a:bodyPr>
           <a:lstStyle/>
           <a:p>
-            <a:pPr algn="l" indent="0" marL="0">
+            <a:pPr marL="0" indent="0" algn="l">
               <a:buNone/>
             </a:pPr>
             <a:r>
@@ -5290,7 +5311,7 @@
         <p:spPr>
           <a:xfrm>
             <a:off x="8796528" y="4645152"/>
-            <a:ext cx="-1664208" cy="-1463040"/>
+            <a:ext cx="0" cy="0"/>
           </a:xfrm>
           <a:prstGeom prst="line">
             <a:avLst/>
@@ -5305,6 +5326,13 @@
             <a:tailEnd type="triangle"/>
           </a:ln>
         </p:spPr>
+        <p:txBody>
+          <a:bodyPr/>
+          <a:lstStyle/>
+          <a:p>
+            <a:endParaRPr lang="en-US"/>
+          </a:p>
+        </p:txBody>
       </p:sp>
       <p:sp>
         <p:nvSpPr>
@@ -5329,7 +5357,7 @@
           </a:bodyPr>
           <a:lstStyle/>
           <a:p>
-            <a:pPr algn="ctr" indent="0" marL="0">
+            <a:pPr marL="0" indent="0" algn="ctr">
               <a:buNone/>
             </a:pPr>
             <a:r>
@@ -5377,6 +5405,13 @@
             <a:prstDash val="solid"/>
           </a:ln>
         </p:spPr>
+        <p:txBody>
+          <a:bodyPr/>
+          <a:lstStyle/>
+          <a:p>
+            <a:endParaRPr lang="en-US"/>
+          </a:p>
+        </p:txBody>
       </p:sp>
       <p:sp>
         <p:nvSpPr>
@@ -5401,11 +5436,11 @@
           </a:bodyPr>
           <a:lstStyle/>
           <a:p>
-            <a:pPr algn="l" indent="0" marL="0">
-              <a:buNone/>
-            </a:pPr>
-            <a:r>
-              <a:rPr lang="en-US" sz="780" b="1" spc="100" kern="0" dirty="0">
+            <a:pPr marL="0" indent="0" algn="l">
+              <a:buNone/>
+            </a:pPr>
+            <a:r>
+              <a:rPr lang="en-US" sz="780" b="1" kern="0" spc="100" dirty="0">
                 <a:solidFill>
                   <a:srgbClr val="19C3B1"/>
                 </a:solidFill>
@@ -5442,7 +5477,7 @@
           </a:bodyPr>
           <a:lstStyle/>
           <a:p>
-            <a:pPr algn="l" indent="0" marL="0">
+            <a:pPr marL="0" indent="0" algn="l">
               <a:buNone/>
             </a:pPr>
             <a:r>
@@ -5462,7 +5497,7 @@
       </p:sp>
       <p:sp>
         <p:nvSpPr>
-          <p:cNvPr id="25" name="Slide Number Placeholder 0"/>
+          <p:cNvPr id="31" name="Slide Number Placeholder 0"/>
           <p:cNvSpPr>
             <a:spLocks noGrp="1"/>
           </p:cNvSpPr>
@@ -5480,7 +5515,7 @@
           </a:prstGeom>
           <a:extLst>
             <a:ext uri="{C572A759-6A51-4108-AA02-DFA0A04FC94B}">
-              <ma14:wrappingTextBoxFlag xmlns:ma14="http://schemas.microsoft.com/office/mac/drawingml/2011/main" val="0"/>
+              <ma14:wrappingTextBoxFlag xmlns:ma14="http://schemas.microsoft.com/office/mac/drawingml/2011/main" xmlns="" val="0"/>
             </a:ext>
           </a:extLst>
         </p:spPr>
@@ -5501,7 +5536,7 @@
           <a:p>
             <a:pPr algn="r"/>
             <a:fld id="{F7021451-1387-4CA6-816F-3879F97B5CBC}" type="slidenum">
-              <a:rPr b="0" lang="en-US"/>
+              <a:rPr lang="en-US" b="0"/>
               <a:t>11</a:t>
             </a:fld>
             <a:endParaRPr lang="en-US"/>
@@ -5556,11 +5591,11 @@
           </a:bodyPr>
           <a:lstStyle/>
           <a:p>
-            <a:pPr algn="l" indent="0" marL="0">
-              <a:buNone/>
-            </a:pPr>
-            <a:r>
-              <a:rPr lang="en-US" sz="850" b="1" spc="140" kern="0" dirty="0">
+            <a:pPr marL="0" indent="0" algn="l">
+              <a:buNone/>
+            </a:pPr>
+            <a:r>
+              <a:rPr lang="en-US" sz="850" b="1" kern="0" spc="140" dirty="0">
                 <a:solidFill>
                   <a:srgbClr val="19C3B1"/>
                 </a:solidFill>
@@ -5597,7 +5632,7 @@
           </a:bodyPr>
           <a:lstStyle/>
           <a:p>
-            <a:pPr algn="l" indent="0" marL="0">
+            <a:pPr marL="0" indent="0" algn="l">
               <a:buNone/>
             </a:pPr>
             <a:r>
@@ -5638,7 +5673,7 @@
           </a:bodyPr>
           <a:lstStyle/>
           <a:p>
-            <a:pPr algn="l" indent="0" marL="0">
+            <a:pPr marL="0" indent="0" algn="l">
               <a:buNone/>
             </a:pPr>
             <a:r>
@@ -5665,7 +5700,7 @@
         <p:spPr>
           <a:xfrm>
             <a:off x="1508760" y="3035808"/>
-            <a:ext cx="2194560" cy="-1005840"/>
+            <a:ext cx="2194560" cy="0"/>
           </a:xfrm>
           <a:prstGeom prst="line">
             <a:avLst/>
@@ -5680,6 +5715,13 @@
             <a:tailEnd type="triangle"/>
           </a:ln>
         </p:spPr>
+        <p:txBody>
+          <a:bodyPr/>
+          <a:lstStyle/>
+          <a:p>
+            <a:endParaRPr lang="en-US"/>
+          </a:p>
+        </p:txBody>
       </p:sp>
       <p:sp>
         <p:nvSpPr>
@@ -5705,6 +5747,13 @@
             <a:tailEnd type="triangle"/>
           </a:ln>
         </p:spPr>
+        <p:txBody>
+          <a:bodyPr/>
+          <a:lstStyle/>
+          <a:p>
+            <a:endParaRPr lang="en-US"/>
+          </a:p>
+        </p:txBody>
       </p:sp>
       <p:sp>
         <p:nvSpPr>
@@ -5730,6 +5779,13 @@
             <a:tailEnd type="triangle"/>
           </a:ln>
         </p:spPr>
+        <p:txBody>
+          <a:bodyPr/>
+          <a:lstStyle/>
+          <a:p>
+            <a:endParaRPr lang="en-US"/>
+          </a:p>
+        </p:txBody>
       </p:sp>
       <p:sp>
         <p:nvSpPr>
@@ -5740,7 +5796,7 @@
         <p:spPr>
           <a:xfrm>
             <a:off x="3794760" y="4133088"/>
-            <a:ext cx="2468880" cy="-1188720"/>
+            <a:ext cx="2468880" cy="0"/>
           </a:xfrm>
           <a:prstGeom prst="line">
             <a:avLst/>
@@ -5755,6 +5811,13 @@
             <a:tailEnd type="triangle"/>
           </a:ln>
         </p:spPr>
+        <p:txBody>
+          <a:bodyPr/>
+          <a:lstStyle/>
+          <a:p>
+            <a:endParaRPr lang="en-US"/>
+          </a:p>
+        </p:txBody>
       </p:sp>
       <p:sp>
         <p:nvSpPr>
@@ -5765,7 +5828,7 @@
         <p:spPr>
           <a:xfrm>
             <a:off x="6263640" y="2944368"/>
-            <a:ext cx="2468880" cy="-914400"/>
+            <a:ext cx="2468880" cy="0"/>
           </a:xfrm>
           <a:prstGeom prst="line">
             <a:avLst/>
@@ -5780,6 +5843,13 @@
             <a:tailEnd type="triangle"/>
           </a:ln>
         </p:spPr>
+        <p:txBody>
+          <a:bodyPr/>
+          <a:lstStyle/>
+          <a:p>
+            <a:endParaRPr lang="en-US"/>
+          </a:p>
+        </p:txBody>
       </p:sp>
       <p:sp>
         <p:nvSpPr>
@@ -5805,6 +5875,13 @@
             <a:tailEnd type="triangle"/>
           </a:ln>
         </p:spPr>
+        <p:txBody>
+          <a:bodyPr/>
+          <a:lstStyle/>
+          <a:p>
+            <a:endParaRPr lang="en-US"/>
+          </a:p>
+        </p:txBody>
       </p:sp>
       <p:sp>
         <p:nvSpPr>
@@ -5830,6 +5907,13 @@
             <a:tailEnd type="triangle"/>
           </a:ln>
         </p:spPr>
+        <p:txBody>
+          <a:bodyPr/>
+          <a:lstStyle/>
+          <a:p>
+            <a:endParaRPr lang="en-US"/>
+          </a:p>
+        </p:txBody>
       </p:sp>
       <p:sp>
         <p:nvSpPr>
@@ -5859,6 +5943,13 @@
             <a:prstDash val="solid"/>
           </a:ln>
         </p:spPr>
+        <p:txBody>
+          <a:bodyPr/>
+          <a:lstStyle/>
+          <a:p>
+            <a:endParaRPr lang="en-US"/>
+          </a:p>
+        </p:txBody>
       </p:sp>
       <p:sp>
         <p:nvSpPr>
@@ -5883,7 +5974,7 @@
           </a:bodyPr>
           <a:lstStyle/>
           <a:p>
-            <a:pPr algn="ctr" indent="0" marL="0">
+            <a:pPr marL="0" indent="0" algn="ctr">
               <a:buNone/>
             </a:pPr>
             <a:r>
@@ -5929,6 +6020,13 @@
             <a:prstDash val="solid"/>
           </a:ln>
         </p:spPr>
+        <p:txBody>
+          <a:bodyPr/>
+          <a:lstStyle/>
+          <a:p>
+            <a:endParaRPr lang="en-US"/>
+          </a:p>
+        </p:txBody>
       </p:sp>
       <p:sp>
         <p:nvSpPr>
@@ -5953,7 +6051,7 @@
           </a:bodyPr>
           <a:lstStyle/>
           <a:p>
-            <a:pPr algn="ctr" indent="0" marL="0">
+            <a:pPr marL="0" indent="0" algn="ctr">
               <a:buNone/>
             </a:pPr>
             <a:r>
@@ -5999,6 +6097,13 @@
             <a:prstDash val="solid"/>
           </a:ln>
         </p:spPr>
+        <p:txBody>
+          <a:bodyPr/>
+          <a:lstStyle/>
+          <a:p>
+            <a:endParaRPr lang="en-US"/>
+          </a:p>
+        </p:txBody>
       </p:sp>
       <p:sp>
         <p:nvSpPr>
@@ -6023,7 +6128,7 @@
           </a:bodyPr>
           <a:lstStyle/>
           <a:p>
-            <a:pPr algn="ctr" indent="0" marL="0">
+            <a:pPr marL="0" indent="0" algn="ctr">
               <a:buNone/>
             </a:pPr>
             <a:r>
@@ -6069,6 +6174,13 @@
             <a:prstDash val="solid"/>
           </a:ln>
         </p:spPr>
+        <p:txBody>
+          <a:bodyPr/>
+          <a:lstStyle/>
+          <a:p>
+            <a:endParaRPr lang="en-US"/>
+          </a:p>
+        </p:txBody>
       </p:sp>
       <p:sp>
         <p:nvSpPr>
@@ -6093,7 +6205,7 @@
           </a:bodyPr>
           <a:lstStyle/>
           <a:p>
-            <a:pPr algn="ctr" indent="0" marL="0">
+            <a:pPr marL="0" indent="0" algn="ctr">
               <a:buNone/>
             </a:pPr>
             <a:r>
@@ -6139,6 +6251,13 @@
             <a:prstDash val="solid"/>
           </a:ln>
         </p:spPr>
+        <p:txBody>
+          <a:bodyPr/>
+          <a:lstStyle/>
+          <a:p>
+            <a:endParaRPr lang="en-US"/>
+          </a:p>
+        </p:txBody>
       </p:sp>
       <p:sp>
         <p:nvSpPr>
@@ -6163,7 +6282,7 @@
           </a:bodyPr>
           <a:lstStyle/>
           <a:p>
-            <a:pPr algn="ctr" indent="0" marL="0">
+            <a:pPr marL="0" indent="0" algn="ctr">
               <a:buNone/>
             </a:pPr>
             <a:r>
@@ -6209,6 +6328,13 @@
             <a:prstDash val="solid"/>
           </a:ln>
         </p:spPr>
+        <p:txBody>
+          <a:bodyPr/>
+          <a:lstStyle/>
+          <a:p>
+            <a:endParaRPr lang="en-US"/>
+          </a:p>
+        </p:txBody>
       </p:sp>
       <p:sp>
         <p:nvSpPr>
@@ -6233,7 +6359,7 @@
           </a:bodyPr>
           <a:lstStyle/>
           <a:p>
-            <a:pPr algn="ctr" indent="0" marL="0">
+            <a:pPr marL="0" indent="0" algn="ctr">
               <a:buNone/>
             </a:pPr>
             <a:r>
@@ -6281,6 +6407,13 @@
             <a:prstDash val="solid"/>
           </a:ln>
         </p:spPr>
+        <p:txBody>
+          <a:bodyPr/>
+          <a:lstStyle/>
+          <a:p>
+            <a:endParaRPr lang="en-US"/>
+          </a:p>
+        </p:txBody>
       </p:sp>
       <p:sp>
         <p:nvSpPr>
@@ -6305,7 +6438,7 @@
           </a:bodyPr>
           <a:lstStyle/>
           <a:p>
-            <a:pPr algn="ctr" indent="0" marL="0">
+            <a:pPr marL="0" indent="0" algn="ctr">
               <a:buNone/>
             </a:pPr>
             <a:r>
@@ -6353,6 +6486,13 @@
             <a:prstDash val="solid"/>
           </a:ln>
         </p:spPr>
+        <p:txBody>
+          <a:bodyPr/>
+          <a:lstStyle/>
+          <a:p>
+            <a:endParaRPr lang="en-US"/>
+          </a:p>
+        </p:txBody>
       </p:sp>
       <p:sp>
         <p:nvSpPr>
@@ -6377,7 +6517,7 @@
           </a:bodyPr>
           <a:lstStyle/>
           <a:p>
-            <a:pPr algn="ctr" indent="0" marL="0">
+            <a:pPr marL="0" indent="0" algn="ctr">
               <a:buNone/>
             </a:pPr>
             <a:r>
@@ -6425,6 +6565,13 @@
             <a:prstDash val="solid"/>
           </a:ln>
         </p:spPr>
+        <p:txBody>
+          <a:bodyPr/>
+          <a:lstStyle/>
+          <a:p>
+            <a:endParaRPr lang="en-US"/>
+          </a:p>
+        </p:txBody>
       </p:sp>
       <p:sp>
         <p:nvSpPr>
@@ -6449,7 +6596,7 @@
           </a:bodyPr>
           <a:lstStyle/>
           <a:p>
-            <a:pPr algn="ctr" indent="0" marL="0">
+            <a:pPr marL="0" indent="0" algn="ctr">
               <a:buNone/>
             </a:pPr>
             <a:r>
@@ -6497,6 +6644,13 @@
             <a:prstDash val="solid"/>
           </a:ln>
         </p:spPr>
+        <p:txBody>
+          <a:bodyPr/>
+          <a:lstStyle/>
+          <a:p>
+            <a:endParaRPr lang="en-US"/>
+          </a:p>
+        </p:txBody>
       </p:sp>
       <p:sp>
         <p:nvSpPr>
@@ -6521,7 +6675,7 @@
           </a:bodyPr>
           <a:lstStyle/>
           <a:p>
-            <a:pPr algn="ctr" indent="0" marL="0">
+            <a:pPr marL="0" indent="0" algn="ctr">
               <a:buNone/>
             </a:pPr>
             <a:r>
@@ -6569,6 +6723,13 @@
             <a:prstDash val="solid"/>
           </a:ln>
         </p:spPr>
+        <p:txBody>
+          <a:bodyPr/>
+          <a:lstStyle/>
+          <a:p>
+            <a:endParaRPr lang="en-US"/>
+          </a:p>
+        </p:txBody>
       </p:sp>
       <p:sp>
         <p:nvSpPr>
@@ -6593,7 +6754,7 @@
           </a:bodyPr>
           <a:lstStyle/>
           <a:p>
-            <a:pPr algn="ctr" indent="0" marL="0">
+            <a:pPr marL="0" indent="0" algn="ctr">
               <a:buNone/>
             </a:pPr>
             <a:r>
@@ -6641,6 +6802,13 @@
             <a:prstDash val="solid"/>
           </a:ln>
         </p:spPr>
+        <p:txBody>
+          <a:bodyPr/>
+          <a:lstStyle/>
+          <a:p>
+            <a:endParaRPr lang="en-US"/>
+          </a:p>
+        </p:txBody>
       </p:sp>
       <p:sp>
         <p:nvSpPr>
@@ -6665,11 +6833,11 @@
           </a:bodyPr>
           <a:lstStyle/>
           <a:p>
-            <a:pPr algn="l" indent="0" marL="0">
-              <a:buNone/>
-            </a:pPr>
-            <a:r>
-              <a:rPr lang="en-US" sz="780" b="1" spc="100" kern="0" dirty="0">
+            <a:pPr marL="0" indent="0" algn="l">
+              <a:buNone/>
+            </a:pPr>
+            <a:r>
+              <a:rPr lang="en-US" sz="780" b="1" kern="0" spc="100" dirty="0">
                 <a:solidFill>
                   <a:srgbClr val="19C3B1"/>
                 </a:solidFill>
@@ -6706,7 +6874,7 @@
           </a:bodyPr>
           <a:lstStyle/>
           <a:p>
-            <a:pPr algn="l" indent="0" marL="0">
+            <a:pPr marL="0" indent="0" algn="l">
               <a:buNone/>
             </a:pPr>
             <a:r>
@@ -6726,7 +6894,7 @@
       </p:sp>
       <p:sp>
         <p:nvSpPr>
-          <p:cNvPr id="25" name="Slide Number Placeholder 0"/>
+          <p:cNvPr id="37" name="Slide Number Placeholder 0"/>
           <p:cNvSpPr>
             <a:spLocks noGrp="1"/>
           </p:cNvSpPr>
@@ -6744,7 +6912,7 @@
           </a:prstGeom>
           <a:extLst>
             <a:ext uri="{C572A759-6A51-4108-AA02-DFA0A04FC94B}">
-              <ma14:wrappingTextBoxFlag xmlns:ma14="http://schemas.microsoft.com/office/mac/drawingml/2011/main" val="0"/>
+              <ma14:wrappingTextBoxFlag xmlns:ma14="http://schemas.microsoft.com/office/mac/drawingml/2011/main" xmlns="" val="0"/>
             </a:ext>
           </a:extLst>
         </p:spPr>
@@ -6765,7 +6933,7 @@
           <a:p>
             <a:pPr algn="r"/>
             <a:fld id="{F7021451-1387-4CA6-816F-3879F97B5CBC}" type="slidenum">
-              <a:rPr b="0" lang="en-US"/>
+              <a:rPr lang="en-US" b="0"/>
               <a:t>12</a:t>
             </a:fld>
             <a:endParaRPr lang="en-US"/>
@@ -6820,11 +6988,11 @@
           </a:bodyPr>
           <a:lstStyle/>
           <a:p>
-            <a:pPr algn="l" indent="0" marL="0">
-              <a:buNone/>
-            </a:pPr>
-            <a:r>
-              <a:rPr lang="en-US" sz="850" b="1" spc="140" kern="0" dirty="0">
+            <a:pPr marL="0" indent="0" algn="l">
+              <a:buNone/>
+            </a:pPr>
+            <a:r>
+              <a:rPr lang="en-US" sz="850" b="1" kern="0" spc="140" dirty="0">
                 <a:solidFill>
                   <a:srgbClr val="19C3B1"/>
                 </a:solidFill>
@@ -6861,7 +7029,7 @@
           </a:bodyPr>
           <a:lstStyle/>
           <a:p>
-            <a:pPr algn="l" indent="0" marL="0">
+            <a:pPr marL="0" indent="0" algn="l">
               <a:buNone/>
             </a:pPr>
             <a:r>
@@ -6902,7 +7070,7 @@
           </a:bodyPr>
           <a:lstStyle/>
           <a:p>
-            <a:pPr algn="l" indent="0" marL="0">
+            <a:pPr marL="0" indent="0" algn="l">
               <a:buNone/>
             </a:pPr>
             <a:r>
@@ -6946,6 +7114,13 @@
             <a:prstDash val="solid"/>
           </a:ln>
         </p:spPr>
+        <p:txBody>
+          <a:bodyPr/>
+          <a:lstStyle/>
+          <a:p>
+            <a:endParaRPr lang="en-US"/>
+          </a:p>
+        </p:txBody>
       </p:sp>
       <p:sp>
         <p:nvSpPr>
@@ -6973,6 +7148,13 @@
             <a:prstDash val="solid"/>
           </a:ln>
         </p:spPr>
+        <p:txBody>
+          <a:bodyPr/>
+          <a:lstStyle/>
+          <a:p>
+            <a:endParaRPr lang="en-US"/>
+          </a:p>
+        </p:txBody>
       </p:sp>
       <p:sp>
         <p:nvSpPr>
@@ -6997,7 +7179,7 @@
           </a:bodyPr>
           <a:lstStyle/>
           <a:p>
-            <a:pPr algn="ctr" indent="0" marL="0">
+            <a:pPr marL="0" indent="0" algn="ctr">
               <a:buNone/>
             </a:pPr>
             <a:r>
@@ -7038,7 +7220,7 @@
           </a:bodyPr>
           <a:lstStyle/>
           <a:p>
-            <a:pPr algn="l" indent="0" marL="0">
+            <a:pPr marL="0" indent="0" algn="l">
               <a:buNone/>
             </a:pPr>
             <a:r>
@@ -7079,7 +7261,7 @@
           </a:bodyPr>
           <a:lstStyle/>
           <a:p>
-            <a:pPr algn="l" indent="0" marL="0">
+            <a:pPr marL="0" indent="0" algn="l">
               <a:buNone/>
             </a:pPr>
             <a:r>
@@ -7123,6 +7305,13 @@
             <a:prstDash val="solid"/>
           </a:ln>
         </p:spPr>
+        <p:txBody>
+          <a:bodyPr/>
+          <a:lstStyle/>
+          <a:p>
+            <a:endParaRPr lang="en-US"/>
+          </a:p>
+        </p:txBody>
       </p:sp>
       <p:sp>
         <p:nvSpPr>
@@ -7150,6 +7339,13 @@
             <a:prstDash val="solid"/>
           </a:ln>
         </p:spPr>
+        <p:txBody>
+          <a:bodyPr/>
+          <a:lstStyle/>
+          <a:p>
+            <a:endParaRPr lang="en-US"/>
+          </a:p>
+        </p:txBody>
       </p:sp>
       <p:sp>
         <p:nvSpPr>
@@ -7174,7 +7370,7 @@
           </a:bodyPr>
           <a:lstStyle/>
           <a:p>
-            <a:pPr algn="ctr" indent="0" marL="0">
+            <a:pPr marL="0" indent="0" algn="ctr">
               <a:buNone/>
             </a:pPr>
             <a:r>
@@ -7215,7 +7411,7 @@
           </a:bodyPr>
           <a:lstStyle/>
           <a:p>
-            <a:pPr algn="l" indent="0" marL="0">
+            <a:pPr marL="0" indent="0" algn="l">
               <a:buNone/>
             </a:pPr>
             <a:r>
@@ -7256,7 +7452,7 @@
           </a:bodyPr>
           <a:lstStyle/>
           <a:p>
-            <a:pPr algn="l" indent="0" marL="0">
+            <a:pPr marL="0" indent="0" algn="l">
               <a:buNone/>
             </a:pPr>
             <a:r>
@@ -7300,6 +7496,13 @@
             <a:prstDash val="solid"/>
           </a:ln>
         </p:spPr>
+        <p:txBody>
+          <a:bodyPr/>
+          <a:lstStyle/>
+          <a:p>
+            <a:endParaRPr lang="en-US"/>
+          </a:p>
+        </p:txBody>
       </p:sp>
       <p:sp>
         <p:nvSpPr>
@@ -7327,6 +7530,13 @@
             <a:prstDash val="solid"/>
           </a:ln>
         </p:spPr>
+        <p:txBody>
+          <a:bodyPr/>
+          <a:lstStyle/>
+          <a:p>
+            <a:endParaRPr lang="en-US"/>
+          </a:p>
+        </p:txBody>
       </p:sp>
       <p:sp>
         <p:nvSpPr>
@@ -7351,7 +7561,7 @@
           </a:bodyPr>
           <a:lstStyle/>
           <a:p>
-            <a:pPr algn="ctr" indent="0" marL="0">
+            <a:pPr marL="0" indent="0" algn="ctr">
               <a:buNone/>
             </a:pPr>
             <a:r>
@@ -7392,7 +7602,7 @@
           </a:bodyPr>
           <a:lstStyle/>
           <a:p>
-            <a:pPr algn="l" indent="0" marL="0">
+            <a:pPr marL="0" indent="0" algn="l">
               <a:buNone/>
             </a:pPr>
             <a:r>
@@ -7433,7 +7643,7 @@
           </a:bodyPr>
           <a:lstStyle/>
           <a:p>
-            <a:pPr algn="l" indent="0" marL="0">
+            <a:pPr marL="0" indent="0" algn="l">
               <a:buNone/>
             </a:pPr>
             <a:r>
@@ -7474,7 +7684,7 @@
           </a:bodyPr>
           <a:lstStyle/>
           <a:p>
-            <a:pPr algn="ctr" indent="0" marL="0">
+            <a:pPr marL="0" indent="0" algn="ctr">
               <a:buNone/>
             </a:pPr>
             <a:r>
@@ -7522,6 +7732,13 @@
             <a:prstDash val="solid"/>
           </a:ln>
         </p:spPr>
+        <p:txBody>
+          <a:bodyPr/>
+          <a:lstStyle/>
+          <a:p>
+            <a:endParaRPr lang="en-US"/>
+          </a:p>
+        </p:txBody>
       </p:sp>
       <p:sp>
         <p:nvSpPr>
@@ -7546,11 +7763,11 @@
           </a:bodyPr>
           <a:lstStyle/>
           <a:p>
-            <a:pPr algn="l" indent="0" marL="0">
-              <a:buNone/>
-            </a:pPr>
-            <a:r>
-              <a:rPr lang="en-US" sz="780" b="1" spc="100" kern="0" dirty="0">
+            <a:pPr marL="0" indent="0" algn="l">
+              <a:buNone/>
+            </a:pPr>
+            <a:r>
+              <a:rPr lang="en-US" sz="780" b="1" kern="0" spc="100" dirty="0">
                 <a:solidFill>
                   <a:srgbClr val="19C3B1"/>
                 </a:solidFill>
@@ -7587,7 +7804,7 @@
           </a:bodyPr>
           <a:lstStyle/>
           <a:p>
-            <a:pPr algn="l" indent="0" marL="0">
+            <a:pPr marL="0" indent="0" algn="l">
               <a:buNone/>
             </a:pPr>
             <a:r>
@@ -7625,7 +7842,7 @@
           </a:prstGeom>
           <a:extLst>
             <a:ext uri="{C572A759-6A51-4108-AA02-DFA0A04FC94B}">
-              <ma14:wrappingTextBoxFlag xmlns:ma14="http://schemas.microsoft.com/office/mac/drawingml/2011/main" val="0"/>
+              <ma14:wrappingTextBoxFlag xmlns:ma14="http://schemas.microsoft.com/office/mac/drawingml/2011/main" xmlns="" val="0"/>
             </a:ext>
           </a:extLst>
         </p:spPr>
@@ -7646,7 +7863,7 @@
           <a:p>
             <a:pPr algn="r"/>
             <a:fld id="{F7021451-1387-4CA6-816F-3879F97B5CBC}" type="slidenum">
-              <a:rPr b="0" lang="en-US"/>
+              <a:rPr lang="en-US" b="0"/>
               <a:t>13</a:t>
             </a:fld>
             <a:endParaRPr lang="en-US"/>
@@ -7701,11 +7918,11 @@
           </a:bodyPr>
           <a:lstStyle/>
           <a:p>
-            <a:pPr algn="l" indent="0" marL="0">
-              <a:buNone/>
-            </a:pPr>
-            <a:r>
-              <a:rPr lang="en-US" sz="850" b="1" spc="140" kern="0" dirty="0">
+            <a:pPr marL="0" indent="0" algn="l">
+              <a:buNone/>
+            </a:pPr>
+            <a:r>
+              <a:rPr lang="en-US" sz="850" b="1" kern="0" spc="140" dirty="0">
                 <a:solidFill>
                   <a:srgbClr val="19C3B1"/>
                 </a:solidFill>
@@ -7742,7 +7959,7 @@
           </a:bodyPr>
           <a:lstStyle/>
           <a:p>
-            <a:pPr algn="l" indent="0" marL="0">
+            <a:pPr marL="0" indent="0" algn="l">
               <a:buNone/>
             </a:pPr>
             <a:r>
@@ -7783,7 +8000,7 @@
           </a:bodyPr>
           <a:lstStyle/>
           <a:p>
-            <a:pPr algn="l" indent="0" marL="0">
+            <a:pPr marL="0" indent="0" algn="l">
               <a:buNone/>
             </a:pPr>
             <a:r>
@@ -7827,6 +8044,13 @@
             <a:prstDash val="solid"/>
           </a:ln>
         </p:spPr>
+        <p:txBody>
+          <a:bodyPr/>
+          <a:lstStyle/>
+          <a:p>
+            <a:endParaRPr lang="en-US"/>
+          </a:p>
+        </p:txBody>
       </p:sp>
       <p:sp>
         <p:nvSpPr>
@@ -7852,6 +8076,13 @@
             <a:prstDash val="solid"/>
           </a:ln>
         </p:spPr>
+        <p:txBody>
+          <a:bodyPr/>
+          <a:lstStyle/>
+          <a:p>
+            <a:endParaRPr lang="en-US"/>
+          </a:p>
+        </p:txBody>
       </p:sp>
       <p:sp>
         <p:nvSpPr>
@@ -7876,7 +8107,7 @@
           </a:bodyPr>
           <a:lstStyle/>
           <a:p>
-            <a:pPr algn="l" indent="0" marL="0">
+            <a:pPr marL="0" indent="0" algn="l">
               <a:buNone/>
             </a:pPr>
             <a:r>
@@ -7917,7 +8148,7 @@
           </a:bodyPr>
           <a:lstStyle/>
           <a:p>
-            <a:pPr algn="l" indent="0" marL="0">
+            <a:pPr marL="0" indent="0" algn="l">
               <a:buNone/>
             </a:pPr>
             <a:r>
@@ -7961,6 +8192,13 @@
             <a:prstDash val="solid"/>
           </a:ln>
         </p:spPr>
+        <p:txBody>
+          <a:bodyPr/>
+          <a:lstStyle/>
+          <a:p>
+            <a:endParaRPr lang="en-US"/>
+          </a:p>
+        </p:txBody>
       </p:sp>
       <p:sp>
         <p:nvSpPr>
@@ -7986,6 +8224,13 @@
             <a:prstDash val="solid"/>
           </a:ln>
         </p:spPr>
+        <p:txBody>
+          <a:bodyPr/>
+          <a:lstStyle/>
+          <a:p>
+            <a:endParaRPr lang="en-US"/>
+          </a:p>
+        </p:txBody>
       </p:sp>
       <p:sp>
         <p:nvSpPr>
@@ -8010,7 +8255,7 @@
           </a:bodyPr>
           <a:lstStyle/>
           <a:p>
-            <a:pPr algn="l" indent="0" marL="0">
+            <a:pPr marL="0" indent="0" algn="l">
               <a:buNone/>
             </a:pPr>
             <a:r>
@@ -8051,7 +8296,7 @@
           </a:bodyPr>
           <a:lstStyle/>
           <a:p>
-            <a:pPr algn="l" indent="0" marL="0">
+            <a:pPr marL="0" indent="0" algn="l">
               <a:buNone/>
             </a:pPr>
             <a:r>
@@ -8095,6 +8340,13 @@
             <a:prstDash val="solid"/>
           </a:ln>
         </p:spPr>
+        <p:txBody>
+          <a:bodyPr/>
+          <a:lstStyle/>
+          <a:p>
+            <a:endParaRPr lang="en-US"/>
+          </a:p>
+        </p:txBody>
       </p:sp>
       <p:sp>
         <p:nvSpPr>
@@ -8120,6 +8372,13 @@
             <a:prstDash val="solid"/>
           </a:ln>
         </p:spPr>
+        <p:txBody>
+          <a:bodyPr/>
+          <a:lstStyle/>
+          <a:p>
+            <a:endParaRPr lang="en-US"/>
+          </a:p>
+        </p:txBody>
       </p:sp>
       <p:sp>
         <p:nvSpPr>
@@ -8144,7 +8403,7 @@
           </a:bodyPr>
           <a:lstStyle/>
           <a:p>
-            <a:pPr algn="l" indent="0" marL="0">
+            <a:pPr marL="0" indent="0" algn="l">
               <a:buNone/>
             </a:pPr>
             <a:r>
@@ -8185,7 +8444,7 @@
           </a:bodyPr>
           <a:lstStyle/>
           <a:p>
-            <a:pPr algn="l" indent="0" marL="0">
+            <a:pPr marL="0" indent="0" algn="l">
               <a:buNone/>
             </a:pPr>
             <a:r>
@@ -8229,6 +8488,13 @@
             <a:prstDash val="solid"/>
           </a:ln>
         </p:spPr>
+        <p:txBody>
+          <a:bodyPr/>
+          <a:lstStyle/>
+          <a:p>
+            <a:endParaRPr lang="en-US"/>
+          </a:p>
+        </p:txBody>
       </p:sp>
       <p:sp>
         <p:nvSpPr>
@@ -8254,6 +8520,13 @@
             <a:prstDash val="solid"/>
           </a:ln>
         </p:spPr>
+        <p:txBody>
+          <a:bodyPr/>
+          <a:lstStyle/>
+          <a:p>
+            <a:endParaRPr lang="en-US"/>
+          </a:p>
+        </p:txBody>
       </p:sp>
       <p:sp>
         <p:nvSpPr>
@@ -8278,7 +8551,7 @@
           </a:bodyPr>
           <a:lstStyle/>
           <a:p>
-            <a:pPr algn="l" indent="0" marL="0">
+            <a:pPr marL="0" indent="0" algn="l">
               <a:buNone/>
             </a:pPr>
             <a:r>
@@ -8319,7 +8592,7 @@
           </a:bodyPr>
           <a:lstStyle/>
           <a:p>
-            <a:pPr algn="l" indent="0" marL="0">
+            <a:pPr marL="0" indent="0" algn="l">
               <a:buNone/>
             </a:pPr>
             <a:r>
@@ -8363,6 +8636,13 @@
             <a:prstDash val="solid"/>
           </a:ln>
         </p:spPr>
+        <p:txBody>
+          <a:bodyPr/>
+          <a:lstStyle/>
+          <a:p>
+            <a:endParaRPr lang="en-US"/>
+          </a:p>
+        </p:txBody>
       </p:sp>
       <p:sp>
         <p:nvSpPr>
@@ -8388,6 +8668,13 @@
             <a:prstDash val="solid"/>
           </a:ln>
         </p:spPr>
+        <p:txBody>
+          <a:bodyPr/>
+          <a:lstStyle/>
+          <a:p>
+            <a:endParaRPr lang="en-US"/>
+          </a:p>
+        </p:txBody>
       </p:sp>
       <p:sp>
         <p:nvSpPr>
@@ -8412,7 +8699,7 @@
           </a:bodyPr>
           <a:lstStyle/>
           <a:p>
-            <a:pPr algn="l" indent="0" marL="0">
+            <a:pPr marL="0" indent="0" algn="l">
               <a:buNone/>
             </a:pPr>
             <a:r>
@@ -8453,7 +8740,7 @@
           </a:bodyPr>
           <a:lstStyle/>
           <a:p>
-            <a:pPr algn="l" indent="0" marL="0">
+            <a:pPr marL="0" indent="0" algn="l">
               <a:buNone/>
             </a:pPr>
             <a:r>
@@ -8497,6 +8784,13 @@
             <a:prstDash val="solid"/>
           </a:ln>
         </p:spPr>
+        <p:txBody>
+          <a:bodyPr/>
+          <a:lstStyle/>
+          <a:p>
+            <a:endParaRPr lang="en-US"/>
+          </a:p>
+        </p:txBody>
       </p:sp>
       <p:sp>
         <p:nvSpPr>
@@ -8522,6 +8816,13 @@
             <a:prstDash val="solid"/>
           </a:ln>
         </p:spPr>
+        <p:txBody>
+          <a:bodyPr/>
+          <a:lstStyle/>
+          <a:p>
+            <a:endParaRPr lang="en-US"/>
+          </a:p>
+        </p:txBody>
       </p:sp>
       <p:sp>
         <p:nvSpPr>
@@ -8546,7 +8847,7 @@
           </a:bodyPr>
           <a:lstStyle/>
           <a:p>
-            <a:pPr algn="l" indent="0" marL="0">
+            <a:pPr marL="0" indent="0" algn="l">
               <a:buNone/>
             </a:pPr>
             <a:r>
@@ -8587,7 +8888,7 @@
           </a:bodyPr>
           <a:lstStyle/>
           <a:p>
-            <a:pPr algn="l" indent="0" marL="0">
+            <a:pPr marL="0" indent="0" algn="l">
               <a:buNone/>
             </a:pPr>
             <a:r>
@@ -8628,7 +8929,7 @@
           </a:bodyPr>
           <a:lstStyle/>
           <a:p>
-            <a:pPr algn="ctr" indent="0" marL="0">
+            <a:pPr marL="0" indent="0" algn="ctr">
               <a:buNone/>
             </a:pPr>
             <a:r>
@@ -8676,6 +8977,13 @@
             <a:prstDash val="solid"/>
           </a:ln>
         </p:spPr>
+        <p:txBody>
+          <a:bodyPr/>
+          <a:lstStyle/>
+          <a:p>
+            <a:endParaRPr lang="en-US"/>
+          </a:p>
+        </p:txBody>
       </p:sp>
       <p:sp>
         <p:nvSpPr>
@@ -8700,11 +9008,11 @@
           </a:bodyPr>
           <a:lstStyle/>
           <a:p>
-            <a:pPr algn="l" indent="0" marL="0">
-              <a:buNone/>
-            </a:pPr>
-            <a:r>
-              <a:rPr lang="en-US" sz="780" b="1" spc="100" kern="0" dirty="0">
+            <a:pPr marL="0" indent="0" algn="l">
+              <a:buNone/>
+            </a:pPr>
+            <a:r>
+              <a:rPr lang="en-US" sz="780" b="1" kern="0" spc="100" dirty="0">
                 <a:solidFill>
                   <a:srgbClr val="19C3B1"/>
                 </a:solidFill>
@@ -8741,7 +9049,7 @@
           </a:bodyPr>
           <a:lstStyle/>
           <a:p>
-            <a:pPr algn="l" indent="0" marL="0">
+            <a:pPr marL="0" indent="0" algn="l">
               <a:buNone/>
             </a:pPr>
             <a:r>
@@ -8761,7 +9069,7 @@
       </p:sp>
       <p:sp>
         <p:nvSpPr>
-          <p:cNvPr id="25" name="Slide Number Placeholder 0"/>
+          <p:cNvPr id="33" name="Slide Number Placeholder 0"/>
           <p:cNvSpPr>
             <a:spLocks noGrp="1"/>
           </p:cNvSpPr>
@@ -8779,7 +9087,7 @@
           </a:prstGeom>
           <a:extLst>
             <a:ext uri="{C572A759-6A51-4108-AA02-DFA0A04FC94B}">
-              <ma14:wrappingTextBoxFlag xmlns:ma14="http://schemas.microsoft.com/office/mac/drawingml/2011/main" val="0"/>
+              <ma14:wrappingTextBoxFlag xmlns:ma14="http://schemas.microsoft.com/office/mac/drawingml/2011/main" xmlns="" val="0"/>
             </a:ext>
           </a:extLst>
         </p:spPr>
@@ -8800,7 +9108,7 @@
           <a:p>
             <a:pPr algn="r"/>
             <a:fld id="{F7021451-1387-4CA6-816F-3879F97B5CBC}" type="slidenum">
-              <a:rPr b="0" lang="en-US"/>
+              <a:rPr lang="en-US" b="0"/>
               <a:t>14</a:t>
             </a:fld>
             <a:endParaRPr lang="en-US"/>
@@ -8855,11 +9163,11 @@
           </a:bodyPr>
           <a:lstStyle/>
           <a:p>
-            <a:pPr algn="l" indent="0" marL="0">
-              <a:buNone/>
-            </a:pPr>
-            <a:r>
-              <a:rPr lang="en-US" sz="850" b="1" spc="140" kern="0" dirty="0">
+            <a:pPr marL="0" indent="0" algn="l">
+              <a:buNone/>
+            </a:pPr>
+            <a:r>
+              <a:rPr lang="en-US" sz="850" b="1" kern="0" spc="140" dirty="0">
                 <a:solidFill>
                   <a:srgbClr val="19C3B1"/>
                 </a:solidFill>
@@ -8896,7 +9204,7 @@
           </a:bodyPr>
           <a:lstStyle/>
           <a:p>
-            <a:pPr algn="l" indent="0" marL="0">
+            <a:pPr marL="0" indent="0" algn="l">
               <a:buNone/>
             </a:pPr>
             <a:r>
@@ -8937,7 +9245,7 @@
           </a:bodyPr>
           <a:lstStyle/>
           <a:p>
-            <a:pPr algn="l" indent="0" marL="0">
+            <a:pPr marL="0" indent="0" algn="l">
               <a:buNone/>
             </a:pPr>
             <a:r>
@@ -8983,6 +9291,13 @@
             <a:prstDash val="solid"/>
           </a:ln>
         </p:spPr>
+        <p:txBody>
+          <a:bodyPr/>
+          <a:lstStyle/>
+          <a:p>
+            <a:endParaRPr lang="en-US"/>
+          </a:p>
+        </p:txBody>
       </p:sp>
       <p:sp>
         <p:nvSpPr>
@@ -9007,7 +9322,7 @@
           </a:bodyPr>
           <a:lstStyle/>
           <a:p>
-            <a:pPr algn="ctr" indent="0" marL="0">
+            <a:pPr marL="0" indent="0" algn="ctr">
               <a:buNone/>
             </a:pPr>
             <a:r>
@@ -9048,7 +9363,7 @@
           </a:bodyPr>
           <a:lstStyle/>
           <a:p>
-            <a:pPr algn="ctr" indent="0" marL="0">
+            <a:pPr marL="0" indent="0" algn="ctr">
               <a:buNone/>
             </a:pPr>
             <a:r>
@@ -9090,6 +9405,13 @@
             <a:tailEnd type="triangle"/>
           </a:ln>
         </p:spPr>
+        <p:txBody>
+          <a:bodyPr/>
+          <a:lstStyle/>
+          <a:p>
+            <a:endParaRPr lang="en-US"/>
+          </a:p>
+        </p:txBody>
       </p:sp>
       <p:sp>
         <p:nvSpPr>
@@ -9119,6 +9441,13 @@
             <a:prstDash val="solid"/>
           </a:ln>
         </p:spPr>
+        <p:txBody>
+          <a:bodyPr/>
+          <a:lstStyle/>
+          <a:p>
+            <a:endParaRPr lang="en-US"/>
+          </a:p>
+        </p:txBody>
       </p:sp>
       <p:sp>
         <p:nvSpPr>
@@ -9143,7 +9472,7 @@
           </a:bodyPr>
           <a:lstStyle/>
           <a:p>
-            <a:pPr algn="ctr" indent="0" marL="0">
+            <a:pPr marL="0" indent="0" algn="ctr">
               <a:buNone/>
             </a:pPr>
             <a:r>
@@ -9184,7 +9513,7 @@
           </a:bodyPr>
           <a:lstStyle/>
           <a:p>
-            <a:pPr algn="ctr" indent="0" marL="0">
+            <a:pPr marL="0" indent="0" algn="ctr">
               <a:buNone/>
             </a:pPr>
             <a:r>
@@ -9226,6 +9555,13 @@
             <a:tailEnd type="triangle"/>
           </a:ln>
         </p:spPr>
+        <p:txBody>
+          <a:bodyPr/>
+          <a:lstStyle/>
+          <a:p>
+            <a:endParaRPr lang="en-US"/>
+          </a:p>
+        </p:txBody>
       </p:sp>
       <p:sp>
         <p:nvSpPr>
@@ -9255,6 +9591,13 @@
             <a:prstDash val="solid"/>
           </a:ln>
         </p:spPr>
+        <p:txBody>
+          <a:bodyPr/>
+          <a:lstStyle/>
+          <a:p>
+            <a:endParaRPr lang="en-US"/>
+          </a:p>
+        </p:txBody>
       </p:sp>
       <p:sp>
         <p:nvSpPr>
@@ -9279,7 +9622,7 @@
           </a:bodyPr>
           <a:lstStyle/>
           <a:p>
-            <a:pPr algn="ctr" indent="0" marL="0">
+            <a:pPr marL="0" indent="0" algn="ctr">
               <a:buNone/>
             </a:pPr>
             <a:r>
@@ -9320,7 +9663,7 @@
           </a:bodyPr>
           <a:lstStyle/>
           <a:p>
-            <a:pPr algn="ctr" indent="0" marL="0">
+            <a:pPr marL="0" indent="0" algn="ctr">
               <a:buNone/>
             </a:pPr>
             <a:r>
@@ -9362,6 +9705,13 @@
             <a:tailEnd type="triangle"/>
           </a:ln>
         </p:spPr>
+        <p:txBody>
+          <a:bodyPr/>
+          <a:lstStyle/>
+          <a:p>
+            <a:endParaRPr lang="en-US"/>
+          </a:p>
+        </p:txBody>
       </p:sp>
       <p:sp>
         <p:nvSpPr>
@@ -9391,6 +9741,13 @@
             <a:prstDash val="solid"/>
           </a:ln>
         </p:spPr>
+        <p:txBody>
+          <a:bodyPr/>
+          <a:lstStyle/>
+          <a:p>
+            <a:endParaRPr lang="en-US"/>
+          </a:p>
+        </p:txBody>
       </p:sp>
       <p:sp>
         <p:nvSpPr>
@@ -9415,7 +9772,7 @@
           </a:bodyPr>
           <a:lstStyle/>
           <a:p>
-            <a:pPr algn="ctr" indent="0" marL="0">
+            <a:pPr marL="0" indent="0" algn="ctr">
               <a:buNone/>
             </a:pPr>
             <a:r>
@@ -9456,7 +9813,7 @@
           </a:bodyPr>
           <a:lstStyle/>
           <a:p>
-            <a:pPr algn="ctr" indent="0" marL="0">
+            <a:pPr marL="0" indent="0" algn="ctr">
               <a:buNone/>
             </a:pPr>
             <a:r>
@@ -9498,6 +9855,13 @@
             <a:tailEnd type="triangle"/>
           </a:ln>
         </p:spPr>
+        <p:txBody>
+          <a:bodyPr/>
+          <a:lstStyle/>
+          <a:p>
+            <a:endParaRPr lang="en-US"/>
+          </a:p>
+        </p:txBody>
       </p:sp>
       <p:sp>
         <p:nvSpPr>
@@ -9527,6 +9891,13 @@
             <a:prstDash val="solid"/>
           </a:ln>
         </p:spPr>
+        <p:txBody>
+          <a:bodyPr/>
+          <a:lstStyle/>
+          <a:p>
+            <a:endParaRPr lang="en-US"/>
+          </a:p>
+        </p:txBody>
       </p:sp>
       <p:sp>
         <p:nvSpPr>
@@ -9551,7 +9922,7 @@
           </a:bodyPr>
           <a:lstStyle/>
           <a:p>
-            <a:pPr algn="ctr" indent="0" marL="0">
+            <a:pPr marL="0" indent="0" algn="ctr">
               <a:buNone/>
             </a:pPr>
             <a:r>
@@ -9592,7 +9963,7 @@
           </a:bodyPr>
           <a:lstStyle/>
           <a:p>
-            <a:pPr algn="ctr" indent="0" marL="0">
+            <a:pPr marL="0" indent="0" algn="ctr">
               <a:buNone/>
             </a:pPr>
             <a:r>
@@ -9633,7 +10004,7 @@
           </a:bodyPr>
           <a:lstStyle/>
           <a:p>
-            <a:pPr algn="l" indent="0" marL="0">
+            <a:pPr marL="0" indent="0" algn="l">
               <a:buNone/>
             </a:pPr>
             <a:r>
@@ -9674,7 +10045,7 @@
           </a:bodyPr>
           <a:lstStyle/>
           <a:p>
-            <a:pPr algn="l" indent="0" marL="0">
+            <a:pPr marL="0" indent="0" algn="l">
               <a:buNone/>
             </a:pPr>
             <a:r>
@@ -9720,6 +10091,13 @@
             <a:prstDash val="solid"/>
           </a:ln>
         </p:spPr>
+        <p:txBody>
+          <a:bodyPr/>
+          <a:lstStyle/>
+          <a:p>
+            <a:endParaRPr lang="en-US"/>
+          </a:p>
+        </p:txBody>
       </p:sp>
       <p:sp>
         <p:nvSpPr>
@@ -9744,11 +10122,11 @@
           </a:bodyPr>
           <a:lstStyle/>
           <a:p>
-            <a:pPr algn="ctr" indent="0" marL="0">
-              <a:buNone/>
-            </a:pPr>
-            <a:r>
-              <a:rPr lang="en-US" sz="900" b="1" spc="130" kern="0" dirty="0">
+            <a:pPr marL="0" indent="0" algn="ctr">
+              <a:buNone/>
+            </a:pPr>
+            <a:r>
+              <a:rPr lang="en-US" sz="900" b="1" kern="0" spc="130" dirty="0">
                 <a:solidFill>
                   <a:srgbClr val="FF6B6B"/>
                 </a:solidFill>
@@ -9785,7 +10163,7 @@
           </a:bodyPr>
           <a:lstStyle/>
           <a:p>
-            <a:pPr algn="ctr" indent="0" marL="0">
+            <a:pPr marL="0" indent="0" algn="ctr">
               <a:buNone/>
             </a:pPr>
             <a:r>
@@ -9833,6 +10211,13 @@
             <a:prstDash val="solid"/>
           </a:ln>
         </p:spPr>
+        <p:txBody>
+          <a:bodyPr/>
+          <a:lstStyle/>
+          <a:p>
+            <a:endParaRPr lang="en-US"/>
+          </a:p>
+        </p:txBody>
       </p:sp>
       <p:sp>
         <p:nvSpPr>
@@ -9857,11 +10242,11 @@
           </a:bodyPr>
           <a:lstStyle/>
           <a:p>
-            <a:pPr algn="l" indent="0" marL="0">
-              <a:buNone/>
-            </a:pPr>
-            <a:r>
-              <a:rPr lang="en-US" sz="780" b="1" spc="100" kern="0" dirty="0">
+            <a:pPr marL="0" indent="0" algn="l">
+              <a:buNone/>
+            </a:pPr>
+            <a:r>
+              <a:rPr lang="en-US" sz="780" b="1" kern="0" spc="100" dirty="0">
                 <a:solidFill>
                   <a:srgbClr val="19C3B1"/>
                 </a:solidFill>
@@ -9898,7 +10283,7 @@
           </a:bodyPr>
           <a:lstStyle/>
           <a:p>
-            <a:pPr algn="l" indent="0" marL="0">
+            <a:pPr marL="0" indent="0" algn="l">
               <a:buNone/>
             </a:pPr>
             <a:r>
@@ -9918,7 +10303,7 @@
       </p:sp>
       <p:sp>
         <p:nvSpPr>
-          <p:cNvPr id="25" name="Slide Number Placeholder 0"/>
+          <p:cNvPr id="32" name="Slide Number Placeholder 0"/>
           <p:cNvSpPr>
             <a:spLocks noGrp="1"/>
           </p:cNvSpPr>
@@ -9936,7 +10321,7 @@
           </a:prstGeom>
           <a:extLst>
             <a:ext uri="{C572A759-6A51-4108-AA02-DFA0A04FC94B}">
-              <ma14:wrappingTextBoxFlag xmlns:ma14="http://schemas.microsoft.com/office/mac/drawingml/2011/main" val="0"/>
+              <ma14:wrappingTextBoxFlag xmlns:ma14="http://schemas.microsoft.com/office/mac/drawingml/2011/main" xmlns="" val="0"/>
             </a:ext>
           </a:extLst>
         </p:spPr>
@@ -9957,7 +10342,7 @@
           <a:p>
             <a:pPr algn="r"/>
             <a:fld id="{F7021451-1387-4CA6-816F-3879F97B5CBC}" type="slidenum">
-              <a:rPr b="0" lang="en-US"/>
+              <a:rPr lang="en-US" b="0"/>
               <a:t>15</a:t>
             </a:fld>
             <a:endParaRPr lang="en-US"/>
@@ -10012,11 +10397,11 @@
           </a:bodyPr>
           <a:lstStyle/>
           <a:p>
-            <a:pPr algn="l" indent="0" marL="0">
-              <a:buNone/>
-            </a:pPr>
-            <a:r>
-              <a:rPr lang="en-US" sz="850" b="1" spc="140" kern="0" dirty="0">
+            <a:pPr marL="0" indent="0" algn="l">
+              <a:buNone/>
+            </a:pPr>
+            <a:r>
+              <a:rPr lang="en-US" sz="850" b="1" kern="0" spc="140" dirty="0">
                 <a:solidFill>
                   <a:srgbClr val="19C3B1"/>
                 </a:solidFill>
@@ -10053,7 +10438,7 @@
           </a:bodyPr>
           <a:lstStyle/>
           <a:p>
-            <a:pPr algn="l" indent="0" marL="0">
+            <a:pPr marL="0" indent="0" algn="l">
               <a:buNone/>
             </a:pPr>
             <a:r>
@@ -10094,7 +10479,7 @@
           </a:bodyPr>
           <a:lstStyle/>
           <a:p>
-            <a:pPr algn="l" indent="0" marL="0">
+            <a:pPr marL="0" indent="0" algn="l">
               <a:buNone/>
             </a:pPr>
             <a:r>
@@ -10138,6 +10523,13 @@
             <a:prstDash val="solid"/>
           </a:ln>
         </p:spPr>
+        <p:txBody>
+          <a:bodyPr/>
+          <a:lstStyle/>
+          <a:p>
+            <a:endParaRPr lang="en-US"/>
+          </a:p>
+        </p:txBody>
       </p:sp>
       <p:sp>
         <p:nvSpPr>
@@ -10163,6 +10555,13 @@
             <a:prstDash val="solid"/>
           </a:ln>
         </p:spPr>
+        <p:txBody>
+          <a:bodyPr/>
+          <a:lstStyle/>
+          <a:p>
+            <a:endParaRPr lang="en-US"/>
+          </a:p>
+        </p:txBody>
       </p:sp>
       <p:sp>
         <p:nvSpPr>
@@ -10187,7 +10586,7 @@
           </a:bodyPr>
           <a:lstStyle/>
           <a:p>
-            <a:pPr algn="l" indent="0" marL="0">
+            <a:pPr marL="0" indent="0" algn="l">
               <a:buNone/>
             </a:pPr>
             <a:r>
@@ -10228,7 +10627,7 @@
           </a:bodyPr>
           <a:lstStyle/>
           <a:p>
-            <a:pPr algn="l" indent="0" marL="0">
+            <a:pPr marL="0" indent="0" algn="l">
               <a:buNone/>
             </a:pPr>
             <a:r>
@@ -10272,6 +10671,13 @@
             <a:prstDash val="solid"/>
           </a:ln>
         </p:spPr>
+        <p:txBody>
+          <a:bodyPr/>
+          <a:lstStyle/>
+          <a:p>
+            <a:endParaRPr lang="en-US"/>
+          </a:p>
+        </p:txBody>
       </p:sp>
       <p:sp>
         <p:nvSpPr>
@@ -10297,6 +10703,13 @@
             <a:prstDash val="solid"/>
           </a:ln>
         </p:spPr>
+        <p:txBody>
+          <a:bodyPr/>
+          <a:lstStyle/>
+          <a:p>
+            <a:endParaRPr lang="en-US"/>
+          </a:p>
+        </p:txBody>
       </p:sp>
       <p:sp>
         <p:nvSpPr>
@@ -10321,7 +10734,7 @@
           </a:bodyPr>
           <a:lstStyle/>
           <a:p>
-            <a:pPr algn="l" indent="0" marL="0">
+            <a:pPr marL="0" indent="0" algn="l">
               <a:buNone/>
             </a:pPr>
             <a:r>
@@ -10362,7 +10775,7 @@
           </a:bodyPr>
           <a:lstStyle/>
           <a:p>
-            <a:pPr algn="l" indent="0" marL="0">
+            <a:pPr marL="0" indent="0" algn="l">
               <a:buNone/>
             </a:pPr>
             <a:r>
@@ -10406,6 +10819,13 @@
             <a:prstDash val="solid"/>
           </a:ln>
         </p:spPr>
+        <p:txBody>
+          <a:bodyPr/>
+          <a:lstStyle/>
+          <a:p>
+            <a:endParaRPr lang="en-US"/>
+          </a:p>
+        </p:txBody>
       </p:sp>
       <p:sp>
         <p:nvSpPr>
@@ -10431,6 +10851,13 @@
             <a:prstDash val="solid"/>
           </a:ln>
         </p:spPr>
+        <p:txBody>
+          <a:bodyPr/>
+          <a:lstStyle/>
+          <a:p>
+            <a:endParaRPr lang="en-US"/>
+          </a:p>
+        </p:txBody>
       </p:sp>
       <p:sp>
         <p:nvSpPr>
@@ -10455,7 +10882,7 @@
           </a:bodyPr>
           <a:lstStyle/>
           <a:p>
-            <a:pPr algn="l" indent="0" marL="0">
+            <a:pPr marL="0" indent="0" algn="l">
               <a:buNone/>
             </a:pPr>
             <a:r>
@@ -10496,7 +10923,7 @@
           </a:bodyPr>
           <a:lstStyle/>
           <a:p>
-            <a:pPr algn="l" indent="0" marL="0">
+            <a:pPr marL="0" indent="0" algn="l">
               <a:buNone/>
             </a:pPr>
             <a:r>
@@ -10540,6 +10967,13 @@
             <a:prstDash val="solid"/>
           </a:ln>
         </p:spPr>
+        <p:txBody>
+          <a:bodyPr/>
+          <a:lstStyle/>
+          <a:p>
+            <a:endParaRPr lang="en-US"/>
+          </a:p>
+        </p:txBody>
       </p:sp>
       <p:sp>
         <p:nvSpPr>
@@ -10565,6 +10999,13 @@
             <a:prstDash val="solid"/>
           </a:ln>
         </p:spPr>
+        <p:txBody>
+          <a:bodyPr/>
+          <a:lstStyle/>
+          <a:p>
+            <a:endParaRPr lang="en-US"/>
+          </a:p>
+        </p:txBody>
       </p:sp>
       <p:sp>
         <p:nvSpPr>
@@ -10589,7 +11030,7 @@
           </a:bodyPr>
           <a:lstStyle/>
           <a:p>
-            <a:pPr algn="l" indent="0" marL="0">
+            <a:pPr marL="0" indent="0" algn="l">
               <a:buNone/>
             </a:pPr>
             <a:r>
@@ -10630,7 +11071,7 @@
           </a:bodyPr>
           <a:lstStyle/>
           <a:p>
-            <a:pPr algn="l" indent="0" marL="0">
+            <a:pPr marL="0" indent="0" algn="l">
               <a:buNone/>
             </a:pPr>
             <a:r>
@@ -10674,6 +11115,13 @@
             <a:prstDash val="solid"/>
           </a:ln>
         </p:spPr>
+        <p:txBody>
+          <a:bodyPr/>
+          <a:lstStyle/>
+          <a:p>
+            <a:endParaRPr lang="en-US"/>
+          </a:p>
+        </p:txBody>
       </p:sp>
       <p:sp>
         <p:nvSpPr>
@@ -10698,7 +11146,7 @@
           </a:bodyPr>
           <a:lstStyle/>
           <a:p>
-            <a:pPr algn="l" indent="0" marL="0">
+            <a:pPr marL="0" indent="0" algn="l">
               <a:buNone/>
             </a:pPr>
             <a:r>
@@ -10739,7 +11187,7 @@
           </a:bodyPr>
           <a:lstStyle/>
           <a:p>
-            <a:pPr algn="l" indent="0" marL="0">
+            <a:pPr marL="0" indent="0" algn="l">
               <a:buNone/>
             </a:pPr>
             <a:r>
@@ -10780,7 +11228,7 @@
           </a:bodyPr>
           <a:lstStyle/>
           <a:p>
-            <a:pPr algn="l" indent="0" marL="0">
+            <a:pPr marL="0" indent="0" algn="l">
               <a:buNone/>
             </a:pPr>
             <a:r>
@@ -10821,7 +11269,7 @@
           </a:bodyPr>
           <a:lstStyle/>
           <a:p>
-            <a:pPr algn="l" indent="0" marL="0">
+            <a:pPr marL="0" indent="0" algn="l">
               <a:buNone/>
             </a:pPr>
             <a:r>
@@ -10869,6 +11317,13 @@
             <a:prstDash val="solid"/>
           </a:ln>
         </p:spPr>
+        <p:txBody>
+          <a:bodyPr/>
+          <a:lstStyle/>
+          <a:p>
+            <a:endParaRPr lang="en-US"/>
+          </a:p>
+        </p:txBody>
       </p:sp>
       <p:sp>
         <p:nvSpPr>
@@ -10893,11 +11348,11 @@
           </a:bodyPr>
           <a:lstStyle/>
           <a:p>
-            <a:pPr algn="l" indent="0" marL="0">
-              <a:buNone/>
-            </a:pPr>
-            <a:r>
-              <a:rPr lang="en-US" sz="780" b="1" spc="100" kern="0" dirty="0">
+            <a:pPr marL="0" indent="0" algn="l">
+              <a:buNone/>
+            </a:pPr>
+            <a:r>
+              <a:rPr lang="en-US" sz="780" b="1" kern="0" spc="100" dirty="0">
                 <a:solidFill>
                   <a:srgbClr val="19C3B1"/>
                 </a:solidFill>
@@ -10934,7 +11389,7 @@
           </a:bodyPr>
           <a:lstStyle/>
           <a:p>
-            <a:pPr algn="l" indent="0" marL="0">
+            <a:pPr marL="0" indent="0" algn="l">
               <a:buNone/>
             </a:pPr>
             <a:r>
@@ -10954,7 +11409,7 @@
       </p:sp>
       <p:sp>
         <p:nvSpPr>
-          <p:cNvPr id="25" name="Slide Number Placeholder 0"/>
+          <p:cNvPr id="29" name="Slide Number Placeholder 0"/>
           <p:cNvSpPr>
             <a:spLocks noGrp="1"/>
           </p:cNvSpPr>
@@ -10972,7 +11427,7 @@
           </a:prstGeom>
           <a:extLst>
             <a:ext uri="{C572A759-6A51-4108-AA02-DFA0A04FC94B}">
-              <ma14:wrappingTextBoxFlag xmlns:ma14="http://schemas.microsoft.com/office/mac/drawingml/2011/main" val="0"/>
+              <ma14:wrappingTextBoxFlag xmlns:ma14="http://schemas.microsoft.com/office/mac/drawingml/2011/main" xmlns="" val="0"/>
             </a:ext>
           </a:extLst>
         </p:spPr>
@@ -10993,7 +11448,7 @@
           <a:p>
             <a:pPr algn="r"/>
             <a:fld id="{F7021451-1387-4CA6-816F-3879F97B5CBC}" type="slidenum">
-              <a:rPr b="0" lang="en-US"/>
+              <a:rPr lang="en-US" b="0"/>
               <a:t>16</a:t>
             </a:fld>
             <a:endParaRPr lang="en-US"/>
@@ -11048,11 +11503,11 @@
           </a:bodyPr>
           <a:lstStyle/>
           <a:p>
-            <a:pPr algn="l" indent="0" marL="0">
-              <a:buNone/>
-            </a:pPr>
-            <a:r>
-              <a:rPr lang="en-US" sz="850" b="1" spc="140" kern="0" dirty="0">
+            <a:pPr marL="0" indent="0" algn="l">
+              <a:buNone/>
+            </a:pPr>
+            <a:r>
+              <a:rPr lang="en-US" sz="850" b="1" kern="0" spc="140" dirty="0">
                 <a:solidFill>
                   <a:srgbClr val="19C3B1"/>
                 </a:solidFill>
@@ -11089,7 +11544,7 @@
           </a:bodyPr>
           <a:lstStyle/>
           <a:p>
-            <a:pPr algn="l" indent="0" marL="0">
+            <a:pPr marL="0" indent="0" algn="l">
               <a:buNone/>
             </a:pPr>
             <a:r>
@@ -11130,7 +11585,7 @@
           </a:bodyPr>
           <a:lstStyle/>
           <a:p>
-            <a:pPr algn="l" indent="0" marL="0">
+            <a:pPr marL="0" indent="0" algn="l">
               <a:buNone/>
             </a:pPr>
             <a:r>
@@ -11174,6 +11629,13 @@
             <a:prstDash val="solid"/>
           </a:ln>
         </p:spPr>
+        <p:txBody>
+          <a:bodyPr/>
+          <a:lstStyle/>
+          <a:p>
+            <a:endParaRPr lang="en-US"/>
+          </a:p>
+        </p:txBody>
       </p:sp>
       <p:sp>
         <p:nvSpPr>
@@ -11199,6 +11661,13 @@
             <a:prstDash val="solid"/>
           </a:ln>
         </p:spPr>
+        <p:txBody>
+          <a:bodyPr/>
+          <a:lstStyle/>
+          <a:p>
+            <a:endParaRPr lang="en-US"/>
+          </a:p>
+        </p:txBody>
       </p:sp>
       <p:sp>
         <p:nvSpPr>
@@ -11223,7 +11692,7 @@
           </a:bodyPr>
           <a:lstStyle/>
           <a:p>
-            <a:pPr algn="l" indent="0" marL="0">
+            <a:pPr marL="0" indent="0" algn="l">
               <a:buNone/>
             </a:pPr>
             <a:r>
@@ -11264,7 +11733,7 @@
           </a:bodyPr>
           <a:lstStyle/>
           <a:p>
-            <a:pPr algn="l" indent="0" marL="0">
+            <a:pPr marL="0" indent="0" algn="l">
               <a:buNone/>
             </a:pPr>
             <a:r>
@@ -11308,6 +11777,13 @@
             <a:prstDash val="solid"/>
           </a:ln>
         </p:spPr>
+        <p:txBody>
+          <a:bodyPr/>
+          <a:lstStyle/>
+          <a:p>
+            <a:endParaRPr lang="en-US"/>
+          </a:p>
+        </p:txBody>
       </p:sp>
       <p:sp>
         <p:nvSpPr>
@@ -11333,6 +11809,13 @@
             <a:prstDash val="solid"/>
           </a:ln>
         </p:spPr>
+        <p:txBody>
+          <a:bodyPr/>
+          <a:lstStyle/>
+          <a:p>
+            <a:endParaRPr lang="en-US"/>
+          </a:p>
+        </p:txBody>
       </p:sp>
       <p:sp>
         <p:nvSpPr>
@@ -11357,7 +11840,7 @@
           </a:bodyPr>
           <a:lstStyle/>
           <a:p>
-            <a:pPr algn="l" indent="0" marL="0">
+            <a:pPr marL="0" indent="0" algn="l">
               <a:buNone/>
             </a:pPr>
             <a:r>
@@ -11398,7 +11881,7 @@
           </a:bodyPr>
           <a:lstStyle/>
           <a:p>
-            <a:pPr algn="l" indent="0" marL="0">
+            <a:pPr marL="0" indent="0" algn="l">
               <a:buNone/>
             </a:pPr>
             <a:r>
@@ -11442,6 +11925,13 @@
             <a:prstDash val="solid"/>
           </a:ln>
         </p:spPr>
+        <p:txBody>
+          <a:bodyPr/>
+          <a:lstStyle/>
+          <a:p>
+            <a:endParaRPr lang="en-US"/>
+          </a:p>
+        </p:txBody>
       </p:sp>
       <p:sp>
         <p:nvSpPr>
@@ -11467,6 +11957,13 @@
             <a:prstDash val="solid"/>
           </a:ln>
         </p:spPr>
+        <p:txBody>
+          <a:bodyPr/>
+          <a:lstStyle/>
+          <a:p>
+            <a:endParaRPr lang="en-US"/>
+          </a:p>
+        </p:txBody>
       </p:sp>
       <p:sp>
         <p:nvSpPr>
@@ -11491,7 +11988,7 @@
           </a:bodyPr>
           <a:lstStyle/>
           <a:p>
-            <a:pPr algn="l" indent="0" marL="0">
+            <a:pPr marL="0" indent="0" algn="l">
               <a:buNone/>
             </a:pPr>
             <a:r>
@@ -11532,7 +12029,7 @@
           </a:bodyPr>
           <a:lstStyle/>
           <a:p>
-            <a:pPr algn="l" indent="0" marL="0">
+            <a:pPr marL="0" indent="0" algn="l">
               <a:buNone/>
             </a:pPr>
             <a:r>
@@ -11576,6 +12073,13 @@
             <a:prstDash val="solid"/>
           </a:ln>
         </p:spPr>
+        <p:txBody>
+          <a:bodyPr/>
+          <a:lstStyle/>
+          <a:p>
+            <a:endParaRPr lang="en-US"/>
+          </a:p>
+        </p:txBody>
       </p:sp>
       <p:sp>
         <p:nvSpPr>
@@ -11601,6 +12105,13 @@
             <a:prstDash val="solid"/>
           </a:ln>
         </p:spPr>
+        <p:txBody>
+          <a:bodyPr/>
+          <a:lstStyle/>
+          <a:p>
+            <a:endParaRPr lang="en-US"/>
+          </a:p>
+        </p:txBody>
       </p:sp>
       <p:sp>
         <p:nvSpPr>
@@ -11625,7 +12136,7 @@
           </a:bodyPr>
           <a:lstStyle/>
           <a:p>
-            <a:pPr algn="l" indent="0" marL="0">
+            <a:pPr marL="0" indent="0" algn="l">
               <a:buNone/>
             </a:pPr>
             <a:r>
@@ -11666,7 +12177,7 @@
           </a:bodyPr>
           <a:lstStyle/>
           <a:p>
-            <a:pPr algn="l" indent="0" marL="0">
+            <a:pPr marL="0" indent="0" algn="l">
               <a:buNone/>
             </a:pPr>
             <a:r>
@@ -11710,6 +12221,13 @@
             <a:prstDash val="solid"/>
           </a:ln>
         </p:spPr>
+        <p:txBody>
+          <a:bodyPr/>
+          <a:lstStyle/>
+          <a:p>
+            <a:endParaRPr lang="en-US"/>
+          </a:p>
+        </p:txBody>
       </p:sp>
       <p:sp>
         <p:nvSpPr>
@@ -11735,6 +12253,13 @@
             <a:prstDash val="solid"/>
           </a:ln>
         </p:spPr>
+        <p:txBody>
+          <a:bodyPr/>
+          <a:lstStyle/>
+          <a:p>
+            <a:endParaRPr lang="en-US"/>
+          </a:p>
+        </p:txBody>
       </p:sp>
       <p:sp>
         <p:nvSpPr>
@@ -11759,7 +12284,7 @@
           </a:bodyPr>
           <a:lstStyle/>
           <a:p>
-            <a:pPr algn="l" indent="0" marL="0">
+            <a:pPr marL="0" indent="0" algn="l">
               <a:buNone/>
             </a:pPr>
             <a:r>
@@ -11800,7 +12325,7 @@
           </a:bodyPr>
           <a:lstStyle/>
           <a:p>
-            <a:pPr algn="l" indent="0" marL="0">
+            <a:pPr marL="0" indent="0" algn="l">
               <a:buNone/>
             </a:pPr>
             <a:r>
@@ -11844,6 +12369,13 @@
             <a:prstDash val="solid"/>
           </a:ln>
         </p:spPr>
+        <p:txBody>
+          <a:bodyPr/>
+          <a:lstStyle/>
+          <a:p>
+            <a:endParaRPr lang="en-US"/>
+          </a:p>
+        </p:txBody>
       </p:sp>
       <p:sp>
         <p:nvSpPr>
@@ -11869,6 +12401,13 @@
             <a:prstDash val="solid"/>
           </a:ln>
         </p:spPr>
+        <p:txBody>
+          <a:bodyPr/>
+          <a:lstStyle/>
+          <a:p>
+            <a:endParaRPr lang="en-US"/>
+          </a:p>
+        </p:txBody>
       </p:sp>
       <p:sp>
         <p:nvSpPr>
@@ -11893,7 +12432,7 @@
           </a:bodyPr>
           <a:lstStyle/>
           <a:p>
-            <a:pPr algn="l" indent="0" marL="0">
+            <a:pPr marL="0" indent="0" algn="l">
               <a:buNone/>
             </a:pPr>
             <a:r>
@@ -11934,7 +12473,7 @@
           </a:bodyPr>
           <a:lstStyle/>
           <a:p>
-            <a:pPr algn="l" indent="0" marL="0">
+            <a:pPr marL="0" indent="0" algn="l">
               <a:buNone/>
             </a:pPr>
             <a:r>
@@ -11980,6 +12519,13 @@
             <a:prstDash val="solid"/>
           </a:ln>
         </p:spPr>
+        <p:txBody>
+          <a:bodyPr/>
+          <a:lstStyle/>
+          <a:p>
+            <a:endParaRPr lang="en-US"/>
+          </a:p>
+        </p:txBody>
       </p:sp>
       <p:sp>
         <p:nvSpPr>
@@ -12004,7 +12550,7 @@
           </a:bodyPr>
           <a:lstStyle/>
           <a:p>
-            <a:pPr algn="ctr" indent="0" marL="0">
+            <a:pPr marL="0" indent="0" algn="ctr">
               <a:buNone/>
             </a:pPr>
             <a:r>
@@ -12052,6 +12598,13 @@
             <a:prstDash val="solid"/>
           </a:ln>
         </p:spPr>
+        <p:txBody>
+          <a:bodyPr/>
+          <a:lstStyle/>
+          <a:p>
+            <a:endParaRPr lang="en-US"/>
+          </a:p>
+        </p:txBody>
       </p:sp>
       <p:sp>
         <p:nvSpPr>
@@ -12076,11 +12629,11 @@
           </a:bodyPr>
           <a:lstStyle/>
           <a:p>
-            <a:pPr algn="l" indent="0" marL="0">
-              <a:buNone/>
-            </a:pPr>
-            <a:r>
-              <a:rPr lang="en-US" sz="780" b="1" spc="100" kern="0" dirty="0">
+            <a:pPr marL="0" indent="0" algn="l">
+              <a:buNone/>
+            </a:pPr>
+            <a:r>
+              <a:rPr lang="en-US" sz="780" b="1" kern="0" spc="100" dirty="0">
                 <a:solidFill>
                   <a:srgbClr val="19C3B1"/>
                 </a:solidFill>
@@ -12117,7 +12670,7 @@
           </a:bodyPr>
           <a:lstStyle/>
           <a:p>
-            <a:pPr algn="l" indent="0" marL="0">
+            <a:pPr marL="0" indent="0" algn="l">
               <a:buNone/>
             </a:pPr>
             <a:r>
@@ -12137,7 +12690,7 @@
       </p:sp>
       <p:sp>
         <p:nvSpPr>
-          <p:cNvPr id="25" name="Slide Number Placeholder 0"/>
+          <p:cNvPr id="34" name="Slide Number Placeholder 0"/>
           <p:cNvSpPr>
             <a:spLocks noGrp="1"/>
           </p:cNvSpPr>
@@ -12155,7 +12708,7 @@
           </a:prstGeom>
           <a:extLst>
             <a:ext uri="{C572A759-6A51-4108-AA02-DFA0A04FC94B}">
-              <ma14:wrappingTextBoxFlag xmlns:ma14="http://schemas.microsoft.com/office/mac/drawingml/2011/main" val="0"/>
+              <ma14:wrappingTextBoxFlag xmlns:ma14="http://schemas.microsoft.com/office/mac/drawingml/2011/main" xmlns="" val="0"/>
             </a:ext>
           </a:extLst>
         </p:spPr>
@@ -12176,7 +12729,7 @@
           <a:p>
             <a:pPr algn="r"/>
             <a:fld id="{F7021451-1387-4CA6-816F-3879F97B5CBC}" type="slidenum">
-              <a:rPr b="0" lang="en-US"/>
+              <a:rPr lang="en-US" b="0"/>
               <a:t>17</a:t>
             </a:fld>
             <a:endParaRPr lang="en-US"/>
@@ -12231,11 +12784,11 @@
           </a:bodyPr>
           <a:lstStyle/>
           <a:p>
-            <a:pPr algn="l" indent="0" marL="0">
-              <a:buNone/>
-            </a:pPr>
-            <a:r>
-              <a:rPr lang="en-US" sz="850" b="1" spc="140" kern="0" dirty="0">
+            <a:pPr marL="0" indent="0" algn="l">
+              <a:buNone/>
+            </a:pPr>
+            <a:r>
+              <a:rPr lang="en-US" sz="850" b="1" kern="0" spc="140" dirty="0">
                 <a:solidFill>
                   <a:srgbClr val="19C3B1"/>
                 </a:solidFill>
@@ -12272,7 +12825,7 @@
           </a:bodyPr>
           <a:lstStyle/>
           <a:p>
-            <a:pPr algn="l" indent="0" marL="0">
+            <a:pPr marL="0" indent="0" algn="l">
               <a:buNone/>
             </a:pPr>
             <a:r>
@@ -12313,7 +12866,7 @@
           </a:bodyPr>
           <a:lstStyle/>
           <a:p>
-            <a:pPr algn="l" indent="0" marL="0">
+            <a:pPr marL="0" indent="0" algn="l">
               <a:buNone/>
             </a:pPr>
             <a:r>
@@ -12359,6 +12912,13 @@
             <a:prstDash val="solid"/>
           </a:ln>
         </p:spPr>
+        <p:txBody>
+          <a:bodyPr/>
+          <a:lstStyle/>
+          <a:p>
+            <a:endParaRPr lang="en-US"/>
+          </a:p>
+        </p:txBody>
       </p:sp>
       <p:sp>
         <p:nvSpPr>
@@ -12383,7 +12943,7 @@
           </a:bodyPr>
           <a:lstStyle/>
           <a:p>
-            <a:pPr algn="l" indent="0" marL="0">
+            <a:pPr marL="0" indent="0" algn="l">
               <a:buNone/>
             </a:pPr>
             <a:r>
@@ -12424,7 +12984,7 @@
           </a:bodyPr>
           <a:lstStyle/>
           <a:p>
-            <a:pPr algn="l" indent="0" marL="0">
+            <a:pPr marL="0" indent="0" algn="l">
               <a:buNone/>
             </a:pPr>
             <a:r>
@@ -12470,6 +13030,13 @@
             <a:prstDash val="solid"/>
           </a:ln>
         </p:spPr>
+        <p:txBody>
+          <a:bodyPr/>
+          <a:lstStyle/>
+          <a:p>
+            <a:endParaRPr lang="en-US"/>
+          </a:p>
+        </p:txBody>
       </p:sp>
       <p:sp>
         <p:nvSpPr>
@@ -12494,7 +13061,7 @@
           </a:bodyPr>
           <a:lstStyle/>
           <a:p>
-            <a:pPr algn="l" indent="0" marL="0">
+            <a:pPr marL="0" indent="0" algn="l">
               <a:buNone/>
             </a:pPr>
             <a:r>
@@ -12535,7 +13102,7 @@
           </a:bodyPr>
           <a:lstStyle/>
           <a:p>
-            <a:pPr algn="l" indent="0" marL="0">
+            <a:pPr marL="0" indent="0" algn="l">
               <a:buNone/>
             </a:pPr>
             <a:r>
@@ -12581,6 +13148,13 @@
             <a:prstDash val="solid"/>
           </a:ln>
         </p:spPr>
+        <p:txBody>
+          <a:bodyPr/>
+          <a:lstStyle/>
+          <a:p>
+            <a:endParaRPr lang="en-US"/>
+          </a:p>
+        </p:txBody>
       </p:sp>
       <p:sp>
         <p:nvSpPr>
@@ -12605,7 +13179,7 @@
           </a:bodyPr>
           <a:lstStyle/>
           <a:p>
-            <a:pPr algn="l" indent="0" marL="0">
+            <a:pPr marL="0" indent="0" algn="l">
               <a:buNone/>
             </a:pPr>
             <a:r>
@@ -12646,7 +13220,7 @@
           </a:bodyPr>
           <a:lstStyle/>
           <a:p>
-            <a:pPr algn="l" indent="0" marL="0">
+            <a:pPr marL="0" indent="0" algn="l">
               <a:buNone/>
             </a:pPr>
             <a:r>
@@ -12692,6 +13266,13 @@
             <a:prstDash val="solid"/>
           </a:ln>
         </p:spPr>
+        <p:txBody>
+          <a:bodyPr/>
+          <a:lstStyle/>
+          <a:p>
+            <a:endParaRPr lang="en-US"/>
+          </a:p>
+        </p:txBody>
       </p:sp>
       <p:sp>
         <p:nvSpPr>
@@ -12716,7 +13297,7 @@
           </a:bodyPr>
           <a:lstStyle/>
           <a:p>
-            <a:pPr algn="l" indent="0" marL="0">
+            <a:pPr marL="0" indent="0" algn="l">
               <a:buNone/>
             </a:pPr>
             <a:r>
@@ -12757,7 +13338,7 @@
           </a:bodyPr>
           <a:lstStyle/>
           <a:p>
-            <a:pPr algn="l" indent="0" marL="0">
+            <a:pPr marL="0" indent="0" algn="l">
               <a:buNone/>
             </a:pPr>
             <a:r>
@@ -12803,6 +13384,13 @@
             <a:prstDash val="solid"/>
           </a:ln>
         </p:spPr>
+        <p:txBody>
+          <a:bodyPr/>
+          <a:lstStyle/>
+          <a:p>
+            <a:endParaRPr lang="en-US"/>
+          </a:p>
+        </p:txBody>
       </p:sp>
       <p:sp>
         <p:nvSpPr>
@@ -12827,7 +13415,7 @@
           </a:bodyPr>
           <a:lstStyle/>
           <a:p>
-            <a:pPr algn="l" indent="0" marL="0">
+            <a:pPr marL="0" indent="0" algn="l">
               <a:buNone/>
             </a:pPr>
             <a:r>
@@ -12868,7 +13456,7 @@
           </a:bodyPr>
           <a:lstStyle/>
           <a:p>
-            <a:pPr algn="l" indent="0" marL="0">
+            <a:pPr marL="0" indent="0" algn="l">
               <a:buNone/>
             </a:pPr>
             <a:r>
@@ -12914,6 +13502,13 @@
             <a:prstDash val="solid"/>
           </a:ln>
         </p:spPr>
+        <p:txBody>
+          <a:bodyPr/>
+          <a:lstStyle/>
+          <a:p>
+            <a:endParaRPr lang="en-US"/>
+          </a:p>
+        </p:txBody>
       </p:sp>
       <p:sp>
         <p:nvSpPr>
@@ -12938,7 +13533,7 @@
           </a:bodyPr>
           <a:lstStyle/>
           <a:p>
-            <a:pPr algn="l" indent="0" marL="0">
+            <a:pPr marL="0" indent="0" algn="l">
               <a:buNone/>
             </a:pPr>
             <a:r>
@@ -12979,7 +13574,7 @@
           </a:bodyPr>
           <a:lstStyle/>
           <a:p>
-            <a:pPr algn="l" indent="0" marL="0">
+            <a:pPr marL="0" indent="0" algn="l">
               <a:buNone/>
             </a:pPr>
             <a:r>
@@ -13020,7 +13615,7 @@
           </a:bodyPr>
           <a:lstStyle/>
           <a:p>
-            <a:pPr algn="ctr" indent="0" marL="0">
+            <a:pPr marL="0" indent="0" algn="ctr">
               <a:buNone/>
             </a:pPr>
             <a:r>
@@ -13058,7 +13653,7 @@
           </a:prstGeom>
           <a:extLst>
             <a:ext uri="{C572A759-6A51-4108-AA02-DFA0A04FC94B}">
-              <ma14:wrappingTextBoxFlag xmlns:ma14="http://schemas.microsoft.com/office/mac/drawingml/2011/main" val="0"/>
+              <ma14:wrappingTextBoxFlag xmlns:ma14="http://schemas.microsoft.com/office/mac/drawingml/2011/main" xmlns="" val="0"/>
             </a:ext>
           </a:extLst>
         </p:spPr>
@@ -13079,7 +13674,7 @@
           <a:p>
             <a:pPr algn="r"/>
             <a:fld id="{F7021451-1387-4CA6-816F-3879F97B5CBC}" type="slidenum">
-              <a:rPr b="0" lang="en-US"/>
+              <a:rPr lang="en-US" b="0"/>
               <a:t>18</a:t>
             </a:fld>
             <a:endParaRPr lang="en-US"/>
@@ -13134,11 +13729,11 @@
           </a:bodyPr>
           <a:lstStyle/>
           <a:p>
-            <a:pPr algn="l" indent="0" marL="0">
-              <a:buNone/>
-            </a:pPr>
-            <a:r>
-              <a:rPr lang="en-US" sz="850" b="1" spc="140" kern="0" dirty="0">
+            <a:pPr marL="0" indent="0" algn="l">
+              <a:buNone/>
+            </a:pPr>
+            <a:r>
+              <a:rPr lang="en-US" sz="850" b="1" kern="0" spc="140" dirty="0">
                 <a:solidFill>
                   <a:srgbClr val="19C3B1"/>
                 </a:solidFill>
@@ -13175,7 +13770,7 @@
           </a:bodyPr>
           <a:lstStyle/>
           <a:p>
-            <a:pPr algn="l" indent="0" marL="0">
+            <a:pPr marL="0" indent="0" algn="l">
               <a:buNone/>
             </a:pPr>
             <a:r>
@@ -13216,7 +13811,7 @@
           </a:bodyPr>
           <a:lstStyle/>
           <a:p>
-            <a:pPr algn="l" indent="0" marL="0">
+            <a:pPr marL="0" indent="0" algn="l">
               <a:buNone/>
             </a:pPr>
             <a:r>
@@ -13260,6 +13855,13 @@
             <a:prstDash val="solid"/>
           </a:ln>
         </p:spPr>
+        <p:txBody>
+          <a:bodyPr/>
+          <a:lstStyle/>
+          <a:p>
+            <a:endParaRPr lang="en-US"/>
+          </a:p>
+        </p:txBody>
       </p:sp>
       <p:sp>
         <p:nvSpPr>
@@ -13284,7 +13886,7 @@
           </a:bodyPr>
           <a:lstStyle/>
           <a:p>
-            <a:pPr algn="l" indent="0" marL="0">
+            <a:pPr marL="0" indent="0" algn="l">
               <a:buNone/>
             </a:pPr>
             <a:r>
@@ -13325,7 +13927,7 @@
           </a:bodyPr>
           <a:lstStyle/>
           <a:p>
-            <a:pPr algn="l" indent="0" marL="0">
+            <a:pPr marL="0" indent="0" algn="l">
               <a:buNone/>
             </a:pPr>
             <a:r>
@@ -13366,7 +13968,7 @@
           </a:bodyPr>
           <a:lstStyle/>
           <a:p>
-            <a:pPr algn="l" indent="0" marL="0">
+            <a:pPr marL="0" indent="0" algn="l">
               <a:buNone/>
             </a:pPr>
             <a:r>
@@ -13407,7 +14009,7 @@
           </a:bodyPr>
           <a:lstStyle/>
           <a:p>
-            <a:pPr algn="l" indent="0" marL="0">
+            <a:pPr marL="0" indent="0" algn="l">
               <a:buNone/>
             </a:pPr>
             <a:r>
@@ -13448,7 +14050,7 @@
           </a:bodyPr>
           <a:lstStyle/>
           <a:p>
-            <a:pPr algn="l" indent="0" marL="0">
+            <a:pPr marL="0" indent="0" algn="l">
               <a:buNone/>
             </a:pPr>
             <a:r>
@@ -13492,6 +14094,13 @@
             <a:prstDash val="solid"/>
           </a:ln>
         </p:spPr>
+        <p:txBody>
+          <a:bodyPr/>
+          <a:lstStyle/>
+          <a:p>
+            <a:endParaRPr lang="en-US"/>
+          </a:p>
+        </p:txBody>
       </p:sp>
       <p:sp>
         <p:nvSpPr>
@@ -13517,6 +14126,13 @@
             <a:prstDash val="solid"/>
           </a:ln>
         </p:spPr>
+        <p:txBody>
+          <a:bodyPr/>
+          <a:lstStyle/>
+          <a:p>
+            <a:endParaRPr lang="en-US"/>
+          </a:p>
+        </p:txBody>
       </p:sp>
       <p:sp>
         <p:nvSpPr>
@@ -13541,7 +14157,7 @@
           </a:bodyPr>
           <a:lstStyle/>
           <a:p>
-            <a:pPr algn="l" indent="0" marL="0">
+            <a:pPr marL="0" indent="0" algn="l">
               <a:buNone/>
             </a:pPr>
             <a:r>
@@ -13582,7 +14198,7 @@
           </a:bodyPr>
           <a:lstStyle/>
           <a:p>
-            <a:pPr algn="l" indent="0" marL="0">
+            <a:pPr marL="0" indent="0" algn="l">
               <a:buNone/>
             </a:pPr>
             <a:r>
@@ -13626,6 +14242,13 @@
             <a:prstDash val="solid"/>
           </a:ln>
         </p:spPr>
+        <p:txBody>
+          <a:bodyPr/>
+          <a:lstStyle/>
+          <a:p>
+            <a:endParaRPr lang="en-US"/>
+          </a:p>
+        </p:txBody>
       </p:sp>
       <p:sp>
         <p:nvSpPr>
@@ -13651,6 +14274,13 @@
             <a:prstDash val="solid"/>
           </a:ln>
         </p:spPr>
+        <p:txBody>
+          <a:bodyPr/>
+          <a:lstStyle/>
+          <a:p>
+            <a:endParaRPr lang="en-US"/>
+          </a:p>
+        </p:txBody>
       </p:sp>
       <p:sp>
         <p:nvSpPr>
@@ -13675,7 +14305,7 @@
           </a:bodyPr>
           <a:lstStyle/>
           <a:p>
-            <a:pPr algn="l" indent="0" marL="0">
+            <a:pPr marL="0" indent="0" algn="l">
               <a:buNone/>
             </a:pPr>
             <a:r>
@@ -13716,7 +14346,7 @@
           </a:bodyPr>
           <a:lstStyle/>
           <a:p>
-            <a:pPr algn="l" indent="0" marL="0">
+            <a:pPr marL="0" indent="0" algn="l">
               <a:buNone/>
             </a:pPr>
             <a:r>
@@ -13760,6 +14390,13 @@
             <a:prstDash val="solid"/>
           </a:ln>
         </p:spPr>
+        <p:txBody>
+          <a:bodyPr/>
+          <a:lstStyle/>
+          <a:p>
+            <a:endParaRPr lang="en-US"/>
+          </a:p>
+        </p:txBody>
       </p:sp>
       <p:sp>
         <p:nvSpPr>
@@ -13785,6 +14422,13 @@
             <a:prstDash val="solid"/>
           </a:ln>
         </p:spPr>
+        <p:txBody>
+          <a:bodyPr/>
+          <a:lstStyle/>
+          <a:p>
+            <a:endParaRPr lang="en-US"/>
+          </a:p>
+        </p:txBody>
       </p:sp>
       <p:sp>
         <p:nvSpPr>
@@ -13809,7 +14453,7 @@
           </a:bodyPr>
           <a:lstStyle/>
           <a:p>
-            <a:pPr algn="l" indent="0" marL="0">
+            <a:pPr marL="0" indent="0" algn="l">
               <a:buNone/>
             </a:pPr>
             <a:r>
@@ -13850,7 +14494,7 @@
           </a:bodyPr>
           <a:lstStyle/>
           <a:p>
-            <a:pPr algn="l" indent="0" marL="0">
+            <a:pPr marL="0" indent="0" algn="l">
               <a:buNone/>
             </a:pPr>
             <a:r>
@@ -13891,7 +14535,7 @@
           </a:bodyPr>
           <a:lstStyle/>
           <a:p>
-            <a:pPr algn="ctr" indent="0" marL="0">
+            <a:pPr marL="0" indent="0" algn="ctr">
               <a:buNone/>
             </a:pPr>
             <a:r>
@@ -13929,7 +14573,7 @@
           </a:prstGeom>
           <a:extLst>
             <a:ext uri="{C572A759-6A51-4108-AA02-DFA0A04FC94B}">
-              <ma14:wrappingTextBoxFlag xmlns:ma14="http://schemas.microsoft.com/office/mac/drawingml/2011/main" val="0"/>
+              <ma14:wrappingTextBoxFlag xmlns:ma14="http://schemas.microsoft.com/office/mac/drawingml/2011/main" xmlns="" val="0"/>
             </a:ext>
           </a:extLst>
         </p:spPr>
@@ -13950,7 +14594,7 @@
           <a:p>
             <a:pPr algn="r"/>
             <a:fld id="{F7021451-1387-4CA6-816F-3879F97B5CBC}" type="slidenum">
-              <a:rPr b="0" lang="en-US"/>
+              <a:rPr lang="en-US" b="0"/>
               <a:t>19</a:t>
             </a:fld>
             <a:endParaRPr lang="en-US"/>
@@ -14005,11 +14649,11 @@
           </a:bodyPr>
           <a:lstStyle/>
           <a:p>
-            <a:pPr algn="l" indent="0" marL="0">
-              <a:buNone/>
-            </a:pPr>
-            <a:r>
-              <a:rPr lang="en-US" sz="850" b="1" spc="140" kern="0" dirty="0">
+            <a:pPr marL="0" indent="0" algn="l">
+              <a:buNone/>
+            </a:pPr>
+            <a:r>
+              <a:rPr lang="en-US" sz="850" b="1" kern="0" spc="140" dirty="0">
                 <a:solidFill>
                   <a:srgbClr val="19C3B1"/>
                 </a:solidFill>
@@ -14046,7 +14690,7 @@
           </a:bodyPr>
           <a:lstStyle/>
           <a:p>
-            <a:pPr algn="l" indent="0" marL="0">
+            <a:pPr marL="0" indent="0" algn="l">
               <a:buNone/>
             </a:pPr>
             <a:r>
@@ -14087,7 +14731,7 @@
           </a:bodyPr>
           <a:lstStyle/>
           <a:p>
-            <a:pPr algn="l" indent="0" marL="0">
+            <a:pPr marL="0" indent="0" algn="l">
               <a:buNone/>
             </a:pPr>
             <a:r>
@@ -14133,6 +14777,13 @@
             <a:prstDash val="solid"/>
           </a:ln>
         </p:spPr>
+        <p:txBody>
+          <a:bodyPr/>
+          <a:lstStyle/>
+          <a:p>
+            <a:endParaRPr lang="en-US"/>
+          </a:p>
+        </p:txBody>
       </p:sp>
       <p:sp>
         <p:nvSpPr>
@@ -14157,7 +14808,7 @@
           </a:bodyPr>
           <a:lstStyle/>
           <a:p>
-            <a:pPr algn="ctr" indent="0" marL="0">
+            <a:pPr marL="0" indent="0" algn="ctr">
               <a:buNone/>
             </a:pPr>
             <a:r>
@@ -14198,7 +14849,7 @@
           </a:bodyPr>
           <a:lstStyle/>
           <a:p>
-            <a:pPr algn="ctr" indent="0" marL="0">
+            <a:pPr marL="0" indent="0" algn="ctr">
               <a:buNone/>
             </a:pPr>
             <a:r>
@@ -14240,6 +14891,13 @@
             <a:tailEnd type="triangle"/>
           </a:ln>
         </p:spPr>
+        <p:txBody>
+          <a:bodyPr/>
+          <a:lstStyle/>
+          <a:p>
+            <a:endParaRPr lang="en-US"/>
+          </a:p>
+        </p:txBody>
       </p:sp>
       <p:sp>
         <p:nvSpPr>
@@ -14269,6 +14927,13 @@
             <a:prstDash val="solid"/>
           </a:ln>
         </p:spPr>
+        <p:txBody>
+          <a:bodyPr/>
+          <a:lstStyle/>
+          <a:p>
+            <a:endParaRPr lang="en-US"/>
+          </a:p>
+        </p:txBody>
       </p:sp>
       <p:sp>
         <p:nvSpPr>
@@ -14293,7 +14958,7 @@
           </a:bodyPr>
           <a:lstStyle/>
           <a:p>
-            <a:pPr algn="ctr" indent="0" marL="0">
+            <a:pPr marL="0" indent="0" algn="ctr">
               <a:buNone/>
             </a:pPr>
             <a:r>
@@ -14334,7 +14999,7 @@
           </a:bodyPr>
           <a:lstStyle/>
           <a:p>
-            <a:pPr algn="ctr" indent="0" marL="0">
+            <a:pPr marL="0" indent="0" algn="ctr">
               <a:buNone/>
             </a:pPr>
             <a:r>
@@ -14376,6 +15041,13 @@
             <a:tailEnd type="triangle"/>
           </a:ln>
         </p:spPr>
+        <p:txBody>
+          <a:bodyPr/>
+          <a:lstStyle/>
+          <a:p>
+            <a:endParaRPr lang="en-US"/>
+          </a:p>
+        </p:txBody>
       </p:sp>
       <p:sp>
         <p:nvSpPr>
@@ -14405,6 +15077,13 @@
             <a:prstDash val="solid"/>
           </a:ln>
         </p:spPr>
+        <p:txBody>
+          <a:bodyPr/>
+          <a:lstStyle/>
+          <a:p>
+            <a:endParaRPr lang="en-US"/>
+          </a:p>
+        </p:txBody>
       </p:sp>
       <p:sp>
         <p:nvSpPr>
@@ -14429,7 +15108,7 @@
           </a:bodyPr>
           <a:lstStyle/>
           <a:p>
-            <a:pPr algn="ctr" indent="0" marL="0">
+            <a:pPr marL="0" indent="0" algn="ctr">
               <a:buNone/>
             </a:pPr>
             <a:r>
@@ -14470,7 +15149,7 @@
           </a:bodyPr>
           <a:lstStyle/>
           <a:p>
-            <a:pPr algn="ctr" indent="0" marL="0">
+            <a:pPr marL="0" indent="0" algn="ctr">
               <a:buNone/>
             </a:pPr>
             <a:r>
@@ -14512,6 +15191,13 @@
             <a:tailEnd type="triangle"/>
           </a:ln>
         </p:spPr>
+        <p:txBody>
+          <a:bodyPr/>
+          <a:lstStyle/>
+          <a:p>
+            <a:endParaRPr lang="en-US"/>
+          </a:p>
+        </p:txBody>
       </p:sp>
       <p:sp>
         <p:nvSpPr>
@@ -14541,6 +15227,13 @@
             <a:prstDash val="solid"/>
           </a:ln>
         </p:spPr>
+        <p:txBody>
+          <a:bodyPr/>
+          <a:lstStyle/>
+          <a:p>
+            <a:endParaRPr lang="en-US"/>
+          </a:p>
+        </p:txBody>
       </p:sp>
       <p:sp>
         <p:nvSpPr>
@@ -14565,7 +15258,7 @@
           </a:bodyPr>
           <a:lstStyle/>
           <a:p>
-            <a:pPr algn="ctr" indent="0" marL="0">
+            <a:pPr marL="0" indent="0" algn="ctr">
               <a:buNone/>
             </a:pPr>
             <a:r>
@@ -14606,7 +15299,7 @@
           </a:bodyPr>
           <a:lstStyle/>
           <a:p>
-            <a:pPr algn="ctr" indent="0" marL="0">
+            <a:pPr marL="0" indent="0" algn="ctr">
               <a:buNone/>
             </a:pPr>
             <a:r>
@@ -14648,6 +15341,13 @@
             <a:tailEnd type="triangle"/>
           </a:ln>
         </p:spPr>
+        <p:txBody>
+          <a:bodyPr/>
+          <a:lstStyle/>
+          <a:p>
+            <a:endParaRPr lang="en-US"/>
+          </a:p>
+        </p:txBody>
       </p:sp>
       <p:sp>
         <p:nvSpPr>
@@ -14677,6 +15377,13 @@
             <a:prstDash val="solid"/>
           </a:ln>
         </p:spPr>
+        <p:txBody>
+          <a:bodyPr/>
+          <a:lstStyle/>
+          <a:p>
+            <a:endParaRPr lang="en-US"/>
+          </a:p>
+        </p:txBody>
       </p:sp>
       <p:sp>
         <p:nvSpPr>
@@ -14701,7 +15408,7 @@
           </a:bodyPr>
           <a:lstStyle/>
           <a:p>
-            <a:pPr algn="ctr" indent="0" marL="0">
+            <a:pPr marL="0" indent="0" algn="ctr">
               <a:buNone/>
             </a:pPr>
             <a:r>
@@ -14742,7 +15449,7 @@
           </a:bodyPr>
           <a:lstStyle/>
           <a:p>
-            <a:pPr algn="ctr" indent="0" marL="0">
+            <a:pPr marL="0" indent="0" algn="ctr">
               <a:buNone/>
             </a:pPr>
             <a:r>
@@ -14784,6 +15491,13 @@
             <a:tailEnd type="triangle"/>
           </a:ln>
         </p:spPr>
+        <p:txBody>
+          <a:bodyPr/>
+          <a:lstStyle/>
+          <a:p>
+            <a:endParaRPr lang="en-US"/>
+          </a:p>
+        </p:txBody>
       </p:sp>
       <p:sp>
         <p:nvSpPr>
@@ -14813,6 +15527,13 @@
             <a:prstDash val="solid"/>
           </a:ln>
         </p:spPr>
+        <p:txBody>
+          <a:bodyPr/>
+          <a:lstStyle/>
+          <a:p>
+            <a:endParaRPr lang="en-US"/>
+          </a:p>
+        </p:txBody>
       </p:sp>
       <p:sp>
         <p:nvSpPr>
@@ -14837,7 +15558,7 @@
           </a:bodyPr>
           <a:lstStyle/>
           <a:p>
-            <a:pPr algn="ctr" indent="0" marL="0">
+            <a:pPr marL="0" indent="0" algn="ctr">
               <a:buNone/>
             </a:pPr>
             <a:r>
@@ -14878,7 +15599,7 @@
           </a:bodyPr>
           <a:lstStyle/>
           <a:p>
-            <a:pPr algn="ctr" indent="0" marL="0">
+            <a:pPr marL="0" indent="0" algn="ctr">
               <a:buNone/>
             </a:pPr>
             <a:r>
@@ -14919,7 +15640,7 @@
           </a:bodyPr>
           <a:lstStyle/>
           <a:p>
-            <a:pPr algn="ctr" indent="0" marL="0">
+            <a:pPr marL="0" indent="0" algn="ctr">
               <a:buNone/>
             </a:pPr>
             <a:r>
@@ -14963,6 +15684,13 @@
             <a:prstDash val="solid"/>
           </a:ln>
         </p:spPr>
+        <p:txBody>
+          <a:bodyPr/>
+          <a:lstStyle/>
+          <a:p>
+            <a:endParaRPr lang="en-US"/>
+          </a:p>
+        </p:txBody>
       </p:sp>
       <p:sp>
         <p:nvSpPr>
@@ -14988,6 +15716,13 @@
             <a:prstDash val="solid"/>
           </a:ln>
         </p:spPr>
+        <p:txBody>
+          <a:bodyPr/>
+          <a:lstStyle/>
+          <a:p>
+            <a:endParaRPr lang="en-US"/>
+          </a:p>
+        </p:txBody>
       </p:sp>
       <p:sp>
         <p:nvSpPr>
@@ -15012,7 +15747,7 @@
           </a:bodyPr>
           <a:lstStyle/>
           <a:p>
-            <a:pPr algn="l" indent="0" marL="0">
+            <a:pPr marL="0" indent="0" algn="l">
               <a:buNone/>
             </a:pPr>
             <a:r>
@@ -15053,7 +15788,7 @@
           </a:bodyPr>
           <a:lstStyle/>
           <a:p>
-            <a:pPr algn="l" indent="0" marL="0">
+            <a:pPr marL="0" indent="0" algn="l">
               <a:buNone/>
             </a:pPr>
             <a:r>
@@ -15097,6 +15832,13 @@
             <a:prstDash val="solid"/>
           </a:ln>
         </p:spPr>
+        <p:txBody>
+          <a:bodyPr/>
+          <a:lstStyle/>
+          <a:p>
+            <a:endParaRPr lang="en-US"/>
+          </a:p>
+        </p:txBody>
       </p:sp>
       <p:sp>
         <p:nvSpPr>
@@ -15122,6 +15864,13 @@
             <a:prstDash val="solid"/>
           </a:ln>
         </p:spPr>
+        <p:txBody>
+          <a:bodyPr/>
+          <a:lstStyle/>
+          <a:p>
+            <a:endParaRPr lang="en-US"/>
+          </a:p>
+        </p:txBody>
       </p:sp>
       <p:sp>
         <p:nvSpPr>
@@ -15146,7 +15895,7 @@
           </a:bodyPr>
           <a:lstStyle/>
           <a:p>
-            <a:pPr algn="l" indent="0" marL="0">
+            <a:pPr marL="0" indent="0" algn="l">
               <a:buNone/>
             </a:pPr>
             <a:r>
@@ -15187,7 +15936,7 @@
           </a:bodyPr>
           <a:lstStyle/>
           <a:p>
-            <a:pPr algn="l" indent="0" marL="0">
+            <a:pPr marL="0" indent="0" algn="l">
               <a:buNone/>
             </a:pPr>
             <a:r>
@@ -15231,6 +15980,13 @@
             <a:prstDash val="solid"/>
           </a:ln>
         </p:spPr>
+        <p:txBody>
+          <a:bodyPr/>
+          <a:lstStyle/>
+          <a:p>
+            <a:endParaRPr lang="en-US"/>
+          </a:p>
+        </p:txBody>
       </p:sp>
       <p:sp>
         <p:nvSpPr>
@@ -15256,6 +16012,13 @@
             <a:prstDash val="solid"/>
           </a:ln>
         </p:spPr>
+        <p:txBody>
+          <a:bodyPr/>
+          <a:lstStyle/>
+          <a:p>
+            <a:endParaRPr lang="en-US"/>
+          </a:p>
+        </p:txBody>
       </p:sp>
       <p:sp>
         <p:nvSpPr>
@@ -15280,7 +16043,7 @@
           </a:bodyPr>
           <a:lstStyle/>
           <a:p>
-            <a:pPr algn="l" indent="0" marL="0">
+            <a:pPr marL="0" indent="0" algn="l">
               <a:buNone/>
             </a:pPr>
             <a:r>
@@ -15321,7 +16084,7 @@
           </a:bodyPr>
           <a:lstStyle/>
           <a:p>
-            <a:pPr algn="l" indent="0" marL="0">
+            <a:pPr marL="0" indent="0" algn="l">
               <a:buNone/>
             </a:pPr>
             <a:r>
@@ -15341,7 +16104,7 @@
       </p:sp>
       <p:sp>
         <p:nvSpPr>
-          <p:cNvPr id="25" name="Slide Number Placeholder 0"/>
+          <p:cNvPr id="41" name="Slide Number Placeholder 0"/>
           <p:cNvSpPr>
             <a:spLocks noGrp="1"/>
           </p:cNvSpPr>
@@ -15359,7 +16122,7 @@
           </a:prstGeom>
           <a:extLst>
             <a:ext uri="{C572A759-6A51-4108-AA02-DFA0A04FC94B}">
-              <ma14:wrappingTextBoxFlag xmlns:ma14="http://schemas.microsoft.com/office/mac/drawingml/2011/main" val="0"/>
+              <ma14:wrappingTextBoxFlag xmlns:ma14="http://schemas.microsoft.com/office/mac/drawingml/2011/main" xmlns="" val="0"/>
             </a:ext>
           </a:extLst>
         </p:spPr>
@@ -15380,7 +16143,7 @@
           <a:p>
             <a:pPr algn="r"/>
             <a:fld id="{F7021451-1387-4CA6-816F-3879F97B5CBC}" type="slidenum">
-              <a:rPr b="0" lang="en-US"/>
+              <a:rPr lang="en-US" b="0"/>
               <a:t>2</a:t>
             </a:fld>
             <a:endParaRPr lang="en-US"/>
@@ -15435,11 +16198,11 @@
           </a:bodyPr>
           <a:lstStyle/>
           <a:p>
-            <a:pPr algn="l" indent="0" marL="0">
-              <a:buNone/>
-            </a:pPr>
-            <a:r>
-              <a:rPr lang="en-US" sz="850" b="1" spc="140" kern="0" dirty="0">
+            <a:pPr marL="0" indent="0" algn="l">
+              <a:buNone/>
+            </a:pPr>
+            <a:r>
+              <a:rPr lang="en-US" sz="850" b="1" kern="0" spc="140" dirty="0">
                 <a:solidFill>
                   <a:srgbClr val="19C3B1"/>
                 </a:solidFill>
@@ -15476,7 +16239,7 @@
           </a:bodyPr>
           <a:lstStyle/>
           <a:p>
-            <a:pPr algn="l" indent="0" marL="0">
+            <a:pPr marL="0" indent="0" algn="l">
               <a:buNone/>
             </a:pPr>
             <a:r>
@@ -15517,7 +16280,7 @@
           </a:bodyPr>
           <a:lstStyle/>
           <a:p>
-            <a:pPr algn="l" indent="0" marL="0">
+            <a:pPr marL="0" indent="0" algn="l">
               <a:buNone/>
             </a:pPr>
             <a:r>
@@ -15561,6 +16324,13 @@
             <a:prstDash val="solid"/>
           </a:ln>
         </p:spPr>
+        <p:txBody>
+          <a:bodyPr/>
+          <a:lstStyle/>
+          <a:p>
+            <a:endParaRPr lang="en-US"/>
+          </a:p>
+        </p:txBody>
       </p:sp>
       <p:sp>
         <p:nvSpPr>
@@ -15588,6 +16358,13 @@
             <a:prstDash val="solid"/>
           </a:ln>
         </p:spPr>
+        <p:txBody>
+          <a:bodyPr/>
+          <a:lstStyle/>
+          <a:p>
+            <a:endParaRPr lang="en-US"/>
+          </a:p>
+        </p:txBody>
       </p:sp>
       <p:sp>
         <p:nvSpPr>
@@ -15612,7 +16389,7 @@
           </a:bodyPr>
           <a:lstStyle/>
           <a:p>
-            <a:pPr algn="ctr" indent="0" marL="0">
+            <a:pPr marL="0" indent="0" algn="ctr">
               <a:buNone/>
             </a:pPr>
             <a:r>
@@ -15653,7 +16430,7 @@
           </a:bodyPr>
           <a:lstStyle/>
           <a:p>
-            <a:pPr algn="l" indent="0" marL="0">
+            <a:pPr marL="0" indent="0" algn="l">
               <a:buNone/>
             </a:pPr>
             <a:r>
@@ -15694,7 +16471,7 @@
           </a:bodyPr>
           <a:lstStyle/>
           <a:p>
-            <a:pPr algn="l" indent="0" marL="0">
+            <a:pPr marL="0" indent="0" algn="l">
               <a:buNone/>
             </a:pPr>
             <a:r>
@@ -15738,6 +16515,13 @@
             <a:prstDash val="solid"/>
           </a:ln>
         </p:spPr>
+        <p:txBody>
+          <a:bodyPr/>
+          <a:lstStyle/>
+          <a:p>
+            <a:endParaRPr lang="en-US"/>
+          </a:p>
+        </p:txBody>
       </p:sp>
       <p:sp>
         <p:nvSpPr>
@@ -15765,6 +16549,13 @@
             <a:prstDash val="solid"/>
           </a:ln>
         </p:spPr>
+        <p:txBody>
+          <a:bodyPr/>
+          <a:lstStyle/>
+          <a:p>
+            <a:endParaRPr lang="en-US"/>
+          </a:p>
+        </p:txBody>
       </p:sp>
       <p:sp>
         <p:nvSpPr>
@@ -15789,7 +16580,7 @@
           </a:bodyPr>
           <a:lstStyle/>
           <a:p>
-            <a:pPr algn="ctr" indent="0" marL="0">
+            <a:pPr marL="0" indent="0" algn="ctr">
               <a:buNone/>
             </a:pPr>
             <a:r>
@@ -15830,7 +16621,7 @@
           </a:bodyPr>
           <a:lstStyle/>
           <a:p>
-            <a:pPr algn="l" indent="0" marL="0">
+            <a:pPr marL="0" indent="0" algn="l">
               <a:buNone/>
             </a:pPr>
             <a:r>
@@ -15871,7 +16662,7 @@
           </a:bodyPr>
           <a:lstStyle/>
           <a:p>
-            <a:pPr algn="l" indent="0" marL="0">
+            <a:pPr marL="0" indent="0" algn="l">
               <a:buNone/>
             </a:pPr>
             <a:r>
@@ -15915,6 +16706,13 @@
             <a:prstDash val="solid"/>
           </a:ln>
         </p:spPr>
+        <p:txBody>
+          <a:bodyPr/>
+          <a:lstStyle/>
+          <a:p>
+            <a:endParaRPr lang="en-US"/>
+          </a:p>
+        </p:txBody>
       </p:sp>
       <p:sp>
         <p:nvSpPr>
@@ -15942,6 +16740,13 @@
             <a:prstDash val="solid"/>
           </a:ln>
         </p:spPr>
+        <p:txBody>
+          <a:bodyPr/>
+          <a:lstStyle/>
+          <a:p>
+            <a:endParaRPr lang="en-US"/>
+          </a:p>
+        </p:txBody>
       </p:sp>
       <p:sp>
         <p:nvSpPr>
@@ -15966,7 +16771,7 @@
           </a:bodyPr>
           <a:lstStyle/>
           <a:p>
-            <a:pPr algn="ctr" indent="0" marL="0">
+            <a:pPr marL="0" indent="0" algn="ctr">
               <a:buNone/>
             </a:pPr>
             <a:r>
@@ -16007,7 +16812,7 @@
           </a:bodyPr>
           <a:lstStyle/>
           <a:p>
-            <a:pPr algn="l" indent="0" marL="0">
+            <a:pPr marL="0" indent="0" algn="l">
               <a:buNone/>
             </a:pPr>
             <a:r>
@@ -16048,7 +16853,7 @@
           </a:bodyPr>
           <a:lstStyle/>
           <a:p>
-            <a:pPr algn="l" indent="0" marL="0">
+            <a:pPr marL="0" indent="0" algn="l">
               <a:buNone/>
             </a:pPr>
             <a:r>
@@ -16096,6 +16901,13 @@
             <a:prstDash val="solid"/>
           </a:ln>
         </p:spPr>
+        <p:txBody>
+          <a:bodyPr/>
+          <a:lstStyle/>
+          <a:p>
+            <a:endParaRPr lang="en-US"/>
+          </a:p>
+        </p:txBody>
       </p:sp>
       <p:sp>
         <p:nvSpPr>
@@ -16120,7 +16932,7 @@
           </a:bodyPr>
           <a:lstStyle/>
           <a:p>
-            <a:pPr algn="ctr" indent="0" marL="0">
+            <a:pPr marL="0" indent="0" algn="ctr">
               <a:buNone/>
             </a:pPr>
             <a:r>
@@ -16168,6 +16980,13 @@
             <a:prstDash val="solid"/>
           </a:ln>
         </p:spPr>
+        <p:txBody>
+          <a:bodyPr/>
+          <a:lstStyle/>
+          <a:p>
+            <a:endParaRPr lang="en-US"/>
+          </a:p>
+        </p:txBody>
       </p:sp>
       <p:sp>
         <p:nvSpPr>
@@ -16192,7 +17011,7 @@
           </a:bodyPr>
           <a:lstStyle/>
           <a:p>
-            <a:pPr algn="ctr" indent="0" marL="0">
+            <a:pPr marL="0" indent="0" algn="ctr">
               <a:buNone/>
             </a:pPr>
             <a:r>
@@ -16240,6 +17059,13 @@
             <a:prstDash val="solid"/>
           </a:ln>
         </p:spPr>
+        <p:txBody>
+          <a:bodyPr/>
+          <a:lstStyle/>
+          <a:p>
+            <a:endParaRPr lang="en-US"/>
+          </a:p>
+        </p:txBody>
       </p:sp>
       <p:sp>
         <p:nvSpPr>
@@ -16264,7 +17090,7 @@
           </a:bodyPr>
           <a:lstStyle/>
           <a:p>
-            <a:pPr algn="ctr" indent="0" marL="0">
+            <a:pPr marL="0" indent="0" algn="ctr">
               <a:buNone/>
             </a:pPr>
             <a:r>
@@ -16312,6 +17138,13 @@
             <a:prstDash val="solid"/>
           </a:ln>
         </p:spPr>
+        <p:txBody>
+          <a:bodyPr/>
+          <a:lstStyle/>
+          <a:p>
+            <a:endParaRPr lang="en-US"/>
+          </a:p>
+        </p:txBody>
       </p:sp>
       <p:sp>
         <p:nvSpPr>
@@ -16336,11 +17169,11 @@
           </a:bodyPr>
           <a:lstStyle/>
           <a:p>
-            <a:pPr algn="l" indent="0" marL="0">
-              <a:buNone/>
-            </a:pPr>
-            <a:r>
-              <a:rPr lang="en-US" sz="780" b="1" spc="100" kern="0" dirty="0">
+            <a:pPr marL="0" indent="0" algn="l">
+              <a:buNone/>
+            </a:pPr>
+            <a:r>
+              <a:rPr lang="en-US" sz="780" b="1" kern="0" spc="100" dirty="0">
                 <a:solidFill>
                   <a:srgbClr val="19C3B1"/>
                 </a:solidFill>
@@ -16377,7 +17210,7 @@
           </a:bodyPr>
           <a:lstStyle/>
           <a:p>
-            <a:pPr algn="l" indent="0" marL="0">
+            <a:pPr marL="0" indent="0" algn="l">
               <a:buNone/>
             </a:pPr>
             <a:r>
@@ -16397,7 +17230,7 @@
       </p:sp>
       <p:sp>
         <p:nvSpPr>
-          <p:cNvPr id="25" name="Slide Number Placeholder 0"/>
+          <p:cNvPr id="29" name="Slide Number Placeholder 0"/>
           <p:cNvSpPr>
             <a:spLocks noGrp="1"/>
           </p:cNvSpPr>
@@ -16415,7 +17248,7 @@
           </a:prstGeom>
           <a:extLst>
             <a:ext uri="{C572A759-6A51-4108-AA02-DFA0A04FC94B}">
-              <ma14:wrappingTextBoxFlag xmlns:ma14="http://schemas.microsoft.com/office/mac/drawingml/2011/main" val="0"/>
+              <ma14:wrappingTextBoxFlag xmlns:ma14="http://schemas.microsoft.com/office/mac/drawingml/2011/main" xmlns="" val="0"/>
             </a:ext>
           </a:extLst>
         </p:spPr>
@@ -16436,7 +17269,7 @@
           <a:p>
             <a:pPr algn="r"/>
             <a:fld id="{F7021451-1387-4CA6-816F-3879F97B5CBC}" type="slidenum">
-              <a:rPr b="0" lang="en-US"/>
+              <a:rPr lang="en-US" b="0"/>
               <a:t>3</a:t>
             </a:fld>
             <a:endParaRPr lang="en-US"/>
@@ -16491,11 +17324,11 @@
           </a:bodyPr>
           <a:lstStyle/>
           <a:p>
-            <a:pPr algn="l" indent="0" marL="0">
-              <a:buNone/>
-            </a:pPr>
-            <a:r>
-              <a:rPr lang="en-US" sz="850" b="1" spc="140" kern="0" dirty="0">
+            <a:pPr marL="0" indent="0" algn="l">
+              <a:buNone/>
+            </a:pPr>
+            <a:r>
+              <a:rPr lang="en-US" sz="850" b="1" kern="0" spc="140" dirty="0">
                 <a:solidFill>
                   <a:srgbClr val="19C3B1"/>
                 </a:solidFill>
@@ -16532,7 +17365,7 @@
           </a:bodyPr>
           <a:lstStyle/>
           <a:p>
-            <a:pPr algn="l" indent="0" marL="0">
+            <a:pPr marL="0" indent="0" algn="l">
               <a:buNone/>
             </a:pPr>
             <a:r>
@@ -16573,7 +17406,7 @@
           </a:bodyPr>
           <a:lstStyle/>
           <a:p>
-            <a:pPr algn="l" indent="0" marL="0">
+            <a:pPr marL="0" indent="0" algn="l">
               <a:buNone/>
             </a:pPr>
             <a:r>
@@ -16617,6 +17450,13 @@
             <a:prstDash val="solid"/>
           </a:ln>
         </p:spPr>
+        <p:txBody>
+          <a:bodyPr/>
+          <a:lstStyle/>
+          <a:p>
+            <a:endParaRPr lang="en-US"/>
+          </a:p>
+        </p:txBody>
       </p:sp>
       <p:sp>
         <p:nvSpPr>
@@ -16642,6 +17482,13 @@
             <a:prstDash val="solid"/>
           </a:ln>
         </p:spPr>
+        <p:txBody>
+          <a:bodyPr/>
+          <a:lstStyle/>
+          <a:p>
+            <a:endParaRPr lang="en-US"/>
+          </a:p>
+        </p:txBody>
       </p:sp>
       <p:sp>
         <p:nvSpPr>
@@ -16666,7 +17513,7 @@
           </a:bodyPr>
           <a:lstStyle/>
           <a:p>
-            <a:pPr algn="l" indent="0" marL="0">
+            <a:pPr marL="0" indent="0" algn="l">
               <a:buNone/>
             </a:pPr>
             <a:r>
@@ -16707,7 +17554,7 @@
           </a:bodyPr>
           <a:lstStyle/>
           <a:p>
-            <a:pPr algn="l" indent="0" marL="0">
+            <a:pPr marL="0" indent="0" algn="l">
               <a:buNone/>
             </a:pPr>
             <a:r>
@@ -16751,6 +17598,13 @@
             <a:prstDash val="solid"/>
           </a:ln>
         </p:spPr>
+        <p:txBody>
+          <a:bodyPr/>
+          <a:lstStyle/>
+          <a:p>
+            <a:endParaRPr lang="en-US"/>
+          </a:p>
+        </p:txBody>
       </p:sp>
       <p:sp>
         <p:nvSpPr>
@@ -16776,6 +17630,13 @@
             <a:prstDash val="solid"/>
           </a:ln>
         </p:spPr>
+        <p:txBody>
+          <a:bodyPr/>
+          <a:lstStyle/>
+          <a:p>
+            <a:endParaRPr lang="en-US"/>
+          </a:p>
+        </p:txBody>
       </p:sp>
       <p:sp>
         <p:nvSpPr>
@@ -16800,7 +17661,7 @@
           </a:bodyPr>
           <a:lstStyle/>
           <a:p>
-            <a:pPr algn="l" indent="0" marL="0">
+            <a:pPr marL="0" indent="0" algn="l">
               <a:buNone/>
             </a:pPr>
             <a:r>
@@ -16841,7 +17702,7 @@
           </a:bodyPr>
           <a:lstStyle/>
           <a:p>
-            <a:pPr algn="l" indent="0" marL="0">
+            <a:pPr marL="0" indent="0" algn="l">
               <a:buNone/>
             </a:pPr>
             <a:r>
@@ -16885,6 +17746,13 @@
             <a:prstDash val="solid"/>
           </a:ln>
         </p:spPr>
+        <p:txBody>
+          <a:bodyPr/>
+          <a:lstStyle/>
+          <a:p>
+            <a:endParaRPr lang="en-US"/>
+          </a:p>
+        </p:txBody>
       </p:sp>
       <p:sp>
         <p:nvSpPr>
@@ -16909,7 +17777,7 @@
           </a:bodyPr>
           <a:lstStyle/>
           <a:p>
-            <a:pPr algn="ctr" indent="0" marL="0">
+            <a:pPr marL="0" indent="0" algn="ctr">
               <a:buNone/>
             </a:pPr>
             <a:r>
@@ -16955,6 +17823,13 @@
             <a:prstDash val="solid"/>
           </a:ln>
         </p:spPr>
+        <p:txBody>
+          <a:bodyPr/>
+          <a:lstStyle/>
+          <a:p>
+            <a:endParaRPr lang="en-US"/>
+          </a:p>
+        </p:txBody>
       </p:sp>
       <p:sp>
         <p:nvSpPr>
@@ -16979,7 +17854,7 @@
           </a:bodyPr>
           <a:lstStyle/>
           <a:p>
-            <a:pPr algn="ctr" indent="0" marL="0">
+            <a:pPr marL="0" indent="0" algn="ctr">
               <a:buNone/>
             </a:pPr>
             <a:r>
@@ -17006,7 +17881,7 @@
         <p:spPr>
           <a:xfrm>
             <a:off x="6080760" y="3401568"/>
-            <a:ext cx="-886968" cy="-1472184"/>
+            <a:ext cx="0" cy="0"/>
           </a:xfrm>
           <a:prstGeom prst="line">
             <a:avLst/>
@@ -17021,6 +17896,13 @@
             <a:tailEnd type="triangle"/>
           </a:ln>
         </p:spPr>
+        <p:txBody>
+          <a:bodyPr/>
+          <a:lstStyle/>
+          <a:p>
+            <a:endParaRPr lang="en-US"/>
+          </a:p>
+        </p:txBody>
       </p:sp>
       <p:sp>
         <p:nvSpPr>
@@ -17050,6 +17932,13 @@
             <a:prstDash val="solid"/>
           </a:ln>
         </p:spPr>
+        <p:txBody>
+          <a:bodyPr/>
+          <a:lstStyle/>
+          <a:p>
+            <a:endParaRPr lang="en-US"/>
+          </a:p>
+        </p:txBody>
       </p:sp>
       <p:sp>
         <p:nvSpPr>
@@ -17074,7 +17963,7 @@
           </a:bodyPr>
           <a:lstStyle/>
           <a:p>
-            <a:pPr algn="ctr" indent="0" marL="0">
+            <a:pPr marL="0" indent="0" algn="ctr">
               <a:buNone/>
             </a:pPr>
             <a:r>
@@ -17101,7 +17990,7 @@
         <p:spPr>
           <a:xfrm>
             <a:off x="6080760" y="3401568"/>
-            <a:ext cx="1947672" cy="-1289304"/>
+            <a:ext cx="1947672" cy="0"/>
           </a:xfrm>
           <a:prstGeom prst="line">
             <a:avLst/>
@@ -17116,6 +18005,13 @@
             <a:tailEnd type="triangle"/>
           </a:ln>
         </p:spPr>
+        <p:txBody>
+          <a:bodyPr/>
+          <a:lstStyle/>
+          <a:p>
+            <a:endParaRPr lang="en-US"/>
+          </a:p>
+        </p:txBody>
       </p:sp>
       <p:sp>
         <p:nvSpPr>
@@ -17145,6 +18041,13 @@
             <a:prstDash val="solid"/>
           </a:ln>
         </p:spPr>
+        <p:txBody>
+          <a:bodyPr/>
+          <a:lstStyle/>
+          <a:p>
+            <a:endParaRPr lang="en-US"/>
+          </a:p>
+        </p:txBody>
       </p:sp>
       <p:sp>
         <p:nvSpPr>
@@ -17169,7 +18072,7 @@
           </a:bodyPr>
           <a:lstStyle/>
           <a:p>
-            <a:pPr algn="ctr" indent="0" marL="0">
+            <a:pPr marL="0" indent="0" algn="ctr">
               <a:buNone/>
             </a:pPr>
             <a:r>
@@ -17211,6 +18114,13 @@
             <a:tailEnd type="triangle"/>
           </a:ln>
         </p:spPr>
+        <p:txBody>
+          <a:bodyPr/>
+          <a:lstStyle/>
+          <a:p>
+            <a:endParaRPr lang="en-US"/>
+          </a:p>
+        </p:txBody>
       </p:sp>
       <p:sp>
         <p:nvSpPr>
@@ -17240,6 +18150,13 @@
             <a:prstDash val="solid"/>
           </a:ln>
         </p:spPr>
+        <p:txBody>
+          <a:bodyPr/>
+          <a:lstStyle/>
+          <a:p>
+            <a:endParaRPr lang="en-US"/>
+          </a:p>
+        </p:txBody>
       </p:sp>
       <p:sp>
         <p:nvSpPr>
@@ -17264,7 +18181,7 @@
           </a:bodyPr>
           <a:lstStyle/>
           <a:p>
-            <a:pPr algn="ctr" indent="0" marL="0">
+            <a:pPr marL="0" indent="0" algn="ctr">
               <a:buNone/>
             </a:pPr>
             <a:r>
@@ -17291,7 +18208,7 @@
         <p:spPr>
           <a:xfrm>
             <a:off x="6080760" y="3401568"/>
-            <a:ext cx="-886968" cy="1453896"/>
+            <a:ext cx="0" cy="1453896"/>
           </a:xfrm>
           <a:prstGeom prst="line">
             <a:avLst/>
@@ -17306,6 +18223,13 @@
             <a:tailEnd type="triangle"/>
           </a:ln>
         </p:spPr>
+        <p:txBody>
+          <a:bodyPr/>
+          <a:lstStyle/>
+          <a:p>
+            <a:endParaRPr lang="en-US"/>
+          </a:p>
+        </p:txBody>
       </p:sp>
       <p:sp>
         <p:nvSpPr>
@@ -17333,6 +18257,13 @@
             <a:prstDash val="solid"/>
           </a:ln>
         </p:spPr>
+        <p:txBody>
+          <a:bodyPr/>
+          <a:lstStyle/>
+          <a:p>
+            <a:endParaRPr lang="en-US"/>
+          </a:p>
+        </p:txBody>
       </p:sp>
       <p:sp>
         <p:nvSpPr>
@@ -17358,6 +18289,13 @@
             <a:prstDash val="solid"/>
           </a:ln>
         </p:spPr>
+        <p:txBody>
+          <a:bodyPr/>
+          <a:lstStyle/>
+          <a:p>
+            <a:endParaRPr lang="en-US"/>
+          </a:p>
+        </p:txBody>
       </p:sp>
       <p:sp>
         <p:nvSpPr>
@@ -17382,7 +18320,7 @@
           </a:bodyPr>
           <a:lstStyle/>
           <a:p>
-            <a:pPr algn="l" indent="0" marL="0">
+            <a:pPr marL="0" indent="0" algn="l">
               <a:buNone/>
             </a:pPr>
             <a:r>
@@ -17423,7 +18361,7 @@
           </a:bodyPr>
           <a:lstStyle/>
           <a:p>
-            <a:pPr algn="l" indent="0" marL="0">
+            <a:pPr marL="0" indent="0" algn="l">
               <a:buNone/>
             </a:pPr>
             <a:r>
@@ -17471,6 +18409,13 @@
             <a:prstDash val="solid"/>
           </a:ln>
         </p:spPr>
+        <p:txBody>
+          <a:bodyPr/>
+          <a:lstStyle/>
+          <a:p>
+            <a:endParaRPr lang="en-US"/>
+          </a:p>
+        </p:txBody>
       </p:sp>
       <p:sp>
         <p:nvSpPr>
@@ -17495,11 +18440,11 @@
           </a:bodyPr>
           <a:lstStyle/>
           <a:p>
-            <a:pPr algn="l" indent="0" marL="0">
-              <a:buNone/>
-            </a:pPr>
-            <a:r>
-              <a:rPr lang="en-US" sz="780" b="1" spc="100" kern="0" dirty="0">
+            <a:pPr marL="0" indent="0" algn="l">
+              <a:buNone/>
+            </a:pPr>
+            <a:r>
+              <a:rPr lang="en-US" sz="780" b="1" kern="0" spc="100" dirty="0">
                 <a:solidFill>
                   <a:srgbClr val="19C3B1"/>
                 </a:solidFill>
@@ -17536,7 +18481,7 @@
           </a:bodyPr>
           <a:lstStyle/>
           <a:p>
-            <a:pPr algn="l" indent="0" marL="0">
+            <a:pPr marL="0" indent="0" algn="l">
               <a:buNone/>
             </a:pPr>
             <a:r>
@@ -17556,7 +18501,7 @@
       </p:sp>
       <p:sp>
         <p:nvSpPr>
-          <p:cNvPr id="25" name="Slide Number Placeholder 0"/>
+          <p:cNvPr id="34" name="Slide Number Placeholder 0"/>
           <p:cNvSpPr>
             <a:spLocks noGrp="1"/>
           </p:cNvSpPr>
@@ -17574,7 +18519,7 @@
           </a:prstGeom>
           <a:extLst>
             <a:ext uri="{C572A759-6A51-4108-AA02-DFA0A04FC94B}">
-              <ma14:wrappingTextBoxFlag xmlns:ma14="http://schemas.microsoft.com/office/mac/drawingml/2011/main" val="0"/>
+              <ma14:wrappingTextBoxFlag xmlns:ma14="http://schemas.microsoft.com/office/mac/drawingml/2011/main" xmlns="" val="0"/>
             </a:ext>
           </a:extLst>
         </p:spPr>
@@ -17595,7 +18540,7 @@
           <a:p>
             <a:pPr algn="r"/>
             <a:fld id="{F7021451-1387-4CA6-816F-3879F97B5CBC}" type="slidenum">
-              <a:rPr b="0" lang="en-US"/>
+              <a:rPr lang="en-US" b="0"/>
               <a:t>4</a:t>
             </a:fld>
             <a:endParaRPr lang="en-US"/>
@@ -17650,11 +18595,11 @@
           </a:bodyPr>
           <a:lstStyle/>
           <a:p>
-            <a:pPr algn="l" indent="0" marL="0">
-              <a:buNone/>
-            </a:pPr>
-            <a:r>
-              <a:rPr lang="en-US" sz="850" b="1" spc="140" kern="0" dirty="0">
+            <a:pPr marL="0" indent="0" algn="l">
+              <a:buNone/>
+            </a:pPr>
+            <a:r>
+              <a:rPr lang="en-US" sz="850" b="1" kern="0" spc="140" dirty="0">
                 <a:solidFill>
                   <a:srgbClr val="19C3B1"/>
                 </a:solidFill>
@@ -17691,7 +18636,7 @@
           </a:bodyPr>
           <a:lstStyle/>
           <a:p>
-            <a:pPr algn="l" indent="0" marL="0">
+            <a:pPr marL="0" indent="0" algn="l">
               <a:buNone/>
             </a:pPr>
             <a:r>
@@ -17732,7 +18677,7 @@
           </a:bodyPr>
           <a:lstStyle/>
           <a:p>
-            <a:pPr algn="l" indent="0" marL="0">
+            <a:pPr marL="0" indent="0" algn="l">
               <a:buNone/>
             </a:pPr>
             <a:r>
@@ -17776,6 +18721,13 @@
             <a:prstDash val="solid"/>
           </a:ln>
         </p:spPr>
+        <p:txBody>
+          <a:bodyPr/>
+          <a:lstStyle/>
+          <a:p>
+            <a:endParaRPr lang="en-US"/>
+          </a:p>
+        </p:txBody>
       </p:sp>
       <p:sp>
         <p:nvSpPr>
@@ -17800,11 +18752,11 @@
           </a:bodyPr>
           <a:lstStyle/>
           <a:p>
-            <a:pPr algn="l" indent="0" marL="0">
-              <a:buNone/>
-            </a:pPr>
-            <a:r>
-              <a:rPr lang="en-US" sz="800" b="1" spc="110" kern="0" dirty="0">
+            <a:pPr marL="0" indent="0" algn="l">
+              <a:buNone/>
+            </a:pPr>
+            <a:r>
+              <a:rPr lang="en-US" sz="800" b="1" kern="0" spc="110" dirty="0">
                 <a:solidFill>
                   <a:srgbClr val="19C3B1"/>
                 </a:solidFill>
@@ -17841,7 +18793,7 @@
           </a:bodyPr>
           <a:lstStyle/>
           <a:p>
-            <a:pPr algn="l" indent="0" marL="0">
+            <a:pPr marL="0" indent="0" algn="l">
               <a:buNone/>
             </a:pPr>
             <a:r>
@@ -17882,7 +18834,7 @@
           </a:bodyPr>
           <a:lstStyle/>
           <a:p>
-            <a:pPr algn="l" indent="0" marL="0">
+            <a:pPr marL="0" indent="0" algn="l">
               <a:buNone/>
             </a:pPr>
             <a:r>
@@ -17923,7 +18875,7 @@
           </a:bodyPr>
           <a:lstStyle/>
           <a:p>
-            <a:pPr algn="l" indent="0" marL="0">
+            <a:pPr marL="0" indent="0" algn="l">
               <a:buNone/>
             </a:pPr>
             <a:r>
@@ -17964,7 +18916,7 @@
           </a:bodyPr>
           <a:lstStyle/>
           <a:p>
-            <a:pPr algn="l" indent="0" marL="0">
+            <a:pPr marL="0" indent="0" algn="l">
               <a:buNone/>
             </a:pPr>
             <a:r>
@@ -18005,7 +18957,7 @@
           </a:bodyPr>
           <a:lstStyle/>
           <a:p>
-            <a:pPr algn="l" indent="0" marL="0">
+            <a:pPr marL="0" indent="0" algn="l">
               <a:buNone/>
             </a:pPr>
             <a:r>
@@ -18049,6 +19001,13 @@
             <a:prstDash val="solid"/>
           </a:ln>
         </p:spPr>
+        <p:txBody>
+          <a:bodyPr/>
+          <a:lstStyle/>
+          <a:p>
+            <a:endParaRPr lang="en-US"/>
+          </a:p>
+        </p:txBody>
       </p:sp>
       <p:sp>
         <p:nvSpPr>
@@ -18074,6 +19033,13 @@
             <a:prstDash val="solid"/>
           </a:ln>
         </p:spPr>
+        <p:txBody>
+          <a:bodyPr/>
+          <a:lstStyle/>
+          <a:p>
+            <a:endParaRPr lang="en-US"/>
+          </a:p>
+        </p:txBody>
       </p:sp>
       <p:sp>
         <p:nvSpPr>
@@ -18098,7 +19064,7 @@
           </a:bodyPr>
           <a:lstStyle/>
           <a:p>
-            <a:pPr algn="l" indent="0" marL="0">
+            <a:pPr marL="0" indent="0" algn="l">
               <a:buNone/>
             </a:pPr>
             <a:r>
@@ -18139,7 +19105,7 @@
           </a:bodyPr>
           <a:lstStyle/>
           <a:p>
-            <a:pPr algn="l" indent="0" marL="0">
+            <a:pPr marL="0" indent="0" algn="l">
               <a:buNone/>
             </a:pPr>
             <a:r>
@@ -18183,6 +19149,13 @@
             <a:prstDash val="solid"/>
           </a:ln>
         </p:spPr>
+        <p:txBody>
+          <a:bodyPr/>
+          <a:lstStyle/>
+          <a:p>
+            <a:endParaRPr lang="en-US"/>
+          </a:p>
+        </p:txBody>
       </p:sp>
       <p:sp>
         <p:nvSpPr>
@@ -18208,6 +19181,13 @@
             <a:prstDash val="solid"/>
           </a:ln>
         </p:spPr>
+        <p:txBody>
+          <a:bodyPr/>
+          <a:lstStyle/>
+          <a:p>
+            <a:endParaRPr lang="en-US"/>
+          </a:p>
+        </p:txBody>
       </p:sp>
       <p:sp>
         <p:nvSpPr>
@@ -18232,7 +19212,7 @@
           </a:bodyPr>
           <a:lstStyle/>
           <a:p>
-            <a:pPr algn="l" indent="0" marL="0">
+            <a:pPr marL="0" indent="0" algn="l">
               <a:buNone/>
             </a:pPr>
             <a:r>
@@ -18273,7 +19253,7 @@
           </a:bodyPr>
           <a:lstStyle/>
           <a:p>
-            <a:pPr algn="l" indent="0" marL="0">
+            <a:pPr marL="0" indent="0" algn="l">
               <a:buNone/>
             </a:pPr>
             <a:r>
@@ -18317,6 +19297,13 @@
             <a:prstDash val="solid"/>
           </a:ln>
         </p:spPr>
+        <p:txBody>
+          <a:bodyPr/>
+          <a:lstStyle/>
+          <a:p>
+            <a:endParaRPr lang="en-US"/>
+          </a:p>
+        </p:txBody>
       </p:sp>
       <p:sp>
         <p:nvSpPr>
@@ -18342,6 +19329,13 @@
             <a:prstDash val="solid"/>
           </a:ln>
         </p:spPr>
+        <p:txBody>
+          <a:bodyPr/>
+          <a:lstStyle/>
+          <a:p>
+            <a:endParaRPr lang="en-US"/>
+          </a:p>
+        </p:txBody>
       </p:sp>
       <p:sp>
         <p:nvSpPr>
@@ -18366,7 +19360,7 @@
           </a:bodyPr>
           <a:lstStyle/>
           <a:p>
-            <a:pPr algn="l" indent="0" marL="0">
+            <a:pPr marL="0" indent="0" algn="l">
               <a:buNone/>
             </a:pPr>
             <a:r>
@@ -18407,7 +19401,7 @@
           </a:bodyPr>
           <a:lstStyle/>
           <a:p>
-            <a:pPr algn="l" indent="0" marL="0">
+            <a:pPr marL="0" indent="0" algn="l">
               <a:buNone/>
             </a:pPr>
             <a:r>
@@ -18451,6 +19445,13 @@
             <a:prstDash val="solid"/>
           </a:ln>
         </p:spPr>
+        <p:txBody>
+          <a:bodyPr/>
+          <a:lstStyle/>
+          <a:p>
+            <a:endParaRPr lang="en-US"/>
+          </a:p>
+        </p:txBody>
       </p:sp>
       <p:sp>
         <p:nvSpPr>
@@ -18476,6 +19477,13 @@
             <a:prstDash val="solid"/>
           </a:ln>
         </p:spPr>
+        <p:txBody>
+          <a:bodyPr/>
+          <a:lstStyle/>
+          <a:p>
+            <a:endParaRPr lang="en-US"/>
+          </a:p>
+        </p:txBody>
       </p:sp>
       <p:sp>
         <p:nvSpPr>
@@ -18500,7 +19508,7 @@
           </a:bodyPr>
           <a:lstStyle/>
           <a:p>
-            <a:pPr algn="l" indent="0" marL="0">
+            <a:pPr marL="0" indent="0" algn="l">
               <a:buNone/>
             </a:pPr>
             <a:r>
@@ -18541,7 +19549,7 @@
           </a:bodyPr>
           <a:lstStyle/>
           <a:p>
-            <a:pPr algn="l" indent="0" marL="0">
+            <a:pPr marL="0" indent="0" algn="l">
               <a:buNone/>
             </a:pPr>
             <a:r>
@@ -18589,6 +19597,13 @@
             <a:prstDash val="solid"/>
           </a:ln>
         </p:spPr>
+        <p:txBody>
+          <a:bodyPr/>
+          <a:lstStyle/>
+          <a:p>
+            <a:endParaRPr lang="en-US"/>
+          </a:p>
+        </p:txBody>
       </p:sp>
       <p:sp>
         <p:nvSpPr>
@@ -18613,11 +19628,11 @@
           </a:bodyPr>
           <a:lstStyle/>
           <a:p>
-            <a:pPr algn="l" indent="0" marL="0">
-              <a:buNone/>
-            </a:pPr>
-            <a:r>
-              <a:rPr lang="en-US" sz="780" b="1" spc="100" kern="0" dirty="0">
+            <a:pPr marL="0" indent="0" algn="l">
+              <a:buNone/>
+            </a:pPr>
+            <a:r>
+              <a:rPr lang="en-US" sz="780" b="1" kern="0" spc="100" dirty="0">
                 <a:solidFill>
                   <a:srgbClr val="19C3B1"/>
                 </a:solidFill>
@@ -18654,7 +19669,7 @@
           </a:bodyPr>
           <a:lstStyle/>
           <a:p>
-            <a:pPr algn="l" indent="0" marL="0">
+            <a:pPr marL="0" indent="0" algn="l">
               <a:buNone/>
             </a:pPr>
             <a:r>
@@ -18674,7 +19689,7 @@
       </p:sp>
       <p:sp>
         <p:nvSpPr>
-          <p:cNvPr id="25" name="Slide Number Placeholder 0"/>
+          <p:cNvPr id="31" name="Slide Number Placeholder 0"/>
           <p:cNvSpPr>
             <a:spLocks noGrp="1"/>
           </p:cNvSpPr>
@@ -18692,7 +19707,7 @@
           </a:prstGeom>
           <a:extLst>
             <a:ext uri="{C572A759-6A51-4108-AA02-DFA0A04FC94B}">
-              <ma14:wrappingTextBoxFlag xmlns:ma14="http://schemas.microsoft.com/office/mac/drawingml/2011/main" val="0"/>
+              <ma14:wrappingTextBoxFlag xmlns:ma14="http://schemas.microsoft.com/office/mac/drawingml/2011/main" xmlns="" val="0"/>
             </a:ext>
           </a:extLst>
         </p:spPr>
@@ -18713,7 +19728,7 @@
           <a:p>
             <a:pPr algn="r"/>
             <a:fld id="{F7021451-1387-4CA6-816F-3879F97B5CBC}" type="slidenum">
-              <a:rPr b="0" lang="en-US"/>
+              <a:rPr lang="en-US" b="0"/>
               <a:t>5</a:t>
             </a:fld>
             <a:endParaRPr lang="en-US"/>
@@ -18768,11 +19783,11 @@
           </a:bodyPr>
           <a:lstStyle/>
           <a:p>
-            <a:pPr algn="l" indent="0" marL="0">
-              <a:buNone/>
-            </a:pPr>
-            <a:r>
-              <a:rPr lang="en-US" sz="850" b="1" spc="140" kern="0" dirty="0">
+            <a:pPr marL="0" indent="0" algn="l">
+              <a:buNone/>
+            </a:pPr>
+            <a:r>
+              <a:rPr lang="en-US" sz="850" b="1" kern="0" spc="140" dirty="0">
                 <a:solidFill>
                   <a:srgbClr val="19C3B1"/>
                 </a:solidFill>
@@ -18809,7 +19824,7 @@
           </a:bodyPr>
           <a:lstStyle/>
           <a:p>
-            <a:pPr algn="l" indent="0" marL="0">
+            <a:pPr marL="0" indent="0" algn="l">
               <a:buNone/>
             </a:pPr>
             <a:r>
@@ -18850,7 +19865,7 @@
           </a:bodyPr>
           <a:lstStyle/>
           <a:p>
-            <a:pPr algn="l" indent="0" marL="0">
+            <a:pPr marL="0" indent="0" algn="l">
               <a:buNone/>
             </a:pPr>
             <a:r>
@@ -18894,6 +19909,13 @@
             <a:prstDash val="solid"/>
           </a:ln>
         </p:spPr>
+        <p:txBody>
+          <a:bodyPr/>
+          <a:lstStyle/>
+          <a:p>
+            <a:endParaRPr lang="en-US"/>
+          </a:p>
+        </p:txBody>
       </p:sp>
       <p:sp>
         <p:nvSpPr>
@@ -18918,7 +19940,7 @@
           </a:bodyPr>
           <a:lstStyle/>
           <a:p>
-            <a:pPr algn="ctr" indent="0" marL="0">
+            <a:pPr marL="0" indent="0" algn="ctr">
               <a:buNone/>
             </a:pPr>
             <a:r>
@@ -18959,7 +19981,7 @@
           </a:bodyPr>
           <a:lstStyle/>
           <a:p>
-            <a:pPr algn="l" indent="0" marL="0">
+            <a:pPr marL="0" indent="0" algn="l">
               <a:buNone/>
             </a:pPr>
             <a:r>
@@ -19000,7 +20022,7 @@
           </a:bodyPr>
           <a:lstStyle/>
           <a:p>
-            <a:pPr algn="l" indent="0" marL="0">
+            <a:pPr marL="0" indent="0" algn="l">
               <a:buNone/>
             </a:pPr>
             <a:r>
@@ -19042,6 +20064,13 @@
             <a:tailEnd type="triangle"/>
           </a:ln>
         </p:spPr>
+        <p:txBody>
+          <a:bodyPr/>
+          <a:lstStyle/>
+          <a:p>
+            <a:endParaRPr lang="en-US"/>
+          </a:p>
+        </p:txBody>
       </p:sp>
       <p:sp>
         <p:nvSpPr>
@@ -19069,6 +20098,13 @@
             <a:prstDash val="solid"/>
           </a:ln>
         </p:spPr>
+        <p:txBody>
+          <a:bodyPr/>
+          <a:lstStyle/>
+          <a:p>
+            <a:endParaRPr lang="en-US"/>
+          </a:p>
+        </p:txBody>
       </p:sp>
       <p:sp>
         <p:nvSpPr>
@@ -19093,7 +20129,7 @@
           </a:bodyPr>
           <a:lstStyle/>
           <a:p>
-            <a:pPr algn="ctr" indent="0" marL="0">
+            <a:pPr marL="0" indent="0" algn="ctr">
               <a:buNone/>
             </a:pPr>
             <a:r>
@@ -19134,7 +20170,7 @@
           </a:bodyPr>
           <a:lstStyle/>
           <a:p>
-            <a:pPr algn="l" indent="0" marL="0">
+            <a:pPr marL="0" indent="0" algn="l">
               <a:buNone/>
             </a:pPr>
             <a:r>
@@ -19175,7 +20211,7 @@
           </a:bodyPr>
           <a:lstStyle/>
           <a:p>
-            <a:pPr algn="l" indent="0" marL="0">
+            <a:pPr marL="0" indent="0" algn="l">
               <a:buNone/>
             </a:pPr>
             <a:r>
@@ -19217,6 +20253,13 @@
             <a:tailEnd type="triangle"/>
           </a:ln>
         </p:spPr>
+        <p:txBody>
+          <a:bodyPr/>
+          <a:lstStyle/>
+          <a:p>
+            <a:endParaRPr lang="en-US"/>
+          </a:p>
+        </p:txBody>
       </p:sp>
       <p:sp>
         <p:nvSpPr>
@@ -19244,6 +20287,13 @@
             <a:prstDash val="solid"/>
           </a:ln>
         </p:spPr>
+        <p:txBody>
+          <a:bodyPr/>
+          <a:lstStyle/>
+          <a:p>
+            <a:endParaRPr lang="en-US"/>
+          </a:p>
+        </p:txBody>
       </p:sp>
       <p:sp>
         <p:nvSpPr>
@@ -19268,7 +20318,7 @@
           </a:bodyPr>
           <a:lstStyle/>
           <a:p>
-            <a:pPr algn="ctr" indent="0" marL="0">
+            <a:pPr marL="0" indent="0" algn="ctr">
               <a:buNone/>
             </a:pPr>
             <a:r>
@@ -19309,7 +20359,7 @@
           </a:bodyPr>
           <a:lstStyle/>
           <a:p>
-            <a:pPr algn="l" indent="0" marL="0">
+            <a:pPr marL="0" indent="0" algn="l">
               <a:buNone/>
             </a:pPr>
             <a:r>
@@ -19350,7 +20400,7 @@
           </a:bodyPr>
           <a:lstStyle/>
           <a:p>
-            <a:pPr algn="l" indent="0" marL="0">
+            <a:pPr marL="0" indent="0" algn="l">
               <a:buNone/>
             </a:pPr>
             <a:r>
@@ -19392,6 +20442,13 @@
             <a:tailEnd type="triangle"/>
           </a:ln>
         </p:spPr>
+        <p:txBody>
+          <a:bodyPr/>
+          <a:lstStyle/>
+          <a:p>
+            <a:endParaRPr lang="en-US"/>
+          </a:p>
+        </p:txBody>
       </p:sp>
       <p:sp>
         <p:nvSpPr>
@@ -19419,6 +20476,13 @@
             <a:prstDash val="solid"/>
           </a:ln>
         </p:spPr>
+        <p:txBody>
+          <a:bodyPr/>
+          <a:lstStyle/>
+          <a:p>
+            <a:endParaRPr lang="en-US"/>
+          </a:p>
+        </p:txBody>
       </p:sp>
       <p:sp>
         <p:nvSpPr>
@@ -19443,7 +20507,7 @@
           </a:bodyPr>
           <a:lstStyle/>
           <a:p>
-            <a:pPr algn="ctr" indent="0" marL="0">
+            <a:pPr marL="0" indent="0" algn="ctr">
               <a:buNone/>
             </a:pPr>
             <a:r>
@@ -19484,7 +20548,7 @@
           </a:bodyPr>
           <a:lstStyle/>
           <a:p>
-            <a:pPr algn="l" indent="0" marL="0">
+            <a:pPr marL="0" indent="0" algn="l">
               <a:buNone/>
             </a:pPr>
             <a:r>
@@ -19525,7 +20589,7 @@
           </a:bodyPr>
           <a:lstStyle/>
           <a:p>
-            <a:pPr algn="l" indent="0" marL="0">
+            <a:pPr marL="0" indent="0" algn="l">
               <a:buNone/>
             </a:pPr>
             <a:r>
@@ -19566,7 +20630,7 @@
           </a:bodyPr>
           <a:lstStyle/>
           <a:p>
-            <a:pPr algn="l" indent="0" marL="0">
+            <a:pPr marL="0" indent="0" algn="l">
               <a:buNone/>
             </a:pPr>
             <a:r>
@@ -19607,7 +20671,7 @@
           </a:bodyPr>
           <a:lstStyle/>
           <a:p>
-            <a:pPr algn="ctr" indent="0" marL="0">
+            <a:pPr marL="0" indent="0" algn="ctr">
               <a:buNone/>
             </a:pPr>
             <a:r>
@@ -19655,6 +20719,13 @@
             <a:prstDash val="solid"/>
           </a:ln>
         </p:spPr>
+        <p:txBody>
+          <a:bodyPr/>
+          <a:lstStyle/>
+          <a:p>
+            <a:endParaRPr lang="en-US"/>
+          </a:p>
+        </p:txBody>
       </p:sp>
       <p:sp>
         <p:nvSpPr>
@@ -19679,11 +20750,11 @@
           </a:bodyPr>
           <a:lstStyle/>
           <a:p>
-            <a:pPr algn="l" indent="0" marL="0">
-              <a:buNone/>
-            </a:pPr>
-            <a:r>
-              <a:rPr lang="en-US" sz="780" b="1" spc="100" kern="0" dirty="0">
+            <a:pPr marL="0" indent="0" algn="l">
+              <a:buNone/>
+            </a:pPr>
+            <a:r>
+              <a:rPr lang="en-US" sz="780" b="1" kern="0" spc="100" dirty="0">
                 <a:solidFill>
                   <a:srgbClr val="19C3B1"/>
                 </a:solidFill>
@@ -19720,7 +20791,7 @@
           </a:bodyPr>
           <a:lstStyle/>
           <a:p>
-            <a:pPr algn="l" indent="0" marL="0">
+            <a:pPr marL="0" indent="0" algn="l">
               <a:buNone/>
             </a:pPr>
             <a:r>
@@ -19740,7 +20811,7 @@
       </p:sp>
       <p:sp>
         <p:nvSpPr>
-          <p:cNvPr id="25" name="Slide Number Placeholder 0"/>
+          <p:cNvPr id="29" name="Slide Number Placeholder 0"/>
           <p:cNvSpPr>
             <a:spLocks noGrp="1"/>
           </p:cNvSpPr>
@@ -19758,7 +20829,7 @@
           </a:prstGeom>
           <a:extLst>
             <a:ext uri="{C572A759-6A51-4108-AA02-DFA0A04FC94B}">
-              <ma14:wrappingTextBoxFlag xmlns:ma14="http://schemas.microsoft.com/office/mac/drawingml/2011/main" val="0"/>
+              <ma14:wrappingTextBoxFlag xmlns:ma14="http://schemas.microsoft.com/office/mac/drawingml/2011/main" xmlns="" val="0"/>
             </a:ext>
           </a:extLst>
         </p:spPr>
@@ -19779,7 +20850,7 @@
           <a:p>
             <a:pPr algn="r"/>
             <a:fld id="{F7021451-1387-4CA6-816F-3879F97B5CBC}" type="slidenum">
-              <a:rPr b="0" lang="en-US"/>
+              <a:rPr lang="en-US" b="0"/>
               <a:t>6</a:t>
             </a:fld>
             <a:endParaRPr lang="en-US"/>
@@ -19834,11 +20905,11 @@
           </a:bodyPr>
           <a:lstStyle/>
           <a:p>
-            <a:pPr algn="l" indent="0" marL="0">
-              <a:buNone/>
-            </a:pPr>
-            <a:r>
-              <a:rPr lang="en-US" sz="850" b="1" spc="140" kern="0" dirty="0">
+            <a:pPr marL="0" indent="0" algn="l">
+              <a:buNone/>
+            </a:pPr>
+            <a:r>
+              <a:rPr lang="en-US" sz="850" b="1" kern="0" spc="140" dirty="0">
                 <a:solidFill>
                   <a:srgbClr val="19C3B1"/>
                 </a:solidFill>
@@ -19875,7 +20946,7 @@
           </a:bodyPr>
           <a:lstStyle/>
           <a:p>
-            <a:pPr algn="l" indent="0" marL="0">
+            <a:pPr marL="0" indent="0" algn="l">
               <a:buNone/>
             </a:pPr>
             <a:r>
@@ -19916,7 +20987,7 @@
           </a:bodyPr>
           <a:lstStyle/>
           <a:p>
-            <a:pPr algn="l" indent="0" marL="0">
+            <a:pPr marL="0" indent="0" algn="l">
               <a:buNone/>
             </a:pPr>
             <a:r>
@@ -19962,6 +21033,13 @@
             <a:prstDash val="solid"/>
           </a:ln>
         </p:spPr>
+        <p:txBody>
+          <a:bodyPr/>
+          <a:lstStyle/>
+          <a:p>
+            <a:endParaRPr lang="en-US"/>
+          </a:p>
+        </p:txBody>
       </p:sp>
       <p:sp>
         <p:nvSpPr>
@@ -19986,7 +21064,7 @@
           </a:bodyPr>
           <a:lstStyle/>
           <a:p>
-            <a:pPr algn="ctr" indent="0" marL="0">
+            <a:pPr marL="0" indent="0" algn="ctr">
               <a:buNone/>
             </a:pPr>
             <a:r>
@@ -20027,7 +21105,7 @@
           </a:bodyPr>
           <a:lstStyle/>
           <a:p>
-            <a:pPr algn="ctr" indent="0" marL="0">
+            <a:pPr marL="0" indent="0" algn="ctr">
               <a:buNone/>
             </a:pPr>
             <a:r>
@@ -20073,6 +21151,13 @@
             <a:prstDash val="solid"/>
           </a:ln>
         </p:spPr>
+        <p:txBody>
+          <a:bodyPr/>
+          <a:lstStyle/>
+          <a:p>
+            <a:endParaRPr lang="en-US"/>
+          </a:p>
+        </p:txBody>
       </p:sp>
       <p:sp>
         <p:nvSpPr>
@@ -20097,7 +21182,7 @@
           </a:bodyPr>
           <a:lstStyle/>
           <a:p>
-            <a:pPr algn="ctr" indent="0" marL="0">
+            <a:pPr marL="0" indent="0" algn="ctr">
               <a:buNone/>
             </a:pPr>
             <a:r>
@@ -20138,7 +21223,7 @@
           </a:bodyPr>
           <a:lstStyle/>
           <a:p>
-            <a:pPr algn="ctr" indent="0" marL="0">
+            <a:pPr marL="0" indent="0" algn="ctr">
               <a:buNone/>
             </a:pPr>
             <a:r>
@@ -20184,6 +21269,13 @@
             <a:prstDash val="solid"/>
           </a:ln>
         </p:spPr>
+        <p:txBody>
+          <a:bodyPr/>
+          <a:lstStyle/>
+          <a:p>
+            <a:endParaRPr lang="en-US"/>
+          </a:p>
+        </p:txBody>
       </p:sp>
       <p:sp>
         <p:nvSpPr>
@@ -20208,7 +21300,7 @@
           </a:bodyPr>
           <a:lstStyle/>
           <a:p>
-            <a:pPr algn="ctr" indent="0" marL="0">
+            <a:pPr marL="0" indent="0" algn="ctr">
               <a:buNone/>
             </a:pPr>
             <a:r>
@@ -20249,7 +21341,7 @@
           </a:bodyPr>
           <a:lstStyle/>
           <a:p>
-            <a:pPr algn="ctr" indent="0" marL="0">
+            <a:pPr marL="0" indent="0" algn="ctr">
               <a:buNone/>
             </a:pPr>
             <a:r>
@@ -20295,6 +21387,13 @@
             <a:prstDash val="solid"/>
           </a:ln>
         </p:spPr>
+        <p:txBody>
+          <a:bodyPr/>
+          <a:lstStyle/>
+          <a:p>
+            <a:endParaRPr lang="en-US"/>
+          </a:p>
+        </p:txBody>
       </p:sp>
       <p:sp>
         <p:nvSpPr>
@@ -20319,7 +21418,7 @@
           </a:bodyPr>
           <a:lstStyle/>
           <a:p>
-            <a:pPr algn="ctr" indent="0" marL="0">
+            <a:pPr marL="0" indent="0" algn="ctr">
               <a:buNone/>
             </a:pPr>
             <a:r>
@@ -20360,7 +21459,7 @@
           </a:bodyPr>
           <a:lstStyle/>
           <a:p>
-            <a:pPr algn="ctr" indent="0" marL="0">
+            <a:pPr marL="0" indent="0" algn="ctr">
               <a:buNone/>
             </a:pPr>
             <a:r>
@@ -20402,6 +21501,13 @@
             <a:tailEnd type="triangle"/>
           </a:ln>
         </p:spPr>
+        <p:txBody>
+          <a:bodyPr/>
+          <a:lstStyle/>
+          <a:p>
+            <a:endParaRPr lang="en-US"/>
+          </a:p>
+        </p:txBody>
       </p:sp>
       <p:sp>
         <p:nvSpPr>
@@ -20427,6 +21533,13 @@
             <a:tailEnd type="triangle"/>
           </a:ln>
         </p:spPr>
+        <p:txBody>
+          <a:bodyPr/>
+          <a:lstStyle/>
+          <a:p>
+            <a:endParaRPr lang="en-US"/>
+          </a:p>
+        </p:txBody>
       </p:sp>
       <p:sp>
         <p:nvSpPr>
@@ -20452,6 +21565,13 @@
             <a:tailEnd type="triangle"/>
           </a:ln>
         </p:spPr>
+        <p:txBody>
+          <a:bodyPr/>
+          <a:lstStyle/>
+          <a:p>
+            <a:endParaRPr lang="en-US"/>
+          </a:p>
+        </p:txBody>
       </p:sp>
       <p:sp>
         <p:nvSpPr>
@@ -20483,6 +21603,13 @@
             <a:prstDash val="solid"/>
           </a:ln>
         </p:spPr>
+        <p:txBody>
+          <a:bodyPr/>
+          <a:lstStyle/>
+          <a:p>
+            <a:endParaRPr lang="en-US"/>
+          </a:p>
+        </p:txBody>
       </p:sp>
       <p:sp>
         <p:nvSpPr>
@@ -20507,7 +21634,7 @@
           </a:bodyPr>
           <a:lstStyle/>
           <a:p>
-            <a:pPr algn="ctr" indent="0" marL="0">
+            <a:pPr marL="0" indent="0" algn="ctr">
               <a:buNone/>
             </a:pPr>
             <a:r>
@@ -20555,6 +21682,13 @@
             <a:prstDash val="solid"/>
           </a:ln>
         </p:spPr>
+        <p:txBody>
+          <a:bodyPr/>
+          <a:lstStyle/>
+          <a:p>
+            <a:endParaRPr lang="en-US"/>
+          </a:p>
+        </p:txBody>
       </p:sp>
       <p:sp>
         <p:nvSpPr>
@@ -20579,7 +21713,7 @@
           </a:bodyPr>
           <a:lstStyle/>
           <a:p>
-            <a:pPr algn="ctr" indent="0" marL="0">
+            <a:pPr marL="0" indent="0" algn="ctr">
               <a:buNone/>
             </a:pPr>
             <a:r>
@@ -20627,6 +21761,13 @@
             <a:prstDash val="solid"/>
           </a:ln>
         </p:spPr>
+        <p:txBody>
+          <a:bodyPr/>
+          <a:lstStyle/>
+          <a:p>
+            <a:endParaRPr lang="en-US"/>
+          </a:p>
+        </p:txBody>
       </p:sp>
       <p:sp>
         <p:nvSpPr>
@@ -20651,7 +21792,7 @@
           </a:bodyPr>
           <a:lstStyle/>
           <a:p>
-            <a:pPr algn="ctr" indent="0" marL="0">
+            <a:pPr marL="0" indent="0" algn="ctr">
               <a:buNone/>
             </a:pPr>
             <a:r>
@@ -20699,6 +21840,13 @@
             <a:prstDash val="solid"/>
           </a:ln>
         </p:spPr>
+        <p:txBody>
+          <a:bodyPr/>
+          <a:lstStyle/>
+          <a:p>
+            <a:endParaRPr lang="en-US"/>
+          </a:p>
+        </p:txBody>
       </p:sp>
       <p:sp>
         <p:nvSpPr>
@@ -20723,7 +21871,7 @@
           </a:bodyPr>
           <a:lstStyle/>
           <a:p>
-            <a:pPr algn="ctr" indent="0" marL="0">
+            <a:pPr marL="0" indent="0" algn="ctr">
               <a:buNone/>
             </a:pPr>
             <a:r>
@@ -20771,6 +21919,13 @@
             <a:prstDash val="solid"/>
           </a:ln>
         </p:spPr>
+        <p:txBody>
+          <a:bodyPr/>
+          <a:lstStyle/>
+          <a:p>
+            <a:endParaRPr lang="en-US"/>
+          </a:p>
+        </p:txBody>
       </p:sp>
       <p:sp>
         <p:nvSpPr>
@@ -20795,7 +21950,7 @@
           </a:bodyPr>
           <a:lstStyle/>
           <a:p>
-            <a:pPr algn="ctr" indent="0" marL="0">
+            <a:pPr marL="0" indent="0" algn="ctr">
               <a:buNone/>
             </a:pPr>
             <a:r>
@@ -20843,6 +21998,13 @@
             <a:prstDash val="solid"/>
           </a:ln>
         </p:spPr>
+        <p:txBody>
+          <a:bodyPr/>
+          <a:lstStyle/>
+          <a:p>
+            <a:endParaRPr lang="en-US"/>
+          </a:p>
+        </p:txBody>
       </p:sp>
       <p:sp>
         <p:nvSpPr>
@@ -20867,7 +22029,7 @@
           </a:bodyPr>
           <a:lstStyle/>
           <a:p>
-            <a:pPr algn="ctr" indent="0" marL="0">
+            <a:pPr marL="0" indent="0" algn="ctr">
               <a:buNone/>
             </a:pPr>
             <a:r>
@@ -20915,6 +22077,13 @@
             <a:prstDash val="solid"/>
           </a:ln>
         </p:spPr>
+        <p:txBody>
+          <a:bodyPr/>
+          <a:lstStyle/>
+          <a:p>
+            <a:endParaRPr lang="en-US"/>
+          </a:p>
+        </p:txBody>
       </p:sp>
       <p:sp>
         <p:nvSpPr>
@@ -20939,7 +22108,7 @@
           </a:bodyPr>
           <a:lstStyle/>
           <a:p>
-            <a:pPr algn="ctr" indent="0" marL="0">
+            <a:pPr marL="0" indent="0" algn="ctr">
               <a:buNone/>
             </a:pPr>
             <a:r>
@@ -20980,7 +22149,7 @@
           </a:bodyPr>
           <a:lstStyle/>
           <a:p>
-            <a:pPr algn="ctr" indent="0" marL="0">
+            <a:pPr marL="0" indent="0" algn="ctr">
               <a:buNone/>
             </a:pPr>
             <a:r>
@@ -21028,6 +22197,13 @@
             <a:prstDash val="solid"/>
           </a:ln>
         </p:spPr>
+        <p:txBody>
+          <a:bodyPr/>
+          <a:lstStyle/>
+          <a:p>
+            <a:endParaRPr lang="en-US"/>
+          </a:p>
+        </p:txBody>
       </p:sp>
       <p:sp>
         <p:nvSpPr>
@@ -21052,11 +22228,11 @@
           </a:bodyPr>
           <a:lstStyle/>
           <a:p>
-            <a:pPr algn="l" indent="0" marL="0">
-              <a:buNone/>
-            </a:pPr>
-            <a:r>
-              <a:rPr lang="en-US" sz="780" b="1" spc="100" kern="0" dirty="0">
+            <a:pPr marL="0" indent="0" algn="l">
+              <a:buNone/>
+            </a:pPr>
+            <a:r>
+              <a:rPr lang="en-US" sz="780" b="1" kern="0" spc="100" dirty="0">
                 <a:solidFill>
                   <a:srgbClr val="19C3B1"/>
                 </a:solidFill>
@@ -21093,7 +22269,7 @@
           </a:bodyPr>
           <a:lstStyle/>
           <a:p>
-            <a:pPr algn="l" indent="0" marL="0">
+            <a:pPr marL="0" indent="0" algn="l">
               <a:buNone/>
             </a:pPr>
             <a:r>
@@ -21113,7 +22289,7 @@
       </p:sp>
       <p:sp>
         <p:nvSpPr>
-          <p:cNvPr id="25" name="Slide Number Placeholder 0"/>
+          <p:cNvPr id="38" name="Slide Number Placeholder 0"/>
           <p:cNvSpPr>
             <a:spLocks noGrp="1"/>
           </p:cNvSpPr>
@@ -21131,7 +22307,7 @@
           </a:prstGeom>
           <a:extLst>
             <a:ext uri="{C572A759-6A51-4108-AA02-DFA0A04FC94B}">
-              <ma14:wrappingTextBoxFlag xmlns:ma14="http://schemas.microsoft.com/office/mac/drawingml/2011/main" val="0"/>
+              <ma14:wrappingTextBoxFlag xmlns:ma14="http://schemas.microsoft.com/office/mac/drawingml/2011/main" xmlns="" val="0"/>
             </a:ext>
           </a:extLst>
         </p:spPr>
@@ -21152,7 +22328,7 @@
           <a:p>
             <a:pPr algn="r"/>
             <a:fld id="{F7021451-1387-4CA6-816F-3879F97B5CBC}" type="slidenum">
-              <a:rPr b="0" lang="en-US"/>
+              <a:rPr lang="en-US" b="0"/>
               <a:t>7</a:t>
             </a:fld>
             <a:endParaRPr lang="en-US"/>
@@ -21207,11 +22383,11 @@
           </a:bodyPr>
           <a:lstStyle/>
           <a:p>
-            <a:pPr algn="l" indent="0" marL="0">
-              <a:buNone/>
-            </a:pPr>
-            <a:r>
-              <a:rPr lang="en-US" sz="850" b="1" spc="140" kern="0" dirty="0">
+            <a:pPr marL="0" indent="0" algn="l">
+              <a:buNone/>
+            </a:pPr>
+            <a:r>
+              <a:rPr lang="en-US" sz="850" b="1" kern="0" spc="140" dirty="0">
                 <a:solidFill>
                   <a:srgbClr val="19C3B1"/>
                 </a:solidFill>
@@ -21248,7 +22424,7 @@
           </a:bodyPr>
           <a:lstStyle/>
           <a:p>
-            <a:pPr algn="l" indent="0" marL="0">
+            <a:pPr marL="0" indent="0" algn="l">
               <a:buNone/>
             </a:pPr>
             <a:r>
@@ -21289,7 +22465,7 @@
           </a:bodyPr>
           <a:lstStyle/>
           <a:p>
-            <a:pPr algn="l" indent="0" marL="0">
+            <a:pPr marL="0" indent="0" algn="l">
               <a:buNone/>
             </a:pPr>
             <a:r>
@@ -21333,6 +22509,13 @@
             <a:prstDash val="solid"/>
           </a:ln>
         </p:spPr>
+        <p:txBody>
+          <a:bodyPr/>
+          <a:lstStyle/>
+          <a:p>
+            <a:endParaRPr lang="en-US"/>
+          </a:p>
+        </p:txBody>
       </p:sp>
       <p:sp>
         <p:nvSpPr>
@@ -21358,6 +22541,13 @@
             <a:prstDash val="solid"/>
           </a:ln>
         </p:spPr>
+        <p:txBody>
+          <a:bodyPr/>
+          <a:lstStyle/>
+          <a:p>
+            <a:endParaRPr lang="en-US"/>
+          </a:p>
+        </p:txBody>
       </p:sp>
       <p:sp>
         <p:nvSpPr>
@@ -21382,7 +22572,7 @@
           </a:bodyPr>
           <a:lstStyle/>
           <a:p>
-            <a:pPr algn="l" indent="0" marL="0">
+            <a:pPr marL="0" indent="0" algn="l">
               <a:buNone/>
             </a:pPr>
             <a:r>
@@ -21423,7 +22613,7 @@
           </a:bodyPr>
           <a:lstStyle/>
           <a:p>
-            <a:pPr algn="l" indent="0" marL="0">
+            <a:pPr marL="0" indent="0" algn="l">
               <a:buNone/>
             </a:pPr>
             <a:r>
@@ -21467,6 +22657,13 @@
             <a:prstDash val="solid"/>
           </a:ln>
         </p:spPr>
+        <p:txBody>
+          <a:bodyPr/>
+          <a:lstStyle/>
+          <a:p>
+            <a:endParaRPr lang="en-US"/>
+          </a:p>
+        </p:txBody>
       </p:sp>
       <p:sp>
         <p:nvSpPr>
@@ -21492,6 +22689,13 @@
             <a:prstDash val="solid"/>
           </a:ln>
         </p:spPr>
+        <p:txBody>
+          <a:bodyPr/>
+          <a:lstStyle/>
+          <a:p>
+            <a:endParaRPr lang="en-US"/>
+          </a:p>
+        </p:txBody>
       </p:sp>
       <p:sp>
         <p:nvSpPr>
@@ -21516,7 +22720,7 @@
           </a:bodyPr>
           <a:lstStyle/>
           <a:p>
-            <a:pPr algn="l" indent="0" marL="0">
+            <a:pPr marL="0" indent="0" algn="l">
               <a:buNone/>
             </a:pPr>
             <a:r>
@@ -21557,7 +22761,7 @@
           </a:bodyPr>
           <a:lstStyle/>
           <a:p>
-            <a:pPr algn="l" indent="0" marL="0">
+            <a:pPr marL="0" indent="0" algn="l">
               <a:buNone/>
             </a:pPr>
             <a:r>
@@ -21601,6 +22805,13 @@
             <a:prstDash val="solid"/>
           </a:ln>
         </p:spPr>
+        <p:txBody>
+          <a:bodyPr/>
+          <a:lstStyle/>
+          <a:p>
+            <a:endParaRPr lang="en-US"/>
+          </a:p>
+        </p:txBody>
       </p:sp>
       <p:sp>
         <p:nvSpPr>
@@ -21626,6 +22837,13 @@
             <a:prstDash val="solid"/>
           </a:ln>
         </p:spPr>
+        <p:txBody>
+          <a:bodyPr/>
+          <a:lstStyle/>
+          <a:p>
+            <a:endParaRPr lang="en-US"/>
+          </a:p>
+        </p:txBody>
       </p:sp>
       <p:sp>
         <p:nvSpPr>
@@ -21650,7 +22868,7 @@
           </a:bodyPr>
           <a:lstStyle/>
           <a:p>
-            <a:pPr algn="l" indent="0" marL="0">
+            <a:pPr marL="0" indent="0" algn="l">
               <a:buNone/>
             </a:pPr>
             <a:r>
@@ -21691,7 +22909,7 @@
           </a:bodyPr>
           <a:lstStyle/>
           <a:p>
-            <a:pPr algn="l" indent="0" marL="0">
+            <a:pPr marL="0" indent="0" algn="l">
               <a:buNone/>
             </a:pPr>
             <a:r>
@@ -21735,6 +22953,13 @@
             <a:prstDash val="solid"/>
           </a:ln>
         </p:spPr>
+        <p:txBody>
+          <a:bodyPr/>
+          <a:lstStyle/>
+          <a:p>
+            <a:endParaRPr lang="en-US"/>
+          </a:p>
+        </p:txBody>
       </p:sp>
       <p:sp>
         <p:nvSpPr>
@@ -21760,6 +22985,13 @@
             <a:prstDash val="solid"/>
           </a:ln>
         </p:spPr>
+        <p:txBody>
+          <a:bodyPr/>
+          <a:lstStyle/>
+          <a:p>
+            <a:endParaRPr lang="en-US"/>
+          </a:p>
+        </p:txBody>
       </p:sp>
       <p:sp>
         <p:nvSpPr>
@@ -21784,7 +23016,7 @@
           </a:bodyPr>
           <a:lstStyle/>
           <a:p>
-            <a:pPr algn="l" indent="0" marL="0">
+            <a:pPr marL="0" indent="0" algn="l">
               <a:buNone/>
             </a:pPr>
             <a:r>
@@ -21825,7 +23057,7 @@
           </a:bodyPr>
           <a:lstStyle/>
           <a:p>
-            <a:pPr algn="l" indent="0" marL="0">
+            <a:pPr marL="0" indent="0" algn="l">
               <a:buNone/>
             </a:pPr>
             <a:r>
@@ -21869,6 +23101,13 @@
             <a:prstDash val="solid"/>
           </a:ln>
         </p:spPr>
+        <p:txBody>
+          <a:bodyPr/>
+          <a:lstStyle/>
+          <a:p>
+            <a:endParaRPr lang="en-US"/>
+          </a:p>
+        </p:txBody>
       </p:sp>
       <p:sp>
         <p:nvSpPr>
@@ -21894,6 +23133,13 @@
             <a:prstDash val="solid"/>
           </a:ln>
         </p:spPr>
+        <p:txBody>
+          <a:bodyPr/>
+          <a:lstStyle/>
+          <a:p>
+            <a:endParaRPr lang="en-US"/>
+          </a:p>
+        </p:txBody>
       </p:sp>
       <p:sp>
         <p:nvSpPr>
@@ -21918,7 +23164,7 @@
           </a:bodyPr>
           <a:lstStyle/>
           <a:p>
-            <a:pPr algn="l" indent="0" marL="0">
+            <a:pPr marL="0" indent="0" algn="l">
               <a:buNone/>
             </a:pPr>
             <a:r>
@@ -21959,7 +23205,7 @@
           </a:bodyPr>
           <a:lstStyle/>
           <a:p>
-            <a:pPr algn="l" indent="0" marL="0">
+            <a:pPr marL="0" indent="0" algn="l">
               <a:buNone/>
             </a:pPr>
             <a:r>
@@ -22003,6 +23249,13 @@
             <a:prstDash val="solid"/>
           </a:ln>
         </p:spPr>
+        <p:txBody>
+          <a:bodyPr/>
+          <a:lstStyle/>
+          <a:p>
+            <a:endParaRPr lang="en-US"/>
+          </a:p>
+        </p:txBody>
       </p:sp>
       <p:sp>
         <p:nvSpPr>
@@ -22028,6 +23281,13 @@
             <a:prstDash val="solid"/>
           </a:ln>
         </p:spPr>
+        <p:txBody>
+          <a:bodyPr/>
+          <a:lstStyle/>
+          <a:p>
+            <a:endParaRPr lang="en-US"/>
+          </a:p>
+        </p:txBody>
       </p:sp>
       <p:sp>
         <p:nvSpPr>
@@ -22052,7 +23312,7 @@
           </a:bodyPr>
           <a:lstStyle/>
           <a:p>
-            <a:pPr algn="l" indent="0" marL="0">
+            <a:pPr marL="0" indent="0" algn="l">
               <a:buNone/>
             </a:pPr>
             <a:r>
@@ -22093,7 +23353,7 @@
           </a:bodyPr>
           <a:lstStyle/>
           <a:p>
-            <a:pPr algn="l" indent="0" marL="0">
+            <a:pPr marL="0" indent="0" algn="l">
               <a:buNone/>
             </a:pPr>
             <a:r>
@@ -22134,7 +23394,7 @@
           </a:bodyPr>
           <a:lstStyle/>
           <a:p>
-            <a:pPr algn="ctr" indent="0" marL="0">
+            <a:pPr marL="0" indent="0" algn="ctr">
               <a:buNone/>
             </a:pPr>
             <a:r>
@@ -22182,6 +23442,13 @@
             <a:prstDash val="solid"/>
           </a:ln>
         </p:spPr>
+        <p:txBody>
+          <a:bodyPr/>
+          <a:lstStyle/>
+          <a:p>
+            <a:endParaRPr lang="en-US"/>
+          </a:p>
+        </p:txBody>
       </p:sp>
       <p:sp>
         <p:nvSpPr>
@@ -22206,11 +23473,11 @@
           </a:bodyPr>
           <a:lstStyle/>
           <a:p>
-            <a:pPr algn="l" indent="0" marL="0">
-              <a:buNone/>
-            </a:pPr>
-            <a:r>
-              <a:rPr lang="en-US" sz="780" b="1" spc="100" kern="0" dirty="0">
+            <a:pPr marL="0" indent="0" algn="l">
+              <a:buNone/>
+            </a:pPr>
+            <a:r>
+              <a:rPr lang="en-US" sz="780" b="1" kern="0" spc="100" dirty="0">
                 <a:solidFill>
                   <a:srgbClr val="19C3B1"/>
                 </a:solidFill>
@@ -22247,7 +23514,7 @@
           </a:bodyPr>
           <a:lstStyle/>
           <a:p>
-            <a:pPr algn="l" indent="0" marL="0">
+            <a:pPr marL="0" indent="0" algn="l">
               <a:buNone/>
             </a:pPr>
             <a:r>
@@ -22267,7 +23534,7 @@
       </p:sp>
       <p:sp>
         <p:nvSpPr>
-          <p:cNvPr id="25" name="Slide Number Placeholder 0"/>
+          <p:cNvPr id="33" name="Slide Number Placeholder 0"/>
           <p:cNvSpPr>
             <a:spLocks noGrp="1"/>
           </p:cNvSpPr>
@@ -22285,7 +23552,7 @@
           </a:prstGeom>
           <a:extLst>
             <a:ext uri="{C572A759-6A51-4108-AA02-DFA0A04FC94B}">
-              <ma14:wrappingTextBoxFlag xmlns:ma14="http://schemas.microsoft.com/office/mac/drawingml/2011/main" val="0"/>
+              <ma14:wrappingTextBoxFlag xmlns:ma14="http://schemas.microsoft.com/office/mac/drawingml/2011/main" xmlns="" val="0"/>
             </a:ext>
           </a:extLst>
         </p:spPr>
@@ -22306,7 +23573,7 @@
           <a:p>
             <a:pPr algn="r"/>
             <a:fld id="{F7021451-1387-4CA6-816F-3879F97B5CBC}" type="slidenum">
-              <a:rPr b="0" lang="en-US"/>
+              <a:rPr lang="en-US" b="0"/>
               <a:t>8</a:t>
             </a:fld>
             <a:endParaRPr lang="en-US"/>
@@ -22361,11 +23628,11 @@
           </a:bodyPr>
           <a:lstStyle/>
           <a:p>
-            <a:pPr algn="l" indent="0" marL="0">
-              <a:buNone/>
-            </a:pPr>
-            <a:r>
-              <a:rPr lang="en-US" sz="850" b="1" spc="140" kern="0" dirty="0">
+            <a:pPr marL="0" indent="0" algn="l">
+              <a:buNone/>
+            </a:pPr>
+            <a:r>
+              <a:rPr lang="en-US" sz="850" b="1" kern="0" spc="140" dirty="0">
                 <a:solidFill>
                   <a:srgbClr val="19C3B1"/>
                 </a:solidFill>
@@ -22402,7 +23669,7 @@
           </a:bodyPr>
           <a:lstStyle/>
           <a:p>
-            <a:pPr algn="l" indent="0" marL="0">
+            <a:pPr marL="0" indent="0" algn="l">
               <a:buNone/>
             </a:pPr>
             <a:r>
@@ -22443,7 +23710,7 @@
           </a:bodyPr>
           <a:lstStyle/>
           <a:p>
-            <a:pPr algn="l" indent="0" marL="0">
+            <a:pPr marL="0" indent="0" algn="l">
               <a:buNone/>
             </a:pPr>
             <a:r>
@@ -22487,6 +23754,13 @@
             <a:prstDash val="solid"/>
           </a:ln>
         </p:spPr>
+        <p:txBody>
+          <a:bodyPr/>
+          <a:lstStyle/>
+          <a:p>
+            <a:endParaRPr lang="en-US"/>
+          </a:p>
+        </p:txBody>
       </p:sp>
       <p:sp>
         <p:nvSpPr>
@@ -22512,6 +23786,13 @@
             <a:prstDash val="solid"/>
           </a:ln>
         </p:spPr>
+        <p:txBody>
+          <a:bodyPr/>
+          <a:lstStyle/>
+          <a:p>
+            <a:endParaRPr lang="en-US"/>
+          </a:p>
+        </p:txBody>
       </p:sp>
       <p:sp>
         <p:nvSpPr>
@@ -22536,7 +23817,7 @@
           </a:bodyPr>
           <a:lstStyle/>
           <a:p>
-            <a:pPr algn="l" indent="0" marL="0">
+            <a:pPr marL="0" indent="0" algn="l">
               <a:buNone/>
             </a:pPr>
             <a:r>
@@ -22577,7 +23858,7 @@
           </a:bodyPr>
           <a:lstStyle/>
           <a:p>
-            <a:pPr algn="l" indent="0" marL="0">
+            <a:pPr marL="0" indent="0" algn="l">
               <a:buNone/>
             </a:pPr>
             <a:r>
@@ -22621,6 +23902,13 @@
             <a:prstDash val="solid"/>
           </a:ln>
         </p:spPr>
+        <p:txBody>
+          <a:bodyPr/>
+          <a:lstStyle/>
+          <a:p>
+            <a:endParaRPr lang="en-US"/>
+          </a:p>
+        </p:txBody>
       </p:sp>
       <p:sp>
         <p:nvSpPr>
@@ -22646,6 +23934,13 @@
             <a:prstDash val="solid"/>
           </a:ln>
         </p:spPr>
+        <p:txBody>
+          <a:bodyPr/>
+          <a:lstStyle/>
+          <a:p>
+            <a:endParaRPr lang="en-US"/>
+          </a:p>
+        </p:txBody>
       </p:sp>
       <p:sp>
         <p:nvSpPr>
@@ -22670,7 +23965,7 @@
           </a:bodyPr>
           <a:lstStyle/>
           <a:p>
-            <a:pPr algn="l" indent="0" marL="0">
+            <a:pPr marL="0" indent="0" algn="l">
               <a:buNone/>
             </a:pPr>
             <a:r>
@@ -22711,7 +24006,7 @@
           </a:bodyPr>
           <a:lstStyle/>
           <a:p>
-            <a:pPr algn="l" indent="0" marL="0">
+            <a:pPr marL="0" indent="0" algn="l">
               <a:buNone/>
             </a:pPr>
             <a:r>
@@ -22755,6 +24050,13 @@
             <a:prstDash val="solid"/>
           </a:ln>
         </p:spPr>
+        <p:txBody>
+          <a:bodyPr/>
+          <a:lstStyle/>
+          <a:p>
+            <a:endParaRPr lang="en-US"/>
+          </a:p>
+        </p:txBody>
       </p:sp>
       <p:sp>
         <p:nvSpPr>
@@ -22780,6 +24082,13 @@
             <a:prstDash val="solid"/>
           </a:ln>
         </p:spPr>
+        <p:txBody>
+          <a:bodyPr/>
+          <a:lstStyle/>
+          <a:p>
+            <a:endParaRPr lang="en-US"/>
+          </a:p>
+        </p:txBody>
       </p:sp>
       <p:sp>
         <p:nvSpPr>
@@ -22804,7 +24113,7 @@
           </a:bodyPr>
           <a:lstStyle/>
           <a:p>
-            <a:pPr algn="l" indent="0" marL="0">
+            <a:pPr marL="0" indent="0" algn="l">
               <a:buNone/>
             </a:pPr>
             <a:r>
@@ -22845,7 +24154,7 @@
           </a:bodyPr>
           <a:lstStyle/>
           <a:p>
-            <a:pPr algn="l" indent="0" marL="0">
+            <a:pPr marL="0" indent="0" algn="l">
               <a:buNone/>
             </a:pPr>
             <a:r>
@@ -22886,7 +24195,7 @@
           </a:bodyPr>
           <a:lstStyle/>
           <a:p>
-            <a:pPr algn="ctr" indent="0" marL="0">
+            <a:pPr marL="0" indent="0" algn="ctr">
               <a:buNone/>
             </a:pPr>
             <a:r>
@@ -22927,7 +24236,7 @@
           </a:bodyPr>
           <a:lstStyle/>
           <a:p>
-            <a:pPr algn="ctr" indent="0" marL="0">
+            <a:pPr marL="0" indent="0" algn="ctr">
               <a:buNone/>
             </a:pPr>
             <a:r>
@@ -22968,7 +24277,7 @@
           </a:bodyPr>
           <a:lstStyle/>
           <a:p>
-            <a:pPr algn="ctr" indent="0" marL="0">
+            <a:pPr marL="0" indent="0" algn="ctr">
               <a:buNone/>
             </a:pPr>
             <a:r>
@@ -23009,7 +24318,7 @@
           </a:bodyPr>
           <a:lstStyle/>
           <a:p>
-            <a:pPr algn="ctr" indent="0" marL="0">
+            <a:pPr marL="0" indent="0" algn="ctr">
               <a:buNone/>
             </a:pPr>
             <a:r>
@@ -23050,7 +24359,7 @@
           </a:bodyPr>
           <a:lstStyle/>
           <a:p>
-            <a:pPr algn="ctr" indent="0" marL="0">
+            <a:pPr marL="0" indent="0" algn="ctr">
               <a:buNone/>
             </a:pPr>
             <a:r>
@@ -23091,7 +24400,7 @@
           </a:bodyPr>
           <a:lstStyle/>
           <a:p>
-            <a:pPr algn="ctr" indent="0" marL="0">
+            <a:pPr marL="0" indent="0" algn="ctr">
               <a:buNone/>
             </a:pPr>
             <a:r>
@@ -23137,6 +24446,13 @@
             <a:prstDash val="solid"/>
           </a:ln>
         </p:spPr>
+        <p:txBody>
+          <a:bodyPr/>
+          <a:lstStyle/>
+          <a:p>
+            <a:endParaRPr lang="en-US"/>
+          </a:p>
+        </p:txBody>
       </p:sp>
       <p:sp>
         <p:nvSpPr>
@@ -23161,7 +24477,7 @@
           </a:bodyPr>
           <a:lstStyle/>
           <a:p>
-            <a:pPr algn="ctr" indent="0" marL="0">
+            <a:pPr marL="0" indent="0" algn="ctr">
               <a:buNone/>
             </a:pPr>
             <a:r>
@@ -23202,7 +24518,7 @@
           </a:bodyPr>
           <a:lstStyle/>
           <a:p>
-            <a:pPr algn="ctr" indent="0" marL="0">
+            <a:pPr marL="0" indent="0" algn="ctr">
               <a:buNone/>
             </a:pPr>
             <a:r>
@@ -23250,6 +24566,13 @@
             <a:prstDash val="solid"/>
           </a:ln>
         </p:spPr>
+        <p:txBody>
+          <a:bodyPr/>
+          <a:lstStyle/>
+          <a:p>
+            <a:endParaRPr lang="en-US"/>
+          </a:p>
+        </p:txBody>
       </p:sp>
       <p:sp>
         <p:nvSpPr>
@@ -23274,11 +24597,11 @@
           </a:bodyPr>
           <a:lstStyle/>
           <a:p>
-            <a:pPr algn="l" indent="0" marL="0">
-              <a:buNone/>
-            </a:pPr>
-            <a:r>
-              <a:rPr lang="en-US" sz="780" b="1" spc="100" kern="0" dirty="0">
+            <a:pPr marL="0" indent="0" algn="l">
+              <a:buNone/>
+            </a:pPr>
+            <a:r>
+              <a:rPr lang="en-US" sz="780" b="1" kern="0" spc="100" dirty="0">
                 <a:solidFill>
                   <a:srgbClr val="19C3B1"/>
                 </a:solidFill>
@@ -23315,7 +24638,7 @@
           </a:bodyPr>
           <a:lstStyle/>
           <a:p>
-            <a:pPr algn="l" indent="0" marL="0">
+            <a:pPr marL="0" indent="0" algn="l">
               <a:buNone/>
             </a:pPr>
             <a:r>
@@ -23335,7 +24658,7 @@
       </p:sp>
       <p:sp>
         <p:nvSpPr>
-          <p:cNvPr id="25" name="Slide Number Placeholder 0"/>
+          <p:cNvPr id="29" name="Slide Number Placeholder 0"/>
           <p:cNvSpPr>
             <a:spLocks noGrp="1"/>
           </p:cNvSpPr>
@@ -23353,7 +24676,7 @@
           </a:prstGeom>
           <a:extLst>
             <a:ext uri="{C572A759-6A51-4108-AA02-DFA0A04FC94B}">
-              <ma14:wrappingTextBoxFlag xmlns:ma14="http://schemas.microsoft.com/office/mac/drawingml/2011/main" val="0"/>
+              <ma14:wrappingTextBoxFlag xmlns:ma14="http://schemas.microsoft.com/office/mac/drawingml/2011/main" xmlns="" val="0"/>
             </a:ext>
           </a:extLst>
         </p:spPr>
@@ -23374,7 +24697,7 @@
           <a:p>
             <a:pPr algn="r"/>
             <a:fld id="{F7021451-1387-4CA6-816F-3879F97B5CBC}" type="slidenum">
-              <a:rPr b="0" lang="en-US"/>
+              <a:rPr lang="en-US" b="0"/>
               <a:t>9</a:t>
             </a:fld>
             <a:endParaRPr lang="en-US"/>
@@ -23682,4 +25005,319 @@
     </a:ext>
   </a:extLst>
 </a:theme>
+</file>
+
+<file path=ppt/theme/theme2.xml><?xml version="1.0" encoding="utf-8"?>
+<a:theme xmlns:a="http://schemas.openxmlformats.org/drawingml/2006/main" name="Office Theme">
+  <a:themeElements>
+    <a:clrScheme name="Office">
+      <a:dk1>
+        <a:sysClr val="windowText" lastClr="000000"/>
+      </a:dk1>
+      <a:lt1>
+        <a:sysClr val="window" lastClr="FFFFFF"/>
+      </a:lt1>
+      <a:dk2>
+        <a:srgbClr val="0E2841"/>
+      </a:dk2>
+      <a:lt2>
+        <a:srgbClr val="E8E8E8"/>
+      </a:lt2>
+      <a:accent1>
+        <a:srgbClr val="156082"/>
+      </a:accent1>
+      <a:accent2>
+        <a:srgbClr val="E97132"/>
+      </a:accent2>
+      <a:accent3>
+        <a:srgbClr val="196B24"/>
+      </a:accent3>
+      <a:accent4>
+        <a:srgbClr val="0F9ED5"/>
+      </a:accent4>
+      <a:accent5>
+        <a:srgbClr val="A02B93"/>
+      </a:accent5>
+      <a:accent6>
+        <a:srgbClr val="4EA72E"/>
+      </a:accent6>
+      <a:hlink>
+        <a:srgbClr val="467886"/>
+      </a:hlink>
+      <a:folHlink>
+        <a:srgbClr val="96607D"/>
+      </a:folHlink>
+    </a:clrScheme>
+    <a:fontScheme name="Office">
+      <a:majorFont>
+        <a:latin typeface="Aptos Display" panose="02110004020202020204"/>
+        <a:ea typeface=""/>
+        <a:cs typeface=""/>
+        <a:font script="Jpan" typeface="游ゴシック Light"/>
+        <a:font script="Hang" typeface="맑은 고딕"/>
+        <a:font script="Hans" typeface="等线 Light"/>
+        <a:font script="Hant" typeface="新細明體"/>
+        <a:font script="Arab" typeface="Times New Roman"/>
+        <a:font script="Hebr" typeface="Times New Roman"/>
+        <a:font script="Thai" typeface="Angsana New"/>
+        <a:font script="Ethi" typeface="Nyala"/>
+        <a:font script="Beng" typeface="Vrinda"/>
+        <a:font script="Gujr" typeface="Shruti"/>
+        <a:font script="Khmr" typeface="MoolBoran"/>
+        <a:font script="Knda" typeface="Tunga"/>
+        <a:font script="Guru" typeface="Raavi"/>
+        <a:font script="Cans" typeface="Euphemia"/>
+        <a:font script="Cher" typeface="Plantagenet Cherokee"/>
+        <a:font script="Yiii" typeface="Microsoft Yi Baiti"/>
+        <a:font script="Tibt" typeface="Microsoft Himalaya"/>
+        <a:font script="Thaa" typeface="MV Boli"/>
+        <a:font script="Deva" typeface="Mangal"/>
+        <a:font script="Telu" typeface="Gautami"/>
+        <a:font script="Taml" typeface="Latha"/>
+        <a:font script="Syrc" typeface="Estrangelo Edessa"/>
+        <a:font script="Orya" typeface="Kalinga"/>
+        <a:font script="Mlym" typeface="Kartika"/>
+        <a:font script="Laoo" typeface="DokChampa"/>
+        <a:font script="Sinh" typeface="Iskoola Pota"/>
+        <a:font script="Mong" typeface="Mongolian Baiti"/>
+        <a:font script="Viet" typeface="Times New Roman"/>
+        <a:font script="Uigh" typeface="Microsoft Uighur"/>
+        <a:font script="Geor" typeface="Sylfaen"/>
+        <a:font script="Armn" typeface="Arial"/>
+        <a:font script="Bugi" typeface="Leelawadee UI"/>
+        <a:font script="Bopo" typeface="Microsoft JhengHei"/>
+        <a:font script="Java" typeface="Javanese Text"/>
+        <a:font script="Lisu" typeface="Segoe UI"/>
+        <a:font script="Mymr" typeface="Myanmar Text"/>
+        <a:font script="Nkoo" typeface="Ebrima"/>
+        <a:font script="Olck" typeface="Nirmala UI"/>
+        <a:font script="Osma" typeface="Ebrima"/>
+        <a:font script="Phag" typeface="Phagspa"/>
+        <a:font script="Syrn" typeface="Estrangelo Edessa"/>
+        <a:font script="Syrj" typeface="Estrangelo Edessa"/>
+        <a:font script="Syre" typeface="Estrangelo Edessa"/>
+        <a:font script="Sora" typeface="Nirmala UI"/>
+        <a:font script="Tale" typeface="Microsoft Tai Le"/>
+        <a:font script="Talu" typeface="Microsoft New Tai Lue"/>
+        <a:font script="Tfng" typeface="Ebrima"/>
+      </a:majorFont>
+      <a:minorFont>
+        <a:latin typeface="Aptos" panose="02110004020202020204"/>
+        <a:ea typeface=""/>
+        <a:cs typeface=""/>
+        <a:font script="Jpan" typeface="游ゴシック"/>
+        <a:font script="Hang" typeface="맑은 고딕"/>
+        <a:font script="Hans" typeface="等线"/>
+        <a:font script="Hant" typeface="新細明體"/>
+        <a:font script="Arab" typeface="Arial"/>
+        <a:font script="Hebr" typeface="Arial"/>
+        <a:font script="Thai" typeface="Cordia New"/>
+        <a:font script="Ethi" typeface="Nyala"/>
+        <a:font script="Beng" typeface="Vrinda"/>
+        <a:font script="Gujr" typeface="Shruti"/>
+        <a:font script="Khmr" typeface="DaunPenh"/>
+        <a:font script="Knda" typeface="Tunga"/>
+        <a:font script="Guru" typeface="Raavi"/>
+        <a:font script="Cans" typeface="Euphemia"/>
+        <a:font script="Cher" typeface="Plantagenet Cherokee"/>
+        <a:font script="Yiii" typeface="Microsoft Yi Baiti"/>
+        <a:font script="Tibt" typeface="Microsoft Himalaya"/>
+        <a:font script="Thaa" typeface="MV Boli"/>
+        <a:font script="Deva" typeface="Mangal"/>
+        <a:font script="Telu" typeface="Gautami"/>
+        <a:font script="Taml" typeface="Latha"/>
+        <a:font script="Syrc" typeface="Estrangelo Edessa"/>
+        <a:font script="Orya" typeface="Kalinga"/>
+        <a:font script="Mlym" typeface="Kartika"/>
+        <a:font script="Laoo" typeface="DokChampa"/>
+        <a:font script="Sinh" typeface="Iskoola Pota"/>
+        <a:font script="Mong" typeface="Mongolian Baiti"/>
+        <a:font script="Viet" typeface="Arial"/>
+        <a:font script="Uigh" typeface="Microsoft Uighur"/>
+        <a:font script="Geor" typeface="Sylfaen"/>
+        <a:font script="Armn" typeface="Arial"/>
+        <a:font script="Bugi" typeface="Leelawadee UI"/>
+        <a:font script="Bopo" typeface="Microsoft JhengHei"/>
+        <a:font script="Java" typeface="Javanese Text"/>
+        <a:font script="Lisu" typeface="Segoe UI"/>
+        <a:font script="Mymr" typeface="Myanmar Text"/>
+        <a:font script="Nkoo" typeface="Ebrima"/>
+        <a:font script="Olck" typeface="Nirmala UI"/>
+        <a:font script="Osma" typeface="Ebrima"/>
+        <a:font script="Phag" typeface="Phagspa"/>
+        <a:font script="Syrn" typeface="Estrangelo Edessa"/>
+        <a:font script="Syrj" typeface="Estrangelo Edessa"/>
+        <a:font script="Syre" typeface="Estrangelo Edessa"/>
+        <a:font script="Sora" typeface="Nirmala UI"/>
+        <a:font script="Tale" typeface="Microsoft Tai Le"/>
+        <a:font script="Talu" typeface="Microsoft New Tai Lue"/>
+        <a:font script="Tfng" typeface="Ebrima"/>
+      </a:minorFont>
+    </a:fontScheme>
+    <a:fmtScheme name="Office">
+      <a:fillStyleLst>
+        <a:solidFill>
+          <a:schemeClr val="phClr"/>
+        </a:solidFill>
+        <a:gradFill rotWithShape="1">
+          <a:gsLst>
+            <a:gs pos="0">
+              <a:schemeClr val="phClr">
+                <a:lumMod val="110000"/>
+                <a:satMod val="105000"/>
+                <a:tint val="67000"/>
+              </a:schemeClr>
+            </a:gs>
+            <a:gs pos="50000">
+              <a:schemeClr val="phClr">
+                <a:lumMod val="105000"/>
+                <a:satMod val="103000"/>
+                <a:tint val="73000"/>
+              </a:schemeClr>
+            </a:gs>
+            <a:gs pos="100000">
+              <a:schemeClr val="phClr">
+                <a:lumMod val="105000"/>
+                <a:satMod val="109000"/>
+                <a:tint val="81000"/>
+              </a:schemeClr>
+            </a:gs>
+          </a:gsLst>
+          <a:lin ang="5400000" scaled="0"/>
+        </a:gradFill>
+        <a:gradFill rotWithShape="1">
+          <a:gsLst>
+            <a:gs pos="0">
+              <a:schemeClr val="phClr">
+                <a:satMod val="103000"/>
+                <a:lumMod val="102000"/>
+                <a:tint val="94000"/>
+              </a:schemeClr>
+            </a:gs>
+            <a:gs pos="50000">
+              <a:schemeClr val="phClr">
+                <a:satMod val="110000"/>
+                <a:lumMod val="100000"/>
+                <a:shade val="100000"/>
+              </a:schemeClr>
+            </a:gs>
+            <a:gs pos="100000">
+              <a:schemeClr val="phClr">
+                <a:lumMod val="99000"/>
+                <a:satMod val="120000"/>
+                <a:shade val="78000"/>
+              </a:schemeClr>
+            </a:gs>
+          </a:gsLst>
+          <a:lin ang="5400000" scaled="0"/>
+        </a:gradFill>
+      </a:fillStyleLst>
+      <a:lnStyleLst>
+        <a:ln w="12700" cap="flat" cmpd="sng" algn="ctr">
+          <a:solidFill>
+            <a:schemeClr val="phClr"/>
+          </a:solidFill>
+          <a:prstDash val="solid"/>
+          <a:miter lim="800000"/>
+        </a:ln>
+        <a:ln w="19050" cap="flat" cmpd="sng" algn="ctr">
+          <a:solidFill>
+            <a:schemeClr val="phClr"/>
+          </a:solidFill>
+          <a:prstDash val="solid"/>
+          <a:miter lim="800000"/>
+        </a:ln>
+        <a:ln w="25400" cap="flat" cmpd="sng" algn="ctr">
+          <a:solidFill>
+            <a:schemeClr val="phClr"/>
+          </a:solidFill>
+          <a:prstDash val="solid"/>
+          <a:miter lim="800000"/>
+        </a:ln>
+      </a:lnStyleLst>
+      <a:effectStyleLst>
+        <a:effectStyle>
+          <a:effectLst/>
+        </a:effectStyle>
+        <a:effectStyle>
+          <a:effectLst/>
+        </a:effectStyle>
+        <a:effectStyle>
+          <a:effectLst>
+            <a:outerShdw blurRad="57150" dist="19050" dir="5400000" algn="ctr" rotWithShape="0">
+              <a:srgbClr val="000000">
+                <a:alpha val="63000"/>
+              </a:srgbClr>
+            </a:outerShdw>
+          </a:effectLst>
+        </a:effectStyle>
+      </a:effectStyleLst>
+      <a:bgFillStyleLst>
+        <a:solidFill>
+          <a:schemeClr val="phClr"/>
+        </a:solidFill>
+        <a:solidFill>
+          <a:schemeClr val="phClr">
+            <a:tint val="95000"/>
+            <a:satMod val="170000"/>
+          </a:schemeClr>
+        </a:solidFill>
+        <a:gradFill rotWithShape="1">
+          <a:gsLst>
+            <a:gs pos="0">
+              <a:schemeClr val="phClr">
+                <a:tint val="93000"/>
+                <a:satMod val="150000"/>
+                <a:shade val="98000"/>
+                <a:lumMod val="102000"/>
+              </a:schemeClr>
+            </a:gs>
+            <a:gs pos="50000">
+              <a:schemeClr val="phClr">
+                <a:tint val="98000"/>
+                <a:satMod val="130000"/>
+                <a:shade val="90000"/>
+                <a:lumMod val="103000"/>
+              </a:schemeClr>
+            </a:gs>
+            <a:gs pos="100000">
+              <a:schemeClr val="phClr">
+                <a:shade val="63000"/>
+                <a:satMod val="120000"/>
+              </a:schemeClr>
+            </a:gs>
+          </a:gsLst>
+          <a:lin ang="5400000" scaled="0"/>
+        </a:gradFill>
+      </a:bgFillStyleLst>
+    </a:fmtScheme>
+  </a:themeElements>
+  <a:objectDefaults>
+    <a:lnDef>
+      <a:spPr/>
+      <a:bodyPr/>
+      <a:lstStyle/>
+      <a:style>
+        <a:lnRef idx="2">
+          <a:schemeClr val="accent1"/>
+        </a:lnRef>
+        <a:fillRef idx="0">
+          <a:schemeClr val="accent1"/>
+        </a:fillRef>
+        <a:effectRef idx="1">
+          <a:schemeClr val="accent1"/>
+        </a:effectRef>
+        <a:fontRef idx="minor">
+          <a:schemeClr val="tx1"/>
+        </a:fontRef>
+      </a:style>
+    </a:lnDef>
+  </a:objectDefaults>
+  <a:extraClrSchemeLst/>
+  <a:extLst>
+    <a:ext uri="{05A4C25C-085E-4340-85A3-A5531E510DB2}">
+      <thm15:themeFamily xmlns:thm15="http://schemas.microsoft.com/office/thememl/2012/main" name="Office Theme" id="{2E142A2C-CD16-42D6-873A-C26D2A0506FA}" vid="{1BDDFF52-6CD6-40A5-AB3C-68EB2F1E4D0A}"/>
+    </a:ext>
+  </a:extLst>
+</a:theme>
 </file>